--- a/slides/code-jam.pptx
+++ b/slides/code-jam.pptx
@@ -28,23 +28,26 @@
     <p:sldId id="273" r:id="rId23"/>
     <p:sldId id="274" r:id="rId24"/>
     <p:sldId id="275" r:id="rId25"/>
+    <p:sldId id="276" r:id="rId26"/>
+    <p:sldId id="277" r:id="rId27"/>
+    <p:sldId id="278" r:id="rId28"/>
   </p:sldIdLst>
   <p:sldSz cy="5143500" cx="9144000"/>
   <p:notesSz cx="6858000" cy="9144000"/>
   <p:embeddedFontLst>
     <p:embeddedFont>
       <p:font typeface="Google Sans"/>
-      <p:regular r:id="rId26"/>
-      <p:bold r:id="rId27"/>
-      <p:italic r:id="rId28"/>
-      <p:boldItalic r:id="rId29"/>
+      <p:regular r:id="rId29"/>
+      <p:bold r:id="rId30"/>
+      <p:italic r:id="rId31"/>
+      <p:boldItalic r:id="rId32"/>
     </p:embeddedFont>
     <p:embeddedFont>
       <p:font typeface="Roboto Mono"/>
-      <p:regular r:id="rId30"/>
-      <p:bold r:id="rId31"/>
-      <p:italic r:id="rId32"/>
-      <p:boldItalic r:id="rId33"/>
+      <p:regular r:id="rId33"/>
+      <p:bold r:id="rId34"/>
+      <p:italic r:id="rId35"/>
+      <p:boldItalic r:id="rId36"/>
     </p:embeddedFont>
   </p:embeddedFontLst>
   <p:defaultTextStyle>
@@ -825,7 +828,7 @@
   <p:cSld>
     <p:spTree>
       <p:nvGrpSpPr>
-        <p:cNvPr id="152" name="Shape 152"/>
+        <p:cNvPr id="143" name="Shape 143"/>
         <p:cNvGrpSpPr/>
         <p:nvPr/>
       </p:nvGrpSpPr>
@@ -839,7 +842,7 @@
       </p:grpSpPr>
       <p:sp>
         <p:nvSpPr>
-          <p:cNvPr id="153" name="Google Shape;153;jam07:notes"/>
+          <p:cNvPr id="144" name="Google Shape;144;jamcl:notes"/>
           <p:cNvSpPr/>
           <p:nvPr>
             <p:ph idx="2" type="sldImg"/>
@@ -874,7 +877,7 @@
       </p:sp>
       <p:sp>
         <p:nvSpPr>
-          <p:cNvPr id="154" name="Google Shape;154;jam07:notes"/>
+          <p:cNvPr id="145" name="Google Shape;145;jamcl:notes"/>
           <p:cNvSpPr txBox="1"/>
           <p:nvPr>
             <p:ph idx="1" type="body"/>
@@ -924,7 +927,7 @@
   <p:cSld>
     <p:spTree>
       <p:nvGrpSpPr>
-        <p:cNvPr id="163" name="Shape 163"/>
+        <p:cNvPr id="158" name="Shape 158"/>
         <p:cNvGrpSpPr/>
         <p:nvPr/>
       </p:nvGrpSpPr>
@@ -938,7 +941,7 @@
       </p:grpSpPr>
       <p:sp>
         <p:nvSpPr>
-          <p:cNvPr id="164" name="Google Shape;164;jam08:notes"/>
+          <p:cNvPr id="159" name="Google Shape;159;jam06:notes"/>
           <p:cNvSpPr/>
           <p:nvPr>
             <p:ph idx="2" type="sldImg"/>
@@ -973,7 +976,7 @@
       </p:sp>
       <p:sp>
         <p:nvSpPr>
-          <p:cNvPr id="165" name="Google Shape;165;jam08:notes"/>
+          <p:cNvPr id="160" name="Google Shape;160;jam06:notes"/>
           <p:cNvSpPr txBox="1"/>
           <p:nvPr>
             <p:ph idx="1" type="body"/>
@@ -1023,7 +1026,7 @@
   <p:cSld>
     <p:spTree>
       <p:nvGrpSpPr>
-        <p:cNvPr id="174" name="Shape 174"/>
+        <p:cNvPr id="169" name="Shape 169"/>
         <p:cNvGrpSpPr/>
         <p:nvPr/>
       </p:nvGrpSpPr>
@@ -1037,7 +1040,7 @@
       </p:grpSpPr>
       <p:sp>
         <p:nvSpPr>
-          <p:cNvPr id="175" name="Google Shape;175;jam09:notes"/>
+          <p:cNvPr id="170" name="Google Shape;170;jam6b:notes"/>
           <p:cNvSpPr/>
           <p:nvPr>
             <p:ph idx="2" type="sldImg"/>
@@ -1072,7 +1075,7 @@
       </p:sp>
       <p:sp>
         <p:nvSpPr>
-          <p:cNvPr id="176" name="Google Shape;176;jam09:notes"/>
+          <p:cNvPr id="171" name="Google Shape;171;jam6b:notes"/>
           <p:cNvSpPr txBox="1"/>
           <p:nvPr>
             <p:ph idx="1" type="body"/>
@@ -1122,7 +1125,7 @@
   <p:cSld>
     <p:spTree>
       <p:nvGrpSpPr>
-        <p:cNvPr id="185" name="Shape 185"/>
+        <p:cNvPr id="180" name="Shape 180"/>
         <p:cNvGrpSpPr/>
         <p:nvPr/>
       </p:nvGrpSpPr>
@@ -1136,7 +1139,7 @@
       </p:grpSpPr>
       <p:sp>
         <p:nvSpPr>
-          <p:cNvPr id="186" name="Google Shape;186;jam10:notes"/>
+          <p:cNvPr id="181" name="Google Shape;181;jam07:notes"/>
           <p:cNvSpPr/>
           <p:nvPr>
             <p:ph idx="2" type="sldImg"/>
@@ -1171,7 +1174,7 @@
       </p:sp>
       <p:sp>
         <p:nvSpPr>
-          <p:cNvPr id="187" name="Google Shape;187;jam10:notes"/>
+          <p:cNvPr id="182" name="Google Shape;182;jam07:notes"/>
           <p:cNvSpPr txBox="1"/>
           <p:nvPr>
             <p:ph idx="1" type="body"/>
@@ -1221,7 +1224,7 @@
   <p:cSld>
     <p:spTree>
       <p:nvGrpSpPr>
-        <p:cNvPr id="196" name="Shape 196"/>
+        <p:cNvPr id="191" name="Shape 191"/>
         <p:cNvGrpSpPr/>
         <p:nvPr/>
       </p:nvGrpSpPr>
@@ -1235,7 +1238,7 @@
       </p:grpSpPr>
       <p:sp>
         <p:nvSpPr>
-          <p:cNvPr id="197" name="Google Shape;197;jam11:notes"/>
+          <p:cNvPr id="192" name="Google Shape;192;jam08:notes"/>
           <p:cNvSpPr/>
           <p:nvPr>
             <p:ph idx="2" type="sldImg"/>
@@ -1270,7 +1273,7 @@
       </p:sp>
       <p:sp>
         <p:nvSpPr>
-          <p:cNvPr id="198" name="Google Shape;198;jam11:notes"/>
+          <p:cNvPr id="193" name="Google Shape;193;jam08:notes"/>
           <p:cNvSpPr txBox="1"/>
           <p:nvPr>
             <p:ph idx="1" type="body"/>
@@ -1320,7 +1323,7 @@
   <p:cSld>
     <p:spTree>
       <p:nvGrpSpPr>
-        <p:cNvPr id="207" name="Shape 207"/>
+        <p:cNvPr id="202" name="Shape 202"/>
         <p:cNvGrpSpPr/>
         <p:nvPr/>
       </p:nvGrpSpPr>
@@ -1334,7 +1337,7 @@
       </p:grpSpPr>
       <p:sp>
         <p:nvSpPr>
-          <p:cNvPr id="208" name="Google Shape;208;jam12:notes"/>
+          <p:cNvPr id="203" name="Google Shape;203;jam09:notes"/>
           <p:cNvSpPr/>
           <p:nvPr>
             <p:ph idx="2" type="sldImg"/>
@@ -1369,7 +1372,7 @@
       </p:sp>
       <p:sp>
         <p:nvSpPr>
-          <p:cNvPr id="209" name="Google Shape;209;jam12:notes"/>
+          <p:cNvPr id="204" name="Google Shape;204;jam09:notes"/>
           <p:cNvSpPr txBox="1"/>
           <p:nvPr>
             <p:ph idx="1" type="body"/>
@@ -1419,7 +1422,7 @@
   <p:cSld>
     <p:spTree>
       <p:nvGrpSpPr>
-        <p:cNvPr id="218" name="Shape 218"/>
+        <p:cNvPr id="213" name="Shape 213"/>
         <p:cNvGrpSpPr/>
         <p:nvPr/>
       </p:nvGrpSpPr>
@@ -1433,7 +1436,7 @@
       </p:grpSpPr>
       <p:sp>
         <p:nvSpPr>
-          <p:cNvPr id="219" name="Google Shape;219;jam13:notes"/>
+          <p:cNvPr id="214" name="Google Shape;214;jam10:notes"/>
           <p:cNvSpPr/>
           <p:nvPr>
             <p:ph idx="2" type="sldImg"/>
@@ -1468,7 +1471,7 @@
       </p:sp>
       <p:sp>
         <p:nvSpPr>
-          <p:cNvPr id="220" name="Google Shape;220;jam13:notes"/>
+          <p:cNvPr id="215" name="Google Shape;215;jam10:notes"/>
           <p:cNvSpPr txBox="1"/>
           <p:nvPr>
             <p:ph idx="1" type="body"/>
@@ -1518,7 +1521,7 @@
   <p:cSld>
     <p:spTree>
       <p:nvGrpSpPr>
-        <p:cNvPr id="229" name="Shape 229"/>
+        <p:cNvPr id="224" name="Shape 224"/>
         <p:cNvGrpSpPr/>
         <p:nvPr/>
       </p:nvGrpSpPr>
@@ -1532,7 +1535,7 @@
       </p:grpSpPr>
       <p:sp>
         <p:nvSpPr>
-          <p:cNvPr id="230" name="Google Shape;230;jam14:notes"/>
+          <p:cNvPr id="225" name="Google Shape;225;jam11:notes"/>
           <p:cNvSpPr/>
           <p:nvPr>
             <p:ph idx="2" type="sldImg"/>
@@ -1567,7 +1570,7 @@
       </p:sp>
       <p:sp>
         <p:nvSpPr>
-          <p:cNvPr id="231" name="Google Shape;231;jam14:notes"/>
+          <p:cNvPr id="226" name="Google Shape;226;jam11:notes"/>
           <p:cNvSpPr txBox="1"/>
           <p:nvPr>
             <p:ph idx="1" type="body"/>
@@ -1617,7 +1620,7 @@
   <p:cSld>
     <p:spTree>
       <p:nvGrpSpPr>
-        <p:cNvPr id="240" name="Shape 240"/>
+        <p:cNvPr id="235" name="Shape 235"/>
         <p:cNvGrpSpPr/>
         <p:nvPr/>
       </p:nvGrpSpPr>
@@ -1631,7 +1634,7 @@
       </p:grpSpPr>
       <p:sp>
         <p:nvSpPr>
-          <p:cNvPr id="241" name="Google Shape;241;jam15:notes"/>
+          <p:cNvPr id="236" name="Google Shape;236;jam12:notes"/>
           <p:cNvSpPr/>
           <p:nvPr>
             <p:ph idx="2" type="sldImg"/>
@@ -1666,7 +1669,7 @@
       </p:sp>
       <p:sp>
         <p:nvSpPr>
-          <p:cNvPr id="242" name="Google Shape;242;jam15:notes"/>
+          <p:cNvPr id="237" name="Google Shape;237;jam12:notes"/>
           <p:cNvSpPr txBox="1"/>
           <p:nvPr>
             <p:ph idx="1" type="body"/>
@@ -1716,7 +1719,7 @@
   <p:cSld>
     <p:spTree>
       <p:nvGrpSpPr>
-        <p:cNvPr id="251" name="Shape 251"/>
+        <p:cNvPr id="246" name="Shape 246"/>
         <p:cNvGrpSpPr/>
         <p:nvPr/>
       </p:nvGrpSpPr>
@@ -1730,7 +1733,7 @@
       </p:grpSpPr>
       <p:sp>
         <p:nvSpPr>
-          <p:cNvPr id="252" name="Google Shape;252;jam16:notes"/>
+          <p:cNvPr id="247" name="Google Shape;247;jam13:notes"/>
           <p:cNvSpPr/>
           <p:nvPr>
             <p:ph idx="2" type="sldImg"/>
@@ -1765,7 +1768,7 @@
       </p:sp>
       <p:sp>
         <p:nvSpPr>
-          <p:cNvPr id="253" name="Google Shape;253;jam16:notes"/>
+          <p:cNvPr id="248" name="Google Shape;248;jam13:notes"/>
           <p:cNvSpPr txBox="1"/>
           <p:nvPr>
             <p:ph idx="1" type="body"/>
@@ -1914,7 +1917,7 @@
   <p:cSld>
     <p:spTree>
       <p:nvGrpSpPr>
-        <p:cNvPr id="262" name="Shape 262"/>
+        <p:cNvPr id="257" name="Shape 257"/>
         <p:cNvGrpSpPr/>
         <p:nvPr/>
       </p:nvGrpSpPr>
@@ -1928,7 +1931,7 @@
       </p:grpSpPr>
       <p:sp>
         <p:nvSpPr>
-          <p:cNvPr id="263" name="Google Shape;263;sl_03:notes"/>
+          <p:cNvPr id="258" name="Google Shape;258;jam14:notes"/>
           <p:cNvSpPr/>
           <p:nvPr>
             <p:ph idx="2" type="sldImg"/>
@@ -1963,7 +1966,7 @@
       </p:sp>
       <p:sp>
         <p:nvSpPr>
-          <p:cNvPr id="264" name="Google Shape;264;sl_03:notes"/>
+          <p:cNvPr id="259" name="Google Shape;259;jam14:notes"/>
           <p:cNvSpPr txBox="1"/>
           <p:nvPr>
             <p:ph idx="1" type="body"/>
@@ -2008,12 +2011,12 @@
 </p:notes>
 </file>
 
-<file path=ppt/notesSlides/notesSlide3.xml><?xml version="1.0" encoding="utf-8"?>
+<file path=ppt/notesSlides/notesSlide21.xml><?xml version="1.0" encoding="utf-8"?>
 <p:notes xmlns:a="http://schemas.openxmlformats.org/drawingml/2006/main" xmlns:r="http://schemas.openxmlformats.org/officeDocument/2006/relationships" xmlns:mc="http://schemas.openxmlformats.org/markup-compatibility/2006" xmlns:mv="urn:schemas-microsoft-com:mac:vml" xmlns:p="http://schemas.openxmlformats.org/presentationml/2006/main" xmlns:c="http://schemas.openxmlformats.org/drawingml/2006/chart" xmlns:dgm="http://schemas.openxmlformats.org/drawingml/2006/diagram" xmlns:o="urn:schemas-microsoft-com:office:office" xmlns:v="urn:schemas-microsoft-com:vml" xmlns:pvml="urn:schemas-microsoft-com:office:powerpoint" xmlns:com="http://schemas.openxmlformats.org/drawingml/2006/compatibility" xmlns:p14="http://schemas.microsoft.com/office/powerpoint/2010/main" xmlns:p15="http://schemas.microsoft.com/office/powerpoint/2012/main" xmlns:ahyp="http://schemas.microsoft.com/office/drawing/2018/hyperlinkcolor" showMasterPhAnim="0" showMasterSp="0">
   <p:cSld>
     <p:spTree>
       <p:nvGrpSpPr>
-        <p:cNvPr id="71" name="Shape 71"/>
+        <p:cNvPr id="268" name="Shape 268"/>
         <p:cNvGrpSpPr/>
         <p:nvPr/>
       </p:nvGrpSpPr>
@@ -2027,7 +2030,7 @@
       </p:grpSpPr>
       <p:sp>
         <p:nvSpPr>
-          <p:cNvPr id="72" name="Google Shape;72;jam01:notes"/>
+          <p:cNvPr id="269" name="Google Shape;269;jam15:notes"/>
           <p:cNvSpPr/>
           <p:nvPr>
             <p:ph idx="2" type="sldImg"/>
@@ -2062,7 +2065,7 @@
       </p:sp>
       <p:sp>
         <p:nvSpPr>
-          <p:cNvPr id="73" name="Google Shape;73;jam01:notes"/>
+          <p:cNvPr id="270" name="Google Shape;270;jam15:notes"/>
           <p:cNvSpPr txBox="1"/>
           <p:nvPr>
             <p:ph idx="1" type="body"/>
@@ -2107,12 +2110,12 @@
 </p:notes>
 </file>
 
-<file path=ppt/notesSlides/notesSlide4.xml><?xml version="1.0" encoding="utf-8"?>
+<file path=ppt/notesSlides/notesSlide22.xml><?xml version="1.0" encoding="utf-8"?>
 <p:notes xmlns:a="http://schemas.openxmlformats.org/drawingml/2006/main" xmlns:r="http://schemas.openxmlformats.org/officeDocument/2006/relationships" xmlns:mc="http://schemas.openxmlformats.org/markup-compatibility/2006" xmlns:mv="urn:schemas-microsoft-com:mac:vml" xmlns:p="http://schemas.openxmlformats.org/presentationml/2006/main" xmlns:c="http://schemas.openxmlformats.org/drawingml/2006/chart" xmlns:dgm="http://schemas.openxmlformats.org/drawingml/2006/diagram" xmlns:o="urn:schemas-microsoft-com:office:office" xmlns:v="urn:schemas-microsoft-com:vml" xmlns:pvml="urn:schemas-microsoft-com:office:powerpoint" xmlns:com="http://schemas.openxmlformats.org/drawingml/2006/compatibility" xmlns:p14="http://schemas.microsoft.com/office/powerpoint/2010/main" xmlns:p15="http://schemas.microsoft.com/office/powerpoint/2012/main" xmlns:ahyp="http://schemas.microsoft.com/office/drawing/2018/hyperlinkcolor" showMasterPhAnim="0" showMasterSp="0">
   <p:cSld>
     <p:spTree>
       <p:nvGrpSpPr>
-        <p:cNvPr id="82" name="Shape 82"/>
+        <p:cNvPr id="279" name="Shape 279"/>
         <p:cNvGrpSpPr/>
         <p:nvPr/>
       </p:nvGrpSpPr>
@@ -2126,7 +2129,7 @@
       </p:grpSpPr>
       <p:sp>
         <p:nvSpPr>
-          <p:cNvPr id="83" name="Google Shape;83;jam02:notes"/>
+          <p:cNvPr id="280" name="Google Shape;280;jam16:notes"/>
           <p:cNvSpPr/>
           <p:nvPr>
             <p:ph idx="2" type="sldImg"/>
@@ -2161,7 +2164,7 @@
       </p:sp>
       <p:sp>
         <p:nvSpPr>
-          <p:cNvPr id="84" name="Google Shape;84;jam02:notes"/>
+          <p:cNvPr id="281" name="Google Shape;281;jam16:notes"/>
           <p:cNvSpPr txBox="1"/>
           <p:nvPr>
             <p:ph idx="1" type="body"/>
@@ -2206,12 +2209,12 @@
 </p:notes>
 </file>
 
-<file path=ppt/notesSlides/notesSlide5.xml><?xml version="1.0" encoding="utf-8"?>
+<file path=ppt/notesSlides/notesSlide23.xml><?xml version="1.0" encoding="utf-8"?>
 <p:notes xmlns:a="http://schemas.openxmlformats.org/drawingml/2006/main" xmlns:r="http://schemas.openxmlformats.org/officeDocument/2006/relationships" xmlns:mc="http://schemas.openxmlformats.org/markup-compatibility/2006" xmlns:mv="urn:schemas-microsoft-com:mac:vml" xmlns:p="http://schemas.openxmlformats.org/presentationml/2006/main" xmlns:c="http://schemas.openxmlformats.org/drawingml/2006/chart" xmlns:dgm="http://schemas.openxmlformats.org/drawingml/2006/diagram" xmlns:o="urn:schemas-microsoft-com:office:office" xmlns:v="urn:schemas-microsoft-com:vml" xmlns:pvml="urn:schemas-microsoft-com:office:powerpoint" xmlns:com="http://schemas.openxmlformats.org/drawingml/2006/compatibility" xmlns:p14="http://schemas.microsoft.com/office/powerpoint/2010/main" xmlns:p15="http://schemas.microsoft.com/office/powerpoint/2012/main" xmlns:ahyp="http://schemas.microsoft.com/office/drawing/2018/hyperlinkcolor" showMasterPhAnim="0" showMasterSp="0">
   <p:cSld>
     <p:spTree>
       <p:nvGrpSpPr>
-        <p:cNvPr id="93" name="Shape 93"/>
+        <p:cNvPr id="290" name="Shape 290"/>
         <p:cNvGrpSpPr/>
         <p:nvPr/>
       </p:nvGrpSpPr>
@@ -2225,7 +2228,7 @@
       </p:grpSpPr>
       <p:sp>
         <p:nvSpPr>
-          <p:cNvPr id="94" name="Google Shape;94;jam03:notes"/>
+          <p:cNvPr id="291" name="Google Shape;291;jamdemo:notes"/>
           <p:cNvSpPr/>
           <p:nvPr>
             <p:ph idx="2" type="sldImg"/>
@@ -2260,7 +2263,7 @@
       </p:sp>
       <p:sp>
         <p:nvSpPr>
-          <p:cNvPr id="95" name="Google Shape;95;jam03:notes"/>
+          <p:cNvPr id="292" name="Google Shape;292;jamdemo:notes"/>
           <p:cNvSpPr txBox="1"/>
           <p:nvPr>
             <p:ph idx="1" type="body"/>
@@ -2305,12 +2308,12 @@
 </p:notes>
 </file>
 
-<file path=ppt/notesSlides/notesSlide6.xml><?xml version="1.0" encoding="utf-8"?>
+<file path=ppt/notesSlides/notesSlide3.xml><?xml version="1.0" encoding="utf-8"?>
 <p:notes xmlns:a="http://schemas.openxmlformats.org/drawingml/2006/main" xmlns:r="http://schemas.openxmlformats.org/officeDocument/2006/relationships" xmlns:mc="http://schemas.openxmlformats.org/markup-compatibility/2006" xmlns:mv="urn:schemas-microsoft-com:mac:vml" xmlns:p="http://schemas.openxmlformats.org/presentationml/2006/main" xmlns:c="http://schemas.openxmlformats.org/drawingml/2006/chart" xmlns:dgm="http://schemas.openxmlformats.org/drawingml/2006/diagram" xmlns:o="urn:schemas-microsoft-com:office:office" xmlns:v="urn:schemas-microsoft-com:vml" xmlns:pvml="urn:schemas-microsoft-com:office:powerpoint" xmlns:com="http://schemas.openxmlformats.org/drawingml/2006/compatibility" xmlns:p14="http://schemas.microsoft.com/office/powerpoint/2010/main" xmlns:p15="http://schemas.microsoft.com/office/powerpoint/2012/main" xmlns:ahyp="http://schemas.microsoft.com/office/drawing/2018/hyperlinkcolor" showMasterPhAnim="0" showMasterSp="0">
   <p:cSld>
     <p:spTree>
       <p:nvGrpSpPr>
-        <p:cNvPr id="104" name="Shape 104"/>
+        <p:cNvPr id="72" name="Shape 72"/>
         <p:cNvGrpSpPr/>
         <p:nvPr/>
       </p:nvGrpSpPr>
@@ -2324,7 +2327,7 @@
       </p:grpSpPr>
       <p:sp>
         <p:nvSpPr>
-          <p:cNvPr id="105" name="Google Shape;105;jam04:notes"/>
+          <p:cNvPr id="73" name="Google Shape;73;sl_03:notes"/>
           <p:cNvSpPr/>
           <p:nvPr>
             <p:ph idx="2" type="sldImg"/>
@@ -2359,7 +2362,7 @@
       </p:sp>
       <p:sp>
         <p:nvSpPr>
-          <p:cNvPr id="106" name="Google Shape;106;jam04:notes"/>
+          <p:cNvPr id="74" name="Google Shape;74;sl_03:notes"/>
           <p:cNvSpPr txBox="1"/>
           <p:nvPr>
             <p:ph idx="1" type="body"/>
@@ -2404,12 +2407,12 @@
 </p:notes>
 </file>
 
-<file path=ppt/notesSlides/notesSlide7.xml><?xml version="1.0" encoding="utf-8"?>
+<file path=ppt/notesSlides/notesSlide4.xml><?xml version="1.0" encoding="utf-8"?>
 <p:notes xmlns:a="http://schemas.openxmlformats.org/drawingml/2006/main" xmlns:r="http://schemas.openxmlformats.org/officeDocument/2006/relationships" xmlns:mc="http://schemas.openxmlformats.org/markup-compatibility/2006" xmlns:mv="urn:schemas-microsoft-com:mac:vml" xmlns:p="http://schemas.openxmlformats.org/presentationml/2006/main" xmlns:c="http://schemas.openxmlformats.org/drawingml/2006/chart" xmlns:dgm="http://schemas.openxmlformats.org/drawingml/2006/diagram" xmlns:o="urn:schemas-microsoft-com:office:office" xmlns:v="urn:schemas-microsoft-com:vml" xmlns:pvml="urn:schemas-microsoft-com:office:powerpoint" xmlns:com="http://schemas.openxmlformats.org/drawingml/2006/compatibility" xmlns:p14="http://schemas.microsoft.com/office/powerpoint/2010/main" xmlns:p15="http://schemas.microsoft.com/office/powerpoint/2012/main" xmlns:ahyp="http://schemas.microsoft.com/office/drawing/2018/hyperlinkcolor" showMasterPhAnim="0" showMasterSp="0">
   <p:cSld>
     <p:spTree>
       <p:nvGrpSpPr>
-        <p:cNvPr id="115" name="Shape 115"/>
+        <p:cNvPr id="79" name="Shape 79"/>
         <p:cNvGrpSpPr/>
         <p:nvPr/>
       </p:nvGrpSpPr>
@@ -2423,7 +2426,7 @@
       </p:grpSpPr>
       <p:sp>
         <p:nvSpPr>
-          <p:cNvPr id="116" name="Google Shape;116;jamcl:notes"/>
+          <p:cNvPr id="80" name="Google Shape;80;jam01:notes"/>
           <p:cNvSpPr/>
           <p:nvPr>
             <p:ph idx="2" type="sldImg"/>
@@ -2458,7 +2461,7 @@
       </p:sp>
       <p:sp>
         <p:nvSpPr>
-          <p:cNvPr id="117" name="Google Shape;117;jamcl:notes"/>
+          <p:cNvPr id="81" name="Google Shape;81;jam01:notes"/>
           <p:cNvSpPr txBox="1"/>
           <p:nvPr>
             <p:ph idx="1" type="body"/>
@@ -2503,12 +2506,12 @@
 </p:notes>
 </file>
 
-<file path=ppt/notesSlides/notesSlide8.xml><?xml version="1.0" encoding="utf-8"?>
+<file path=ppt/notesSlides/notesSlide5.xml><?xml version="1.0" encoding="utf-8"?>
 <p:notes xmlns:a="http://schemas.openxmlformats.org/drawingml/2006/main" xmlns:r="http://schemas.openxmlformats.org/officeDocument/2006/relationships" xmlns:mc="http://schemas.openxmlformats.org/markup-compatibility/2006" xmlns:mv="urn:schemas-microsoft-com:mac:vml" xmlns:p="http://schemas.openxmlformats.org/presentationml/2006/main" xmlns:c="http://schemas.openxmlformats.org/drawingml/2006/chart" xmlns:dgm="http://schemas.openxmlformats.org/drawingml/2006/diagram" xmlns:o="urn:schemas-microsoft-com:office:office" xmlns:v="urn:schemas-microsoft-com:vml" xmlns:pvml="urn:schemas-microsoft-com:office:powerpoint" xmlns:com="http://schemas.openxmlformats.org/drawingml/2006/compatibility" xmlns:p14="http://schemas.microsoft.com/office/powerpoint/2010/main" xmlns:p15="http://schemas.microsoft.com/office/powerpoint/2012/main" xmlns:ahyp="http://schemas.microsoft.com/office/drawing/2018/hyperlinkcolor" showMasterPhAnim="0" showMasterSp="0">
   <p:cSld>
     <p:spTree>
       <p:nvGrpSpPr>
-        <p:cNvPr id="130" name="Shape 130"/>
+        <p:cNvPr id="90" name="Shape 90"/>
         <p:cNvGrpSpPr/>
         <p:nvPr/>
       </p:nvGrpSpPr>
@@ -2522,7 +2525,7 @@
       </p:grpSpPr>
       <p:sp>
         <p:nvSpPr>
-          <p:cNvPr id="131" name="Google Shape;131;jam06:notes"/>
+          <p:cNvPr id="91" name="Google Shape;91;jam02:notes"/>
           <p:cNvSpPr/>
           <p:nvPr>
             <p:ph idx="2" type="sldImg"/>
@@ -2557,7 +2560,7 @@
       </p:sp>
       <p:sp>
         <p:nvSpPr>
-          <p:cNvPr id="132" name="Google Shape;132;jam06:notes"/>
+          <p:cNvPr id="92" name="Google Shape;92;jam02:notes"/>
           <p:cNvSpPr txBox="1"/>
           <p:nvPr>
             <p:ph idx="1" type="body"/>
@@ -2602,12 +2605,12 @@
 </p:notes>
 </file>
 
-<file path=ppt/notesSlides/notesSlide9.xml><?xml version="1.0" encoding="utf-8"?>
+<file path=ppt/notesSlides/notesSlide6.xml><?xml version="1.0" encoding="utf-8"?>
 <p:notes xmlns:a="http://schemas.openxmlformats.org/drawingml/2006/main" xmlns:r="http://schemas.openxmlformats.org/officeDocument/2006/relationships" xmlns:mc="http://schemas.openxmlformats.org/markup-compatibility/2006" xmlns:mv="urn:schemas-microsoft-com:mac:vml" xmlns:p="http://schemas.openxmlformats.org/presentationml/2006/main" xmlns:c="http://schemas.openxmlformats.org/drawingml/2006/chart" xmlns:dgm="http://schemas.openxmlformats.org/drawingml/2006/diagram" xmlns:o="urn:schemas-microsoft-com:office:office" xmlns:v="urn:schemas-microsoft-com:vml" xmlns:pvml="urn:schemas-microsoft-com:office:powerpoint" xmlns:com="http://schemas.openxmlformats.org/drawingml/2006/compatibility" xmlns:p14="http://schemas.microsoft.com/office/powerpoint/2010/main" xmlns:p15="http://schemas.microsoft.com/office/powerpoint/2012/main" xmlns:ahyp="http://schemas.microsoft.com/office/drawing/2018/hyperlinkcolor" showMasterPhAnim="0" showMasterSp="0">
   <p:cSld>
     <p:spTree>
       <p:nvGrpSpPr>
-        <p:cNvPr id="141" name="Shape 141"/>
+        <p:cNvPr id="101" name="Shape 101"/>
         <p:cNvGrpSpPr/>
         <p:nvPr/>
       </p:nvGrpSpPr>
@@ -2621,7 +2624,7 @@
       </p:grpSpPr>
       <p:sp>
         <p:nvSpPr>
-          <p:cNvPr id="142" name="Google Shape;142;jam6b:notes"/>
+          <p:cNvPr id="102" name="Google Shape;102;jamcr:notes"/>
           <p:cNvSpPr/>
           <p:nvPr>
             <p:ph idx="2" type="sldImg"/>
@@ -2656,7 +2659,304 @@
       </p:sp>
       <p:sp>
         <p:nvSpPr>
-          <p:cNvPr id="143" name="Google Shape;143;jam6b:notes"/>
+          <p:cNvPr id="103" name="Google Shape;103;jamcr:notes"/>
+          <p:cNvSpPr txBox="1"/>
+          <p:nvPr>
+            <p:ph idx="1" type="body"/>
+          </p:nvPr>
+        </p:nvSpPr>
+        <p:spPr>
+          <a:xfrm>
+            <a:off x="685800" y="4343400"/>
+            <a:ext cx="5486400" cy="4114800"/>
+          </a:xfrm>
+          <a:prstGeom prst="rect">
+            <a:avLst/>
+          </a:prstGeom>
+        </p:spPr>
+        <p:txBody>
+          <a:bodyPr anchorCtr="0" anchor="t" bIns="91425" lIns="91425" spcFirstLastPara="1" rIns="91425" wrap="square" tIns="91425">
+            <a:noAutofit/>
+          </a:bodyPr>
+          <a:lstStyle/>
+          <a:p>
+            <a:pPr indent="0" lvl="0" marL="0" rtl="0" algn="l">
+              <a:spcBef>
+                <a:spcPts val="0"/>
+              </a:spcBef>
+              <a:spcAft>
+                <a:spcPts val="0"/>
+              </a:spcAft>
+              <a:buNone/>
+            </a:pPr>
+            <a:r>
+              <a:t/>
+            </a:r>
+            <a:endParaRPr/>
+          </a:p>
+        </p:txBody>
+      </p:sp>
+    </p:spTree>
+  </p:cSld>
+  <p:clrMapOvr>
+    <a:masterClrMapping/>
+  </p:clrMapOvr>
+</p:notes>
+</file>
+
+<file path=ppt/notesSlides/notesSlide7.xml><?xml version="1.0" encoding="utf-8"?>
+<p:notes xmlns:a="http://schemas.openxmlformats.org/drawingml/2006/main" xmlns:r="http://schemas.openxmlformats.org/officeDocument/2006/relationships" xmlns:mc="http://schemas.openxmlformats.org/markup-compatibility/2006" xmlns:mv="urn:schemas-microsoft-com:mac:vml" xmlns:p="http://schemas.openxmlformats.org/presentationml/2006/main" xmlns:c="http://schemas.openxmlformats.org/drawingml/2006/chart" xmlns:dgm="http://schemas.openxmlformats.org/drawingml/2006/diagram" xmlns:o="urn:schemas-microsoft-com:office:office" xmlns:v="urn:schemas-microsoft-com:vml" xmlns:pvml="urn:schemas-microsoft-com:office:powerpoint" xmlns:com="http://schemas.openxmlformats.org/drawingml/2006/compatibility" xmlns:p14="http://schemas.microsoft.com/office/powerpoint/2010/main" xmlns:p15="http://schemas.microsoft.com/office/powerpoint/2012/main" xmlns:ahyp="http://schemas.microsoft.com/office/drawing/2018/hyperlinkcolor" showMasterPhAnim="0" showMasterSp="0">
+  <p:cSld>
+    <p:spTree>
+      <p:nvGrpSpPr>
+        <p:cNvPr id="111" name="Shape 111"/>
+        <p:cNvGrpSpPr/>
+        <p:nvPr/>
+      </p:nvGrpSpPr>
+      <p:grpSpPr>
+        <a:xfrm>
+          <a:off x="0" y="0"/>
+          <a:ext cx="0" cy="0"/>
+          <a:chOff x="0" y="0"/>
+          <a:chExt cx="0" cy="0"/>
+        </a:xfrm>
+      </p:grpSpPr>
+      <p:sp>
+        <p:nvSpPr>
+          <p:cNvPr id="112" name="Google Shape;112;jam04:notes"/>
+          <p:cNvSpPr/>
+          <p:nvPr>
+            <p:ph idx="2" type="sldImg"/>
+          </p:nvPr>
+        </p:nvSpPr>
+        <p:spPr>
+          <a:xfrm>
+            <a:off x="381300" y="685800"/>
+            <a:ext cx="6096000" cy="3429000"/>
+          </a:xfrm>
+          <a:custGeom>
+            <a:rect b="b" l="l" r="r" t="t"/>
+            <a:pathLst>
+              <a:path extrusionOk="0" h="120000" w="120000">
+                <a:moveTo>
+                  <a:pt x="0" y="0"/>
+                </a:moveTo>
+                <a:lnTo>
+                  <a:pt x="120000" y="0"/>
+                </a:lnTo>
+                <a:lnTo>
+                  <a:pt x="120000" y="120000"/>
+                </a:lnTo>
+                <a:lnTo>
+                  <a:pt x="0" y="120000"/>
+                </a:lnTo>
+                <a:close/>
+              </a:path>
+            </a:pathLst>
+          </a:custGeom>
+        </p:spPr>
+      </p:sp>
+      <p:sp>
+        <p:nvSpPr>
+          <p:cNvPr id="113" name="Google Shape;113;jam04:notes"/>
+          <p:cNvSpPr txBox="1"/>
+          <p:nvPr>
+            <p:ph idx="1" type="body"/>
+          </p:nvPr>
+        </p:nvSpPr>
+        <p:spPr>
+          <a:xfrm>
+            <a:off x="685800" y="4343400"/>
+            <a:ext cx="5486400" cy="4114800"/>
+          </a:xfrm>
+          <a:prstGeom prst="rect">
+            <a:avLst/>
+          </a:prstGeom>
+        </p:spPr>
+        <p:txBody>
+          <a:bodyPr anchorCtr="0" anchor="t" bIns="91425" lIns="91425" spcFirstLastPara="1" rIns="91425" wrap="square" tIns="91425">
+            <a:noAutofit/>
+          </a:bodyPr>
+          <a:lstStyle/>
+          <a:p>
+            <a:pPr indent="0" lvl="0" marL="0" rtl="0" algn="l">
+              <a:spcBef>
+                <a:spcPts val="0"/>
+              </a:spcBef>
+              <a:spcAft>
+                <a:spcPts val="0"/>
+              </a:spcAft>
+              <a:buNone/>
+            </a:pPr>
+            <a:r>
+              <a:t/>
+            </a:r>
+            <a:endParaRPr/>
+          </a:p>
+        </p:txBody>
+      </p:sp>
+    </p:spTree>
+  </p:cSld>
+  <p:clrMapOvr>
+    <a:masterClrMapping/>
+  </p:clrMapOvr>
+</p:notes>
+</file>
+
+<file path=ppt/notesSlides/notesSlide8.xml><?xml version="1.0" encoding="utf-8"?>
+<p:notes xmlns:a="http://schemas.openxmlformats.org/drawingml/2006/main" xmlns:r="http://schemas.openxmlformats.org/officeDocument/2006/relationships" xmlns:mc="http://schemas.openxmlformats.org/markup-compatibility/2006" xmlns:mv="urn:schemas-microsoft-com:mac:vml" xmlns:p="http://schemas.openxmlformats.org/presentationml/2006/main" xmlns:c="http://schemas.openxmlformats.org/drawingml/2006/chart" xmlns:dgm="http://schemas.openxmlformats.org/drawingml/2006/diagram" xmlns:o="urn:schemas-microsoft-com:office:office" xmlns:v="urn:schemas-microsoft-com:vml" xmlns:pvml="urn:schemas-microsoft-com:office:powerpoint" xmlns:com="http://schemas.openxmlformats.org/drawingml/2006/compatibility" xmlns:p14="http://schemas.microsoft.com/office/powerpoint/2010/main" xmlns:p15="http://schemas.microsoft.com/office/powerpoint/2012/main" xmlns:ahyp="http://schemas.microsoft.com/office/drawing/2018/hyperlinkcolor" showMasterPhAnim="0" showMasterSp="0">
+  <p:cSld>
+    <p:spTree>
+      <p:nvGrpSpPr>
+        <p:cNvPr id="122" name="Shape 122"/>
+        <p:cNvGrpSpPr/>
+        <p:nvPr/>
+      </p:nvGrpSpPr>
+      <p:grpSpPr>
+        <a:xfrm>
+          <a:off x="0" y="0"/>
+          <a:ext cx="0" cy="0"/>
+          <a:chOff x="0" y="0"/>
+          <a:chExt cx="0" cy="0"/>
+        </a:xfrm>
+      </p:grpSpPr>
+      <p:sp>
+        <p:nvSpPr>
+          <p:cNvPr id="123" name="Google Shape;123;jam03:notes"/>
+          <p:cNvSpPr/>
+          <p:nvPr>
+            <p:ph idx="2" type="sldImg"/>
+          </p:nvPr>
+        </p:nvSpPr>
+        <p:spPr>
+          <a:xfrm>
+            <a:off x="381300" y="685800"/>
+            <a:ext cx="6096000" cy="3429000"/>
+          </a:xfrm>
+          <a:custGeom>
+            <a:rect b="b" l="l" r="r" t="t"/>
+            <a:pathLst>
+              <a:path extrusionOk="0" h="120000" w="120000">
+                <a:moveTo>
+                  <a:pt x="0" y="0"/>
+                </a:moveTo>
+                <a:lnTo>
+                  <a:pt x="120000" y="0"/>
+                </a:lnTo>
+                <a:lnTo>
+                  <a:pt x="120000" y="120000"/>
+                </a:lnTo>
+                <a:lnTo>
+                  <a:pt x="0" y="120000"/>
+                </a:lnTo>
+                <a:close/>
+              </a:path>
+            </a:pathLst>
+          </a:custGeom>
+        </p:spPr>
+      </p:sp>
+      <p:sp>
+        <p:nvSpPr>
+          <p:cNvPr id="124" name="Google Shape;124;jam03:notes"/>
+          <p:cNvSpPr txBox="1"/>
+          <p:nvPr>
+            <p:ph idx="1" type="body"/>
+          </p:nvPr>
+        </p:nvSpPr>
+        <p:spPr>
+          <a:xfrm>
+            <a:off x="685800" y="4343400"/>
+            <a:ext cx="5486400" cy="4114800"/>
+          </a:xfrm>
+          <a:prstGeom prst="rect">
+            <a:avLst/>
+          </a:prstGeom>
+        </p:spPr>
+        <p:txBody>
+          <a:bodyPr anchorCtr="0" anchor="t" bIns="91425" lIns="91425" spcFirstLastPara="1" rIns="91425" wrap="square" tIns="91425">
+            <a:noAutofit/>
+          </a:bodyPr>
+          <a:lstStyle/>
+          <a:p>
+            <a:pPr indent="0" lvl="0" marL="0" rtl="0" algn="l">
+              <a:spcBef>
+                <a:spcPts val="0"/>
+              </a:spcBef>
+              <a:spcAft>
+                <a:spcPts val="0"/>
+              </a:spcAft>
+              <a:buNone/>
+            </a:pPr>
+            <a:r>
+              <a:t/>
+            </a:r>
+            <a:endParaRPr/>
+          </a:p>
+        </p:txBody>
+      </p:sp>
+    </p:spTree>
+  </p:cSld>
+  <p:clrMapOvr>
+    <a:masterClrMapping/>
+  </p:clrMapOvr>
+</p:notes>
+</file>
+
+<file path=ppt/notesSlides/notesSlide9.xml><?xml version="1.0" encoding="utf-8"?>
+<p:notes xmlns:a="http://schemas.openxmlformats.org/drawingml/2006/main" xmlns:r="http://schemas.openxmlformats.org/officeDocument/2006/relationships" xmlns:mc="http://schemas.openxmlformats.org/markup-compatibility/2006" xmlns:mv="urn:schemas-microsoft-com:mac:vml" xmlns:p="http://schemas.openxmlformats.org/presentationml/2006/main" xmlns:c="http://schemas.openxmlformats.org/drawingml/2006/chart" xmlns:dgm="http://schemas.openxmlformats.org/drawingml/2006/diagram" xmlns:o="urn:schemas-microsoft-com:office:office" xmlns:v="urn:schemas-microsoft-com:vml" xmlns:pvml="urn:schemas-microsoft-com:office:powerpoint" xmlns:com="http://schemas.openxmlformats.org/drawingml/2006/compatibility" xmlns:p14="http://schemas.microsoft.com/office/powerpoint/2010/main" xmlns:p15="http://schemas.microsoft.com/office/powerpoint/2012/main" xmlns:ahyp="http://schemas.microsoft.com/office/drawing/2018/hyperlinkcolor" showMasterPhAnim="0" showMasterSp="0">
+  <p:cSld>
+    <p:spTree>
+      <p:nvGrpSpPr>
+        <p:cNvPr id="133" name="Shape 133"/>
+        <p:cNvGrpSpPr/>
+        <p:nvPr/>
+      </p:nvGrpSpPr>
+      <p:grpSpPr>
+        <a:xfrm>
+          <a:off x="0" y="0"/>
+          <a:ext cx="0" cy="0"/>
+          <a:chOff x="0" y="0"/>
+          <a:chExt cx="0" cy="0"/>
+        </a:xfrm>
+      </p:grpSpPr>
+      <p:sp>
+        <p:nvSpPr>
+          <p:cNvPr id="134" name="Google Shape;134;jam04b:notes"/>
+          <p:cNvSpPr/>
+          <p:nvPr>
+            <p:ph idx="2" type="sldImg"/>
+          </p:nvPr>
+        </p:nvSpPr>
+        <p:spPr>
+          <a:xfrm>
+            <a:off x="381300" y="685800"/>
+            <a:ext cx="6096000" cy="3429000"/>
+          </a:xfrm>
+          <a:custGeom>
+            <a:rect b="b" l="l" r="r" t="t"/>
+            <a:pathLst>
+              <a:path extrusionOk="0" h="120000" w="120000">
+                <a:moveTo>
+                  <a:pt x="0" y="0"/>
+                </a:moveTo>
+                <a:lnTo>
+                  <a:pt x="120000" y="0"/>
+                </a:lnTo>
+                <a:lnTo>
+                  <a:pt x="120000" y="120000"/>
+                </a:lnTo>
+                <a:lnTo>
+                  <a:pt x="0" y="120000"/>
+                </a:lnTo>
+                <a:close/>
+              </a:path>
+            </a:pathLst>
+          </a:custGeom>
+        </p:spPr>
+      </p:sp>
+      <p:sp>
+        <p:nvSpPr>
+          <p:cNvPr id="135" name="Google Shape;135;jam04b:notes"/>
           <p:cNvSpPr txBox="1"/>
           <p:nvPr>
             <p:ph idx="1" type="body"/>
@@ -7469,7 +7769,7 @@
                 <a:cs typeface="Google Sans"/>
                 <a:sym typeface="Google Sans"/>
               </a:rPr>
-              <a:t>BulletProof: Resume Tailor Coding Jam</a:t>
+              <a:t>BulletProof: Resume Optimization Coding Jam</a:t>
             </a:r>
             <a:endParaRPr sz="3200">
               <a:solidFill>
@@ -7527,7 +7827,7 @@
                 <a:cs typeface="Roboto Mono"/>
                 <a:sym typeface="Roboto Mono"/>
               </a:rPr>
-              <a:t>Columbia University and SHPE NYC Career Summit</a:t>
+              <a:t>Brooklyn DevFest</a:t>
             </a:r>
             <a:endParaRPr sz="1200">
               <a:solidFill>
@@ -7559,7 +7859,7 @@
                 <a:cs typeface="Roboto Mono"/>
                 <a:sym typeface="Roboto Mono"/>
               </a:rPr>
-              <a:t>Lerner Hall, Saturday, October 17, 2026</a:t>
+              <a:t>Friday, October 30, 2026</a:t>
             </a:r>
             <a:endParaRPr sz="1200">
               <a:solidFill>
@@ -8059,13 +8359,13 @@
     <p:bg>
       <p:bgPr>
         <a:solidFill>
-          <a:srgbClr val="FFFFFF"/>
+          <a:srgbClr val="F2F1F0"/>
         </a:solidFill>
       </p:bgPr>
     </p:bg>
     <p:spTree>
       <p:nvGrpSpPr>
-        <p:cNvPr id="155" name="Shape 155"/>
+        <p:cNvPr id="146" name="Shape 146"/>
         <p:cNvGrpSpPr/>
         <p:nvPr/>
       </p:nvGrpSpPr>
@@ -8079,17 +8379,595 @@
       </p:grpSpPr>
       <p:sp>
         <p:nvSpPr>
-          <p:cNvPr id="156" name="Google Shape;156;p22"/>
+          <p:cNvPr id="147" name="Google Shape;147;p22"/>
+          <p:cNvSpPr txBox="1"/>
+          <p:nvPr/>
+        </p:nvSpPr>
+        <p:spPr>
+          <a:xfrm>
+            <a:off x="548640" y="822960"/>
+            <a:ext cx="5303400" cy="914400"/>
+          </a:xfrm>
+          <a:prstGeom prst="rect">
+            <a:avLst/>
+          </a:prstGeom>
+          <a:noFill/>
+          <a:ln>
+            <a:noFill/>
+          </a:ln>
+        </p:spPr>
+        <p:txBody>
+          <a:bodyPr anchorCtr="0" anchor="t" bIns="91425" lIns="91425" spcFirstLastPara="1" rIns="91425" wrap="square" tIns="91425">
+            <a:noAutofit/>
+          </a:bodyPr>
+          <a:lstStyle/>
+          <a:p>
+            <a:pPr indent="0" lvl="0" marL="0" rtl="0" algn="l">
+              <a:spcBef>
+                <a:spcPts val="0"/>
+              </a:spcBef>
+              <a:spcAft>
+                <a:spcPts val="0"/>
+              </a:spcAft>
+              <a:buNone/>
+            </a:pPr>
+            <a:r>
+              <a:rPr b="1" lang="en" sz="4800">
+                <a:solidFill>
+                  <a:srgbClr val="1E1E1E"/>
+                </a:solidFill>
+                <a:latin typeface="Google Sans"/>
+                <a:ea typeface="Google Sans"/>
+                <a:cs typeface="Google Sans"/>
+                <a:sym typeface="Google Sans"/>
+              </a:rPr>
+              <a:t>The Codelab</a:t>
+            </a:r>
+            <a:endParaRPr b="1" sz="4800">
+              <a:solidFill>
+                <a:srgbClr val="1E1E1E"/>
+              </a:solidFill>
+              <a:latin typeface="Google Sans"/>
+              <a:ea typeface="Google Sans"/>
+              <a:cs typeface="Google Sans"/>
+              <a:sym typeface="Google Sans"/>
+            </a:endParaRPr>
+          </a:p>
+        </p:txBody>
+      </p:sp>
+      <p:sp>
+        <p:nvSpPr>
+          <p:cNvPr id="148" name="Google Shape;148;p22"/>
+          <p:cNvSpPr txBox="1"/>
+          <p:nvPr/>
+        </p:nvSpPr>
+        <p:spPr>
+          <a:xfrm>
+            <a:off x="548640" y="1783080"/>
+            <a:ext cx="5303400" cy="1316700"/>
+          </a:xfrm>
+          <a:prstGeom prst="rect">
+            <a:avLst/>
+          </a:prstGeom>
+          <a:noFill/>
+          <a:ln>
+            <a:noFill/>
+          </a:ln>
+        </p:spPr>
+        <p:txBody>
+          <a:bodyPr anchorCtr="0" anchor="t" bIns="91425" lIns="91425" spcFirstLastPara="1" rIns="91425" wrap="square" tIns="91425">
+            <a:noAutofit/>
+          </a:bodyPr>
+          <a:lstStyle/>
+          <a:p>
+            <a:pPr indent="0" lvl="0" marL="0" rtl="0" algn="l">
+              <a:spcBef>
+                <a:spcPts val="0"/>
+              </a:spcBef>
+              <a:spcAft>
+                <a:spcPts val="0"/>
+              </a:spcAft>
+              <a:buNone/>
+            </a:pPr>
+            <a:r>
+              <a:rPr lang="en">
+                <a:solidFill>
+                  <a:srgbClr val="1E1E1E"/>
+                </a:solidFill>
+                <a:latin typeface="Roboto Mono"/>
+                <a:ea typeface="Roboto Mono"/>
+                <a:cs typeface="Roboto Mono"/>
+                <a:sym typeface="Roboto Mono"/>
+              </a:rPr>
+              <a:t>Follow this codelab: your Google Cloud credits work here, not in AI Studio</a:t>
+            </a:r>
+            <a:endParaRPr>
+              <a:solidFill>
+                <a:srgbClr val="1E1E1E"/>
+              </a:solidFill>
+              <a:latin typeface="Roboto Mono"/>
+              <a:ea typeface="Roboto Mono"/>
+              <a:cs typeface="Roboto Mono"/>
+              <a:sym typeface="Roboto Mono"/>
+            </a:endParaRPr>
+          </a:p>
+          <a:p>
+            <a:pPr indent="0" lvl="0" marL="0" rtl="0" algn="l">
+              <a:spcBef>
+                <a:spcPts val="600"/>
+              </a:spcBef>
+              <a:spcAft>
+                <a:spcPts val="0"/>
+              </a:spcAft>
+              <a:buNone/>
+            </a:pPr>
+            <a:r>
+              <a:rPr lang="en">
+                <a:solidFill>
+                  <a:srgbClr val="1E1E1E"/>
+                </a:solidFill>
+                <a:latin typeface="Roboto Mono"/>
+                <a:ea typeface="Roboto Mono"/>
+                <a:cs typeface="Roboto Mono"/>
+                <a:sym typeface="Roboto Mono"/>
+              </a:rPr>
+              <a:t>Ten steps, about 75 minutes</a:t>
+            </a:r>
+            <a:endParaRPr>
+              <a:solidFill>
+                <a:srgbClr val="1E1E1E"/>
+              </a:solidFill>
+              <a:latin typeface="Roboto Mono"/>
+              <a:ea typeface="Roboto Mono"/>
+              <a:cs typeface="Roboto Mono"/>
+              <a:sym typeface="Roboto Mono"/>
+            </a:endParaRPr>
+          </a:p>
+          <a:p>
+            <a:pPr indent="0" lvl="0" marL="0" rtl="0" algn="l">
+              <a:spcBef>
+                <a:spcPts val="600"/>
+              </a:spcBef>
+              <a:spcAft>
+                <a:spcPts val="600"/>
+              </a:spcAft>
+              <a:buNone/>
+            </a:pPr>
+            <a:r>
+              <a:rPr lang="en">
+                <a:solidFill>
+                  <a:srgbClr val="1E1E1E"/>
+                </a:solidFill>
+                <a:latin typeface="Roboto Mono"/>
+                <a:ea typeface="Roboto Mono"/>
+                <a:cs typeface="Roboto Mono"/>
+                <a:sym typeface="Roboto Mono"/>
+              </a:rPr>
+              <a:t>Every step slide has its own QR code</a:t>
+            </a:r>
+            <a:endParaRPr>
+              <a:solidFill>
+                <a:srgbClr val="1E1E1E"/>
+              </a:solidFill>
+              <a:latin typeface="Roboto Mono"/>
+              <a:ea typeface="Roboto Mono"/>
+              <a:cs typeface="Roboto Mono"/>
+              <a:sym typeface="Roboto Mono"/>
+            </a:endParaRPr>
+          </a:p>
+        </p:txBody>
+      </p:sp>
+      <p:sp>
+        <p:nvSpPr>
+          <p:cNvPr id="149" name="Google Shape;149;p22"/>
           <p:cNvSpPr/>
           <p:nvPr/>
         </p:nvSpPr>
         <p:spPr>
           <a:xfrm>
-            <a:off x="411480" y="320040"/>
-            <a:ext cx="4160484" cy="566946"/>
+            <a:off x="548640" y="4069080"/>
+            <a:ext cx="841266" cy="438912"/>
           </a:xfrm>
           <a:prstGeom prst="flowChartTerminator">
             <a:avLst/>
+          </a:prstGeom>
+          <a:solidFill>
+            <a:srgbClr val="5CDB6D"/>
+          </a:solidFill>
+          <a:ln cap="flat" cmpd="sng" w="19050">
+            <a:solidFill>
+              <a:srgbClr val="1E1E1E"/>
+            </a:solidFill>
+            <a:prstDash val="solid"/>
+            <a:round/>
+            <a:headEnd len="sm" w="sm" type="none"/>
+            <a:tailEnd len="sm" w="sm" type="none"/>
+          </a:ln>
+        </p:spPr>
+        <p:txBody>
+          <a:bodyPr anchorCtr="0" anchor="ctr" bIns="91425" lIns="91425" spcFirstLastPara="1" rIns="91425" wrap="square" tIns="91425">
+            <a:noAutofit/>
+          </a:bodyPr>
+          <a:lstStyle/>
+          <a:p>
+            <a:pPr indent="0" lvl="0" marL="0" rtl="0" algn="ctr">
+              <a:spcBef>
+                <a:spcPts val="0"/>
+              </a:spcBef>
+              <a:spcAft>
+                <a:spcPts val="0"/>
+              </a:spcAft>
+              <a:buNone/>
+            </a:pPr>
+            <a:r>
+              <a:rPr lang="en">
+                <a:solidFill>
+                  <a:srgbClr val="1E1E1E"/>
+                </a:solidFill>
+                <a:latin typeface="Google Sans"/>
+                <a:ea typeface="Google Sans"/>
+                <a:cs typeface="Google Sans"/>
+                <a:sym typeface="Google Sans"/>
+              </a:rPr>
+              <a:t>Setup</a:t>
+            </a:r>
+            <a:endParaRPr>
+              <a:solidFill>
+                <a:srgbClr val="1E1E1E"/>
+              </a:solidFill>
+              <a:latin typeface="Google Sans"/>
+              <a:ea typeface="Google Sans"/>
+              <a:cs typeface="Google Sans"/>
+              <a:sym typeface="Google Sans"/>
+            </a:endParaRPr>
+          </a:p>
+        </p:txBody>
+      </p:sp>
+      <p:sp>
+        <p:nvSpPr>
+          <p:cNvPr id="150" name="Google Shape;150;p22"/>
+          <p:cNvSpPr/>
+          <p:nvPr/>
+        </p:nvSpPr>
+        <p:spPr>
+          <a:xfrm>
+            <a:off x="1499616" y="4069080"/>
+            <a:ext cx="841266" cy="438912"/>
+          </a:xfrm>
+          <a:prstGeom prst="flowChartTerminator">
+            <a:avLst/>
+          </a:prstGeom>
+          <a:solidFill>
+            <a:srgbClr val="5CDB6D"/>
+          </a:solidFill>
+          <a:ln cap="flat" cmpd="sng" w="19050">
+            <a:solidFill>
+              <a:srgbClr val="1E1E1E"/>
+            </a:solidFill>
+            <a:prstDash val="solid"/>
+            <a:round/>
+            <a:headEnd len="sm" w="sm" type="none"/>
+            <a:tailEnd len="sm" w="sm" type="none"/>
+          </a:ln>
+        </p:spPr>
+        <p:txBody>
+          <a:bodyPr anchorCtr="0" anchor="ctr" bIns="91425" lIns="91425" spcFirstLastPara="1" rIns="91425" wrap="square" tIns="91425">
+            <a:noAutofit/>
+          </a:bodyPr>
+          <a:lstStyle/>
+          <a:p>
+            <a:pPr indent="0" lvl="0" marL="0" rtl="0" algn="ctr">
+              <a:spcBef>
+                <a:spcPts val="0"/>
+              </a:spcBef>
+              <a:spcAft>
+                <a:spcPts val="0"/>
+              </a:spcAft>
+              <a:buNone/>
+            </a:pPr>
+            <a:r>
+              <a:rPr lang="en">
+                <a:solidFill>
+                  <a:srgbClr val="1E1E1E"/>
+                </a:solidFill>
+                <a:latin typeface="Google Sans"/>
+                <a:ea typeface="Google Sans"/>
+                <a:cs typeface="Google Sans"/>
+                <a:sym typeface="Google Sans"/>
+              </a:rPr>
+              <a:t>Plan</a:t>
+            </a:r>
+            <a:endParaRPr>
+              <a:solidFill>
+                <a:srgbClr val="1E1E1E"/>
+              </a:solidFill>
+              <a:latin typeface="Google Sans"/>
+              <a:ea typeface="Google Sans"/>
+              <a:cs typeface="Google Sans"/>
+              <a:sym typeface="Google Sans"/>
+            </a:endParaRPr>
+          </a:p>
+        </p:txBody>
+      </p:sp>
+      <p:sp>
+        <p:nvSpPr>
+          <p:cNvPr id="151" name="Google Shape;151;p22"/>
+          <p:cNvSpPr/>
+          <p:nvPr/>
+        </p:nvSpPr>
+        <p:spPr>
+          <a:xfrm>
+            <a:off x="2450592" y="4069080"/>
+            <a:ext cx="841266" cy="438912"/>
+          </a:xfrm>
+          <a:prstGeom prst="flowChartTerminator">
+            <a:avLst/>
+          </a:prstGeom>
+          <a:solidFill>
+            <a:srgbClr val="5CDB6D"/>
+          </a:solidFill>
+          <a:ln cap="flat" cmpd="sng" w="19050">
+            <a:solidFill>
+              <a:srgbClr val="1E1E1E"/>
+            </a:solidFill>
+            <a:prstDash val="solid"/>
+            <a:round/>
+            <a:headEnd len="sm" w="sm" type="none"/>
+            <a:tailEnd len="sm" w="sm" type="none"/>
+          </a:ln>
+        </p:spPr>
+        <p:txBody>
+          <a:bodyPr anchorCtr="0" anchor="ctr" bIns="91425" lIns="91425" spcFirstLastPara="1" rIns="91425" wrap="square" tIns="91425">
+            <a:noAutofit/>
+          </a:bodyPr>
+          <a:lstStyle/>
+          <a:p>
+            <a:pPr indent="0" lvl="0" marL="0" rtl="0" algn="ctr">
+              <a:spcBef>
+                <a:spcPts val="0"/>
+              </a:spcBef>
+              <a:spcAft>
+                <a:spcPts val="0"/>
+              </a:spcAft>
+              <a:buNone/>
+            </a:pPr>
+            <a:r>
+              <a:rPr lang="en">
+                <a:solidFill>
+                  <a:srgbClr val="1E1E1E"/>
+                </a:solidFill>
+                <a:latin typeface="Google Sans"/>
+                <a:ea typeface="Google Sans"/>
+                <a:cs typeface="Google Sans"/>
+                <a:sym typeface="Google Sans"/>
+              </a:rPr>
+              <a:t>Review</a:t>
+            </a:r>
+            <a:endParaRPr>
+              <a:solidFill>
+                <a:srgbClr val="1E1E1E"/>
+              </a:solidFill>
+              <a:latin typeface="Google Sans"/>
+              <a:ea typeface="Google Sans"/>
+              <a:cs typeface="Google Sans"/>
+              <a:sym typeface="Google Sans"/>
+            </a:endParaRPr>
+          </a:p>
+        </p:txBody>
+      </p:sp>
+      <p:sp>
+        <p:nvSpPr>
+          <p:cNvPr id="152" name="Google Shape;152;p22"/>
+          <p:cNvSpPr/>
+          <p:nvPr/>
+        </p:nvSpPr>
+        <p:spPr>
+          <a:xfrm>
+            <a:off x="3401568" y="4069080"/>
+            <a:ext cx="841266" cy="438912"/>
+          </a:xfrm>
+          <a:prstGeom prst="flowChartTerminator">
+            <a:avLst/>
+          </a:prstGeom>
+          <a:solidFill>
+            <a:srgbClr val="5CDB6D"/>
+          </a:solidFill>
+          <a:ln cap="flat" cmpd="sng" w="19050">
+            <a:solidFill>
+              <a:srgbClr val="1E1E1E"/>
+            </a:solidFill>
+            <a:prstDash val="solid"/>
+            <a:round/>
+            <a:headEnd len="sm" w="sm" type="none"/>
+            <a:tailEnd len="sm" w="sm" type="none"/>
+          </a:ln>
+        </p:spPr>
+        <p:txBody>
+          <a:bodyPr anchorCtr="0" anchor="ctr" bIns="91425" lIns="91425" spcFirstLastPara="1" rIns="91425" wrap="square" tIns="91425">
+            <a:noAutofit/>
+          </a:bodyPr>
+          <a:lstStyle/>
+          <a:p>
+            <a:pPr indent="0" lvl="0" marL="0" rtl="0" algn="ctr">
+              <a:spcBef>
+                <a:spcPts val="0"/>
+              </a:spcBef>
+              <a:spcAft>
+                <a:spcPts val="0"/>
+              </a:spcAft>
+              <a:buNone/>
+            </a:pPr>
+            <a:r>
+              <a:rPr lang="en">
+                <a:solidFill>
+                  <a:srgbClr val="1E1E1E"/>
+                </a:solidFill>
+                <a:latin typeface="Google Sans"/>
+                <a:ea typeface="Google Sans"/>
+                <a:cs typeface="Google Sans"/>
+                <a:sym typeface="Google Sans"/>
+              </a:rPr>
+              <a:t>Build</a:t>
+            </a:r>
+            <a:endParaRPr>
+              <a:solidFill>
+                <a:srgbClr val="1E1E1E"/>
+              </a:solidFill>
+              <a:latin typeface="Google Sans"/>
+              <a:ea typeface="Google Sans"/>
+              <a:cs typeface="Google Sans"/>
+              <a:sym typeface="Google Sans"/>
+            </a:endParaRPr>
+          </a:p>
+        </p:txBody>
+      </p:sp>
+      <p:sp>
+        <p:nvSpPr>
+          <p:cNvPr id="153" name="Google Shape;153;p22"/>
+          <p:cNvSpPr/>
+          <p:nvPr/>
+        </p:nvSpPr>
+        <p:spPr>
+          <a:xfrm>
+            <a:off x="4352544" y="4069080"/>
+            <a:ext cx="841266" cy="438912"/>
+          </a:xfrm>
+          <a:prstGeom prst="flowChartTerminator">
+            <a:avLst/>
+          </a:prstGeom>
+          <a:solidFill>
+            <a:srgbClr val="5CDB6D"/>
+          </a:solidFill>
+          <a:ln cap="flat" cmpd="sng" w="19050">
+            <a:solidFill>
+              <a:srgbClr val="1E1E1E"/>
+            </a:solidFill>
+            <a:prstDash val="solid"/>
+            <a:round/>
+            <a:headEnd len="sm" w="sm" type="none"/>
+            <a:tailEnd len="sm" w="sm" type="none"/>
+          </a:ln>
+        </p:spPr>
+        <p:txBody>
+          <a:bodyPr anchorCtr="0" anchor="ctr" bIns="91425" lIns="91425" spcFirstLastPara="1" rIns="91425" wrap="square" tIns="91425">
+            <a:noAutofit/>
+          </a:bodyPr>
+          <a:lstStyle/>
+          <a:p>
+            <a:pPr indent="0" lvl="0" marL="0" rtl="0" algn="ctr">
+              <a:spcBef>
+                <a:spcPts val="0"/>
+              </a:spcBef>
+              <a:spcAft>
+                <a:spcPts val="0"/>
+              </a:spcAft>
+              <a:buNone/>
+            </a:pPr>
+            <a:r>
+              <a:rPr lang="en">
+                <a:solidFill>
+                  <a:srgbClr val="1E1E1E"/>
+                </a:solidFill>
+                <a:latin typeface="Google Sans"/>
+                <a:ea typeface="Google Sans"/>
+                <a:cs typeface="Google Sans"/>
+                <a:sym typeface="Google Sans"/>
+              </a:rPr>
+              <a:t>API</a:t>
+            </a:r>
+            <a:endParaRPr>
+              <a:solidFill>
+                <a:srgbClr val="1E1E1E"/>
+              </a:solidFill>
+              <a:latin typeface="Google Sans"/>
+              <a:ea typeface="Google Sans"/>
+              <a:cs typeface="Google Sans"/>
+              <a:sym typeface="Google Sans"/>
+            </a:endParaRPr>
+          </a:p>
+        </p:txBody>
+      </p:sp>
+      <p:sp>
+        <p:nvSpPr>
+          <p:cNvPr id="154" name="Google Shape;154;p22"/>
+          <p:cNvSpPr/>
+          <p:nvPr/>
+        </p:nvSpPr>
+        <p:spPr>
+          <a:xfrm>
+            <a:off x="5303520" y="4069080"/>
+            <a:ext cx="841266" cy="438912"/>
+          </a:xfrm>
+          <a:prstGeom prst="flowChartTerminator">
+            <a:avLst/>
+          </a:prstGeom>
+          <a:solidFill>
+            <a:srgbClr val="5CDB6D"/>
+          </a:solidFill>
+          <a:ln cap="flat" cmpd="sng" w="19050">
+            <a:solidFill>
+              <a:srgbClr val="1E1E1E"/>
+            </a:solidFill>
+            <a:prstDash val="solid"/>
+            <a:round/>
+            <a:headEnd len="sm" w="sm" type="none"/>
+            <a:tailEnd len="sm" w="sm" type="none"/>
+          </a:ln>
+        </p:spPr>
+        <p:txBody>
+          <a:bodyPr anchorCtr="0" anchor="ctr" bIns="91425" lIns="91425" spcFirstLastPara="1" rIns="91425" wrap="square" tIns="91425">
+            <a:noAutofit/>
+          </a:bodyPr>
+          <a:lstStyle/>
+          <a:p>
+            <a:pPr indent="0" lvl="0" marL="0" rtl="0" algn="ctr">
+              <a:spcBef>
+                <a:spcPts val="0"/>
+              </a:spcBef>
+              <a:spcAft>
+                <a:spcPts val="0"/>
+              </a:spcAft>
+              <a:buNone/>
+            </a:pPr>
+            <a:r>
+              <a:rPr lang="en">
+                <a:solidFill>
+                  <a:srgbClr val="1E1E1E"/>
+                </a:solidFill>
+                <a:latin typeface="Google Sans"/>
+                <a:ea typeface="Google Sans"/>
+                <a:cs typeface="Google Sans"/>
+                <a:sym typeface="Google Sans"/>
+              </a:rPr>
+              <a:t>Verify</a:t>
+            </a:r>
+            <a:endParaRPr>
+              <a:solidFill>
+                <a:srgbClr val="1E1E1E"/>
+              </a:solidFill>
+              <a:latin typeface="Google Sans"/>
+              <a:ea typeface="Google Sans"/>
+              <a:cs typeface="Google Sans"/>
+              <a:sym typeface="Google Sans"/>
+            </a:endParaRPr>
+          </a:p>
+        </p:txBody>
+      </p:sp>
+      <p:sp>
+        <p:nvSpPr>
+          <p:cNvPr id="155" name="Google Shape;155;p22"/>
+          <p:cNvSpPr/>
+          <p:nvPr/>
+        </p:nvSpPr>
+        <p:spPr>
+          <a:xfrm>
+            <a:off x="6355080" y="731520"/>
+            <a:ext cx="2377500" cy="3108900"/>
+          </a:xfrm>
+          <a:prstGeom prst="roundRect">
+            <a:avLst>
+              <a:gd fmla="val 16667" name="adj"/>
+            </a:avLst>
           </a:prstGeom>
           <a:solidFill>
             <a:srgbClr val="FFFFFF"/>
@@ -8120,432 +8998,15 @@
               <a:buNone/>
             </a:pPr>
             <a:r>
-              <a:rPr lang="en" sz="2400">
-                <a:solidFill>
-                  <a:srgbClr val="1E1E1E"/>
-                </a:solidFill>
-                <a:latin typeface="Google Sans"/>
-                <a:ea typeface="Google Sans"/>
-                <a:cs typeface="Google Sans"/>
-                <a:sym typeface="Google Sans"/>
-              </a:rPr>
-              <a:t>Clone the Starter Repo</a:t>
-            </a:r>
-            <a:endParaRPr sz="2400">
-              <a:solidFill>
-                <a:srgbClr val="1E1E1E"/>
-              </a:solidFill>
-              <a:latin typeface="Google Sans"/>
-              <a:ea typeface="Google Sans"/>
-              <a:cs typeface="Google Sans"/>
-              <a:sym typeface="Google Sans"/>
-            </a:endParaRPr>
-          </a:p>
-        </p:txBody>
-      </p:sp>
-      <p:sp>
-        <p:nvSpPr>
-          <p:cNvPr id="157" name="Google Shape;157;p22"/>
-          <p:cNvSpPr/>
-          <p:nvPr/>
-        </p:nvSpPr>
-        <p:spPr>
-          <a:xfrm>
-            <a:off x="7086600" y="393192"/>
-            <a:ext cx="1645920" cy="420606"/>
-          </a:xfrm>
-          <a:prstGeom prst="flowChartTerminator">
-            <a:avLst/>
-          </a:prstGeom>
-          <a:solidFill>
-            <a:srgbClr val="5CDB6D"/>
-          </a:solidFill>
-          <a:ln cap="flat" cmpd="sng" w="19050">
-            <a:solidFill>
-              <a:srgbClr val="1E1E1E"/>
-            </a:solidFill>
-            <a:prstDash val="solid"/>
-            <a:round/>
-            <a:headEnd len="sm" w="sm" type="none"/>
-            <a:tailEnd len="sm" w="sm" type="none"/>
-          </a:ln>
-        </p:spPr>
-        <p:txBody>
-          <a:bodyPr anchorCtr="0" anchor="ctr" bIns="91425" lIns="91425" spcFirstLastPara="1" rIns="91425" wrap="square" tIns="91425">
-            <a:noAutofit/>
-          </a:bodyPr>
-          <a:lstStyle/>
-          <a:p>
-            <a:pPr indent="0" lvl="0" marL="0" rtl="0" algn="ctr">
-              <a:spcBef>
-                <a:spcPts val="0"/>
-              </a:spcBef>
-              <a:spcAft>
-                <a:spcPts val="0"/>
-              </a:spcAft>
-              <a:buNone/>
-            </a:pPr>
-            <a:r>
-              <a:rPr lang="en">
-                <a:solidFill>
-                  <a:srgbClr val="1E1E1E"/>
-                </a:solidFill>
-                <a:latin typeface="Google Sans"/>
-                <a:ea typeface="Google Sans"/>
-                <a:cs typeface="Google Sans"/>
-                <a:sym typeface="Google Sans"/>
-              </a:rPr>
-              <a:t>Step 3</a:t>
-            </a:r>
-            <a:endParaRPr>
-              <a:solidFill>
-                <a:srgbClr val="1E1E1E"/>
-              </a:solidFill>
-              <a:latin typeface="Google Sans"/>
-              <a:ea typeface="Google Sans"/>
-              <a:cs typeface="Google Sans"/>
-              <a:sym typeface="Google Sans"/>
-            </a:endParaRPr>
-          </a:p>
-        </p:txBody>
-      </p:sp>
-      <p:sp>
-        <p:nvSpPr>
-          <p:cNvPr id="158" name="Google Shape;158;p22"/>
-          <p:cNvSpPr/>
-          <p:nvPr/>
-        </p:nvSpPr>
-        <p:spPr>
-          <a:xfrm>
-            <a:off x="411480" y="1097280"/>
-            <a:ext cx="5715000" cy="3612000"/>
-          </a:xfrm>
-          <a:prstGeom prst="roundRect">
-            <a:avLst>
-              <a:gd fmla="val 16667" name="adj"/>
-            </a:avLst>
-          </a:prstGeom>
-          <a:solidFill>
-            <a:srgbClr val="CCF6C5"/>
-          </a:solidFill>
-          <a:ln cap="flat" cmpd="sng" w="19050">
-            <a:solidFill>
-              <a:srgbClr val="1E1E1E"/>
-            </a:solidFill>
-            <a:prstDash val="solid"/>
-            <a:round/>
-            <a:headEnd len="sm" w="sm" type="none"/>
-            <a:tailEnd len="sm" w="sm" type="none"/>
-          </a:ln>
-        </p:spPr>
-        <p:txBody>
-          <a:bodyPr anchorCtr="0" anchor="ctr" bIns="91425" lIns="91425" spcFirstLastPara="1" rIns="91425" wrap="square" tIns="91425">
-            <a:noAutofit/>
-          </a:bodyPr>
-          <a:lstStyle/>
-          <a:p>
-            <a:pPr indent="0" lvl="0" marL="0" rtl="0" algn="ctr">
-              <a:spcBef>
-                <a:spcPts val="0"/>
-              </a:spcBef>
-              <a:spcAft>
-                <a:spcPts val="0"/>
-              </a:spcAft>
-              <a:buNone/>
-            </a:pPr>
-            <a:r>
               <a:t/>
             </a:r>
             <a:endParaRPr/>
-          </a:p>
-        </p:txBody>
-      </p:sp>
-      <p:sp>
-        <p:nvSpPr>
-          <p:cNvPr id="159" name="Google Shape;159;p22"/>
-          <p:cNvSpPr/>
-          <p:nvPr/>
-        </p:nvSpPr>
-        <p:spPr>
-          <a:xfrm>
-            <a:off x="6355080" y="1097280"/>
-            <a:ext cx="2377500" cy="3612000"/>
-          </a:xfrm>
-          <a:prstGeom prst="roundRect">
-            <a:avLst>
-              <a:gd fmla="val 16667" name="adj"/>
-            </a:avLst>
-          </a:prstGeom>
-          <a:solidFill>
-            <a:srgbClr val="FFFFFF"/>
-          </a:solidFill>
-          <a:ln cap="flat" cmpd="sng" w="19050">
-            <a:solidFill>
-              <a:srgbClr val="1E1E1E"/>
-            </a:solidFill>
-            <a:prstDash val="solid"/>
-            <a:round/>
-            <a:headEnd len="sm" w="sm" type="none"/>
-            <a:tailEnd len="sm" w="sm" type="none"/>
-          </a:ln>
-        </p:spPr>
-        <p:txBody>
-          <a:bodyPr anchorCtr="0" anchor="ctr" bIns="91425" lIns="91425" spcFirstLastPara="1" rIns="91425" wrap="square" tIns="91425">
-            <a:noAutofit/>
-          </a:bodyPr>
-          <a:lstStyle/>
-          <a:p>
-            <a:pPr indent="0" lvl="0" marL="0" rtl="0" algn="ctr">
-              <a:spcBef>
-                <a:spcPts val="0"/>
-              </a:spcBef>
-              <a:spcAft>
-                <a:spcPts val="0"/>
-              </a:spcAft>
-              <a:buNone/>
-            </a:pPr>
-            <a:r>
-              <a:t/>
-            </a:r>
-            <a:endParaRPr/>
-          </a:p>
-        </p:txBody>
-      </p:sp>
-      <p:sp>
-        <p:nvSpPr>
-          <p:cNvPr id="160" name="Google Shape;160;p22"/>
-          <p:cNvSpPr txBox="1"/>
-          <p:nvPr/>
-        </p:nvSpPr>
-        <p:spPr>
-          <a:xfrm>
-            <a:off x="731520" y="1463040"/>
-            <a:ext cx="5120700" cy="3108900"/>
-          </a:xfrm>
-          <a:prstGeom prst="rect">
-            <a:avLst/>
-          </a:prstGeom>
-          <a:noFill/>
-          <a:ln>
-            <a:noFill/>
-          </a:ln>
-        </p:spPr>
-        <p:txBody>
-          <a:bodyPr anchorCtr="0" anchor="t" bIns="91425" lIns="91425" spcFirstLastPara="1" rIns="91425" wrap="square" tIns="91425">
-            <a:noAutofit/>
-          </a:bodyPr>
-          <a:lstStyle/>
-          <a:p>
-            <a:pPr indent="-342900" lvl="0" marL="457200" rtl="0" algn="l">
-              <a:spcBef>
-                <a:spcPts val="0"/>
-              </a:spcBef>
-              <a:spcAft>
-                <a:spcPts val="0"/>
-              </a:spcAft>
-              <a:buClr>
-                <a:srgbClr val="1E1E1E"/>
-              </a:buClr>
-              <a:buSzPts val="1800"/>
-              <a:buFont typeface="Google Sans"/>
-              <a:buChar char="●"/>
-            </a:pPr>
-            <a:r>
-              <a:rPr lang="en" sz="1800">
-                <a:solidFill>
-                  <a:srgbClr val="1E1E1E"/>
-                </a:solidFill>
-                <a:latin typeface="Google Sans"/>
-                <a:ea typeface="Google Sans"/>
-                <a:cs typeface="Google Sans"/>
-                <a:sym typeface="Google Sans"/>
-              </a:rPr>
-              <a:t>Repo: gca-americas/codingjam-bulletproof</a:t>
-            </a:r>
-            <a:endParaRPr sz="1800">
-              <a:solidFill>
-                <a:srgbClr val="1E1E1E"/>
-              </a:solidFill>
-              <a:latin typeface="Google Sans"/>
-              <a:ea typeface="Google Sans"/>
-              <a:cs typeface="Google Sans"/>
-              <a:sym typeface="Google Sans"/>
-            </a:endParaRPr>
-          </a:p>
-          <a:p>
-            <a:pPr indent="-342900" lvl="0" marL="457200" rtl="0" algn="l">
-              <a:spcBef>
-                <a:spcPts val="1200"/>
-              </a:spcBef>
-              <a:spcAft>
-                <a:spcPts val="0"/>
-              </a:spcAft>
-              <a:buClr>
-                <a:srgbClr val="1E1E1E"/>
-              </a:buClr>
-              <a:buSzPts val="1800"/>
-              <a:buFont typeface="Google Sans"/>
-              <a:buChar char="●"/>
-            </a:pPr>
-            <a:r>
-              <a:rPr lang="en" sz="1800">
-                <a:solidFill>
-                  <a:srgbClr val="1E1E1E"/>
-                </a:solidFill>
-                <a:latin typeface="Google Sans"/>
-                <a:ea typeface="Google Sans"/>
-                <a:cs typeface="Google Sans"/>
-                <a:sym typeface="Google Sans"/>
-              </a:rPr>
-              <a:t>Use Antigravity's Clone Repository button</a:t>
-            </a:r>
-            <a:endParaRPr sz="1800">
-              <a:solidFill>
-                <a:srgbClr val="1E1E1E"/>
-              </a:solidFill>
-              <a:latin typeface="Google Sans"/>
-              <a:ea typeface="Google Sans"/>
-              <a:cs typeface="Google Sans"/>
-              <a:sym typeface="Google Sans"/>
-            </a:endParaRPr>
-          </a:p>
-          <a:p>
-            <a:pPr indent="-342900" lvl="0" marL="457200" rtl="0" algn="l">
-              <a:spcBef>
-                <a:spcPts val="1200"/>
-              </a:spcBef>
-              <a:spcAft>
-                <a:spcPts val="0"/>
-              </a:spcAft>
-              <a:buClr>
-                <a:srgbClr val="1E1E1E"/>
-              </a:buClr>
-              <a:buSzPts val="1800"/>
-              <a:buFont typeface="Google Sans"/>
-              <a:buChar char="●"/>
-            </a:pPr>
-            <a:r>
-              <a:rPr lang="en" sz="1800">
-                <a:solidFill>
-                  <a:srgbClr val="1E1E1E"/>
-                </a:solidFill>
-                <a:latin typeface="Google Sans"/>
-                <a:ea typeface="Google Sans"/>
-                <a:cs typeface="Google Sans"/>
-                <a:sym typeface="Google Sans"/>
-              </a:rPr>
-              <a:t>Read BRIEF.md and the reference/ folder</a:t>
-            </a:r>
-            <a:endParaRPr sz="1800">
-              <a:solidFill>
-                <a:srgbClr val="1E1E1E"/>
-              </a:solidFill>
-              <a:latin typeface="Google Sans"/>
-              <a:ea typeface="Google Sans"/>
-              <a:cs typeface="Google Sans"/>
-              <a:sym typeface="Google Sans"/>
-            </a:endParaRPr>
-          </a:p>
-          <a:p>
-            <a:pPr indent="-342900" lvl="0" marL="457200" rtl="0" algn="l">
-              <a:spcBef>
-                <a:spcPts val="1200"/>
-              </a:spcBef>
-              <a:spcAft>
-                <a:spcPts val="1200"/>
-              </a:spcAft>
-              <a:buClr>
-                <a:srgbClr val="1E1E1E"/>
-              </a:buClr>
-              <a:buSzPts val="1800"/>
-              <a:buFont typeface="Google Sans"/>
-              <a:buChar char="●"/>
-            </a:pPr>
-            <a:r>
-              <a:rPr lang="en" sz="1800">
-                <a:solidFill>
-                  <a:srgbClr val="1E1E1E"/>
-                </a:solidFill>
-                <a:latin typeface="Google Sans"/>
-                <a:ea typeface="Google Sans"/>
-                <a:cs typeface="Google Sans"/>
-                <a:sym typeface="Google Sans"/>
-              </a:rPr>
-              <a:t>Replace PASTE_YOUR_PROJECT and PASTE_YOUR_LOCATION, or .env gets placeholders</a:t>
-            </a:r>
-            <a:endParaRPr sz="1800">
-              <a:solidFill>
-                <a:srgbClr val="1E1E1E"/>
-              </a:solidFill>
-              <a:latin typeface="Google Sans"/>
-              <a:ea typeface="Google Sans"/>
-              <a:cs typeface="Google Sans"/>
-              <a:sym typeface="Google Sans"/>
-            </a:endParaRPr>
-          </a:p>
-        </p:txBody>
-      </p:sp>
-      <p:sp>
-        <p:nvSpPr>
-          <p:cNvPr id="161" name="Google Shape;161;p22"/>
-          <p:cNvSpPr txBox="1"/>
-          <p:nvPr/>
-        </p:nvSpPr>
-        <p:spPr>
-          <a:xfrm>
-            <a:off x="6492240" y="3566160"/>
-            <a:ext cx="2103000" cy="457200"/>
-          </a:xfrm>
-          <a:prstGeom prst="rect">
-            <a:avLst/>
-          </a:prstGeom>
-          <a:noFill/>
-          <a:ln>
-            <a:noFill/>
-          </a:ln>
-        </p:spPr>
-        <p:txBody>
-          <a:bodyPr anchorCtr="0" anchor="t" bIns="91425" lIns="91425" spcFirstLastPara="1" rIns="91425" wrap="square" tIns="91425">
-            <a:noAutofit/>
-          </a:bodyPr>
-          <a:lstStyle/>
-          <a:p>
-            <a:pPr indent="0" lvl="0" marL="0" rtl="0" algn="ctr">
-              <a:spcBef>
-                <a:spcPts val="0"/>
-              </a:spcBef>
-              <a:spcAft>
-                <a:spcPts val="0"/>
-              </a:spcAft>
-              <a:buNone/>
-            </a:pPr>
-            <a:r>
-              <a:rPr lang="en" sz="1600">
-                <a:solidFill>
-                  <a:srgbClr val="1E1E1E"/>
-                </a:solidFill>
-                <a:latin typeface="Google Sans"/>
-                <a:ea typeface="Google Sans"/>
-                <a:cs typeface="Google Sans"/>
-                <a:sym typeface="Google Sans"/>
-              </a:rPr>
-              <a:t>Codelab step 3</a:t>
-            </a:r>
-            <a:endParaRPr sz="1600">
-              <a:solidFill>
-                <a:srgbClr val="1E1E1E"/>
-              </a:solidFill>
-              <a:latin typeface="Google Sans"/>
-              <a:ea typeface="Google Sans"/>
-              <a:cs typeface="Google Sans"/>
-              <a:sym typeface="Google Sans"/>
-            </a:endParaRPr>
           </a:p>
         </p:txBody>
       </p:sp>
       <p:pic>
         <p:nvPicPr>
-          <p:cNvPr id="162" name="Google Shape;162;p22"/>
+          <p:cNvPr id="156" name="Google Shape;156;p22"/>
           <p:cNvPicPr preferRelativeResize="0"/>
           <p:nvPr/>
         </p:nvPicPr>
@@ -8559,7 +9020,7 @@
         </p:blipFill>
         <p:spPr>
           <a:xfrm>
-            <a:off x="6537960" y="1417320"/>
+            <a:off x="6537960" y="914400"/>
             <a:ext cx="2011680" cy="2011680"/>
           </a:xfrm>
           <a:prstGeom prst="rect">
@@ -8571,6 +9032,64 @@
           </a:ln>
         </p:spPr>
       </p:pic>
+      <p:sp>
+        <p:nvSpPr>
+          <p:cNvPr id="157" name="Google Shape;157;p22"/>
+          <p:cNvSpPr txBox="1"/>
+          <p:nvPr/>
+        </p:nvSpPr>
+        <p:spPr>
+          <a:xfrm>
+            <a:off x="6492240" y="3063240"/>
+            <a:ext cx="2103000" cy="457200"/>
+          </a:xfrm>
+          <a:prstGeom prst="rect">
+            <a:avLst/>
+          </a:prstGeom>
+          <a:noFill/>
+          <a:ln>
+            <a:noFill/>
+          </a:ln>
+        </p:spPr>
+        <p:txBody>
+          <a:bodyPr anchorCtr="0" anchor="t" bIns="91425" lIns="91425" spcFirstLastPara="1" rIns="91425" wrap="square" tIns="91425">
+            <a:noAutofit/>
+          </a:bodyPr>
+          <a:lstStyle/>
+          <a:p>
+            <a:pPr indent="0" lvl="0" marL="0" rtl="0" algn="ctr">
+              <a:spcBef>
+                <a:spcPts val="0"/>
+              </a:spcBef>
+              <a:spcAft>
+                <a:spcPts val="0"/>
+              </a:spcAft>
+              <a:buNone/>
+            </a:pPr>
+            <a:r>
+              <a:rPr lang="en" sz="1600">
+                <a:solidFill>
+                  <a:srgbClr val="1E1E1E"/>
+                </a:solidFill>
+                <a:latin typeface="Google Sans"/>
+                <a:ea typeface="Google Sans"/>
+                <a:cs typeface="Google Sans"/>
+                <a:sym typeface="Google Sans"/>
+              </a:rPr>
+              <a:t>Scan for the codelab</a:t>
+            </a:r>
+            <a:endParaRPr sz="1600">
+              <a:solidFill>
+                <a:srgbClr val="1E1E1E"/>
+              </a:solidFill>
+              <a:latin typeface="Google Sans"/>
+              <a:ea typeface="Google Sans"/>
+              <a:cs typeface="Google Sans"/>
+              <a:sym typeface="Google Sans"/>
+            </a:endParaRPr>
+          </a:p>
+        </p:txBody>
+      </p:sp>
     </p:spTree>
   </p:cSld>
   <p:clrMapOvr>
@@ -8591,7 +9110,7 @@
     </p:bg>
     <p:spTree>
       <p:nvGrpSpPr>
-        <p:cNvPr id="166" name="Shape 166"/>
+        <p:cNvPr id="161" name="Shape 161"/>
         <p:cNvGrpSpPr/>
         <p:nvPr/>
       </p:nvGrpSpPr>
@@ -8605,14 +9124,14 @@
       </p:grpSpPr>
       <p:sp>
         <p:nvSpPr>
-          <p:cNvPr id="167" name="Google Shape;167;p23"/>
+          <p:cNvPr id="162" name="Google Shape;162;p23"/>
           <p:cNvSpPr/>
           <p:nvPr/>
         </p:nvSpPr>
         <p:spPr>
           <a:xfrm>
             <a:off x="411480" y="320040"/>
-            <a:ext cx="4960386" cy="566946"/>
+            <a:ext cx="6080562" cy="566946"/>
           </a:xfrm>
           <a:prstGeom prst="flowChartTerminator">
             <a:avLst/>
@@ -8655,7 +9174,7 @@
                 <a:cs typeface="Google Sans"/>
                 <a:sym typeface="Google Sans"/>
               </a:rPr>
-              <a:t>Install the Workshop Skills</a:t>
+              <a:t>Install and Sign In to Antigravity</a:t>
             </a:r>
             <a:endParaRPr sz="2400">
               <a:solidFill>
@@ -8671,7 +9190,7 @@
       </p:sp>
       <p:sp>
         <p:nvSpPr>
-          <p:cNvPr id="168" name="Google Shape;168;p23"/>
+          <p:cNvPr id="163" name="Google Shape;163;p23"/>
           <p:cNvSpPr/>
           <p:nvPr/>
         </p:nvSpPr>
@@ -8721,7 +9240,7 @@
                 <a:cs typeface="Google Sans"/>
                 <a:sym typeface="Google Sans"/>
               </a:rPr>
-              <a:t>Step 4</a:t>
+              <a:t>Step 1</a:t>
             </a:r>
             <a:endParaRPr>
               <a:solidFill>
@@ -8737,7 +9256,7 @@
       </p:sp>
       <p:sp>
         <p:nvSpPr>
-          <p:cNvPr id="169" name="Google Shape;169;p23"/>
+          <p:cNvPr id="164" name="Google Shape;164;p23"/>
           <p:cNvSpPr/>
           <p:nvPr/>
         </p:nvSpPr>
@@ -8788,7 +9307,7 @@
       </p:sp>
       <p:sp>
         <p:nvSpPr>
-          <p:cNvPr id="170" name="Google Shape;170;p23"/>
+          <p:cNvPr id="165" name="Google Shape;165;p23"/>
           <p:cNvSpPr/>
           <p:nvPr/>
         </p:nvSpPr>
@@ -8839,7 +9358,7 @@
       </p:sp>
       <p:sp>
         <p:nvSpPr>
-          <p:cNvPr id="171" name="Google Shape;171;p23"/>
+          <p:cNvPr id="166" name="Google Shape;166;p23"/>
           <p:cNvSpPr txBox="1"/>
           <p:nvPr/>
         </p:nvSpPr>
@@ -8886,7 +9405,7 @@
                 <a:cs typeface="Google Sans"/>
                 <a:sym typeface="Google Sans"/>
               </a:rPr>
-              <a:t>Ask the agent to clone skills-garden and gemini-skills into .agent/skills/</a:t>
+              <a:t>Done in setup: Antigravity installed and signed in with Business account</a:t>
             </a:r>
             <a:endParaRPr sz="1800">
               <a:solidFill>
@@ -8904,7 +9423,7 @@
                 <a:spcPts val="1200"/>
               </a:spcBef>
               <a:spcAft>
-                <a:spcPts val="0"/>
+                <a:spcPts val="1200"/>
               </a:spcAft>
               <a:buClr>
                 <a:srgbClr val="1E1E1E"/>
@@ -8923,7 +9442,7 @@
                 <a:cs typeface="Google Sans"/>
                 <a:sym typeface="Google Sans"/>
               </a:rPr>
-              <a:t>Click Allow on both git pop-ups</a:t>
+              <a:t>Check: the welcome screen shows Open Folder and Clone Repository</a:t>
             </a:r>
             <a:endParaRPr sz="1800">
               <a:solidFill>
@@ -8935,48 +9454,11 @@
               <a:sym typeface="Google Sans"/>
             </a:endParaRPr>
           </a:p>
-          <a:p>
-            <a:pPr indent="-342900" lvl="0" marL="457200" rtl="0" algn="l">
-              <a:spcBef>
-                <a:spcPts val="1200"/>
-              </a:spcBef>
-              <a:spcAft>
-                <a:spcPts val="1200"/>
-              </a:spcAft>
-              <a:buClr>
-                <a:srgbClr val="1E1E1E"/>
-              </a:buClr>
-              <a:buSzPts val="1800"/>
-              <a:buFont typeface="Google Sans"/>
-              <a:buChar char="●"/>
-            </a:pPr>
-            <a:r>
-              <a:rPr lang="en" sz="1800">
-                <a:solidFill>
-                  <a:srgbClr val="1E1E1E"/>
-                </a:solidFill>
-                <a:latin typeface="Google Sans"/>
-                <a:ea typeface="Google Sans"/>
-                <a:cs typeface="Google Sans"/>
-                <a:sym typeface="Google Sans"/>
-              </a:rPr>
-              <a:t>Leave Turbo mode off</a:t>
-            </a:r>
-            <a:endParaRPr sz="1800">
-              <a:solidFill>
-                <a:srgbClr val="1E1E1E"/>
-              </a:solidFill>
-              <a:latin typeface="Google Sans"/>
-              <a:ea typeface="Google Sans"/>
-              <a:cs typeface="Google Sans"/>
-              <a:sym typeface="Google Sans"/>
-            </a:endParaRPr>
-          </a:p>
         </p:txBody>
       </p:sp>
       <p:sp>
         <p:nvSpPr>
-          <p:cNvPr id="172" name="Google Shape;172;p23"/>
+          <p:cNvPr id="167" name="Google Shape;167;p23"/>
           <p:cNvSpPr txBox="1"/>
           <p:nvPr/>
         </p:nvSpPr>
@@ -9018,7 +9500,7 @@
                 <a:cs typeface="Google Sans"/>
                 <a:sym typeface="Google Sans"/>
               </a:rPr>
-              <a:t>Codelab step 4</a:t>
+              <a:t>Codelab step 1</a:t>
             </a:r>
             <a:endParaRPr sz="1600">
               <a:solidFill>
@@ -9034,7 +9516,7 @@
       </p:sp>
       <p:pic>
         <p:nvPicPr>
-          <p:cNvPr id="173" name="Google Shape;173;p23"/>
+          <p:cNvPr id="168" name="Google Shape;168;p23"/>
           <p:cNvPicPr preferRelativeResize="0"/>
           <p:nvPr/>
         </p:nvPicPr>
@@ -9080,7 +9562,7 @@
     </p:bg>
     <p:spTree>
       <p:nvGrpSpPr>
-        <p:cNvPr id="177" name="Shape 177"/>
+        <p:cNvPr id="172" name="Shape 172"/>
         <p:cNvGrpSpPr/>
         <p:nvPr/>
       </p:nvGrpSpPr>
@@ -9094,14 +9576,14 @@
       </p:grpSpPr>
       <p:sp>
         <p:nvSpPr>
-          <p:cNvPr id="178" name="Google Shape;178;p24"/>
+          <p:cNvPr id="173" name="Google Shape;173;p24"/>
           <p:cNvSpPr/>
           <p:nvPr/>
         </p:nvSpPr>
         <p:spPr>
           <a:xfrm>
             <a:off x="411480" y="320040"/>
-            <a:ext cx="5600394" cy="566946"/>
+            <a:ext cx="5920668" cy="566946"/>
           </a:xfrm>
           <a:prstGeom prst="flowChartTerminator">
             <a:avLst/>
@@ -9144,7 +9626,7 @@
                 <a:cs typeface="Google Sans"/>
                 <a:sym typeface="Google Sans"/>
               </a:rPr>
-              <a:t>The Spec Talk Takes Two Minutes</a:t>
+              <a:t>Install uv and Git With the Agent</a:t>
             </a:r>
             <a:endParaRPr sz="2400">
               <a:solidFill>
@@ -9160,7 +9642,7 @@
       </p:sp>
       <p:sp>
         <p:nvSpPr>
-          <p:cNvPr id="179" name="Google Shape;179;p24"/>
+          <p:cNvPr id="174" name="Google Shape;174;p24"/>
           <p:cNvSpPr/>
           <p:nvPr/>
         </p:nvSpPr>
@@ -9210,7 +9692,7 @@
                 <a:cs typeface="Google Sans"/>
                 <a:sym typeface="Google Sans"/>
               </a:rPr>
-              <a:t>Step 5</a:t>
+              <a:t>Step 2</a:t>
             </a:r>
             <a:endParaRPr>
               <a:solidFill>
@@ -9226,7 +9708,7 @@
       </p:sp>
       <p:sp>
         <p:nvSpPr>
-          <p:cNvPr id="180" name="Google Shape;180;p24"/>
+          <p:cNvPr id="175" name="Google Shape;175;p24"/>
           <p:cNvSpPr/>
           <p:nvPr/>
         </p:nvSpPr>
@@ -9277,7 +9759,7 @@
       </p:sp>
       <p:sp>
         <p:nvSpPr>
-          <p:cNvPr id="181" name="Google Shape;181;p24"/>
+          <p:cNvPr id="176" name="Google Shape;176;p24"/>
           <p:cNvSpPr/>
           <p:nvPr/>
         </p:nvSpPr>
@@ -9328,7 +9810,7 @@
       </p:sp>
       <p:sp>
         <p:nvSpPr>
-          <p:cNvPr id="182" name="Google Shape;182;p24"/>
+          <p:cNvPr id="177" name="Google Shape;177;p24"/>
           <p:cNvSpPr txBox="1"/>
           <p:nvPr/>
         </p:nvSpPr>
@@ -9375,7 +9857,7 @@
                 <a:cs typeface="Google Sans"/>
                 <a:sym typeface="Google Sans"/>
               </a:rPr>
-              <a:t>The agent asks three questions: inputs, the magical moment, out of scope</a:t>
+              <a:t>Open an empty folder, such as coding-jam-setup</a:t>
             </a:r>
             <a:endParaRPr sz="1800">
               <a:solidFill>
@@ -9412,7 +9894,7 @@
                 <a:cs typeface="Google Sans"/>
                 <a:sym typeface="Google Sans"/>
               </a:rPr>
-              <a:t>Answer them; no files get written yet</a:t>
+              <a:t>Prompt: “Install uv and git on my computer if they're not already there.”</a:t>
             </a:r>
             <a:endParaRPr sz="1800">
               <a:solidFill>
@@ -9430,7 +9912,7 @@
                 <a:spcPts val="1200"/>
               </a:spcBef>
               <a:spcAft>
-                <a:spcPts val="1200"/>
+                <a:spcPts val="0"/>
               </a:spcAft>
               <a:buClr>
                 <a:srgbClr val="1E1E1E"/>
@@ -9449,7 +9931,7 @@
                 <a:cs typeface="Google Sans"/>
                 <a:sym typeface="Google Sans"/>
               </a:rPr>
-              <a:t>If product.md appears, ask the agent to delete it</a:t>
+              <a:t>Approve each install command; skip Node.js</a:t>
             </a:r>
             <a:endParaRPr sz="1800">
               <a:solidFill>
@@ -9461,11 +9943,48 @@
               <a:sym typeface="Google Sans"/>
             </a:endParaRPr>
           </a:p>
+          <a:p>
+            <a:pPr indent="-342900" lvl="0" marL="457200" rtl="0" algn="l">
+              <a:spcBef>
+                <a:spcPts val="1200"/>
+              </a:spcBef>
+              <a:spcAft>
+                <a:spcPts val="1200"/>
+              </a:spcAft>
+              <a:buClr>
+                <a:srgbClr val="1E1E1E"/>
+              </a:buClr>
+              <a:buSzPts val="1800"/>
+              <a:buFont typeface="Google Sans"/>
+              <a:buChar char="●"/>
+            </a:pPr>
+            <a:r>
+              <a:rPr lang="en" sz="1800">
+                <a:solidFill>
+                  <a:srgbClr val="1E1E1E"/>
+                </a:solidFill>
+                <a:latin typeface="Google Sans"/>
+                <a:ea typeface="Google Sans"/>
+                <a:cs typeface="Google Sans"/>
+                <a:sym typeface="Google Sans"/>
+              </a:rPr>
+              <a:t>If it fails, install uv and git by hand, then ask the agent to check</a:t>
+            </a:r>
+            <a:endParaRPr sz="1800">
+              <a:solidFill>
+                <a:srgbClr val="1E1E1E"/>
+              </a:solidFill>
+              <a:latin typeface="Google Sans"/>
+              <a:ea typeface="Google Sans"/>
+              <a:cs typeface="Google Sans"/>
+              <a:sym typeface="Google Sans"/>
+            </a:endParaRPr>
+          </a:p>
         </p:txBody>
       </p:sp>
       <p:sp>
         <p:nvSpPr>
-          <p:cNvPr id="183" name="Google Shape;183;p24"/>
+          <p:cNvPr id="178" name="Google Shape;178;p24"/>
           <p:cNvSpPr txBox="1"/>
           <p:nvPr/>
         </p:nvSpPr>
@@ -9507,7 +10026,7 @@
                 <a:cs typeface="Google Sans"/>
                 <a:sym typeface="Google Sans"/>
               </a:rPr>
-              <a:t>Codelab step 5</a:t>
+              <a:t>Codelab step 2</a:t>
             </a:r>
             <a:endParaRPr sz="1600">
               <a:solidFill>
@@ -9523,7 +10042,7 @@
       </p:sp>
       <p:pic>
         <p:nvPicPr>
-          <p:cNvPr id="184" name="Google Shape;184;p24"/>
+          <p:cNvPr id="179" name="Google Shape;179;p24"/>
           <p:cNvPicPr preferRelativeResize="0"/>
           <p:nvPr/>
         </p:nvPicPr>
@@ -9569,7 +10088,7 @@
     </p:bg>
     <p:spTree>
       <p:nvGrpSpPr>
-        <p:cNvPr id="188" name="Shape 188"/>
+        <p:cNvPr id="183" name="Shape 183"/>
         <p:cNvGrpSpPr/>
         <p:nvPr/>
       </p:nvGrpSpPr>
@@ -9583,14 +10102,14 @@
       </p:grpSpPr>
       <p:sp>
         <p:nvSpPr>
-          <p:cNvPr id="189" name="Google Shape;189;p25"/>
+          <p:cNvPr id="184" name="Google Shape;184;p25"/>
           <p:cNvSpPr/>
           <p:nvPr/>
         </p:nvSpPr>
         <p:spPr>
           <a:xfrm>
             <a:off x="411480" y="320040"/>
-            <a:ext cx="5280714" cy="566946"/>
+            <a:ext cx="4160484" cy="566946"/>
           </a:xfrm>
           <a:prstGeom prst="flowChartTerminator">
             <a:avLst/>
@@ -9633,7 +10152,7 @@
                 <a:cs typeface="Google Sans"/>
                 <a:sym typeface="Google Sans"/>
               </a:rPr>
-              <a:t>Three Design Docs Before Code</a:t>
+              <a:t>Clone the Starter Repo</a:t>
             </a:r>
             <a:endParaRPr sz="2400">
               <a:solidFill>
@@ -9649,7 +10168,7 @@
       </p:sp>
       <p:sp>
         <p:nvSpPr>
-          <p:cNvPr id="190" name="Google Shape;190;p25"/>
+          <p:cNvPr id="185" name="Google Shape;185;p25"/>
           <p:cNvSpPr/>
           <p:nvPr/>
         </p:nvSpPr>
@@ -9699,7 +10218,7 @@
                 <a:cs typeface="Google Sans"/>
                 <a:sym typeface="Google Sans"/>
               </a:rPr>
-              <a:t>Step 6</a:t>
+              <a:t>Step 3</a:t>
             </a:r>
             <a:endParaRPr>
               <a:solidFill>
@@ -9715,7 +10234,7 @@
       </p:sp>
       <p:sp>
         <p:nvSpPr>
-          <p:cNvPr id="191" name="Google Shape;191;p25"/>
+          <p:cNvPr id="186" name="Google Shape;186;p25"/>
           <p:cNvSpPr/>
           <p:nvPr/>
         </p:nvSpPr>
@@ -9766,7 +10285,7 @@
       </p:sp>
       <p:sp>
         <p:nvSpPr>
-          <p:cNvPr id="192" name="Google Shape;192;p25"/>
+          <p:cNvPr id="187" name="Google Shape;187;p25"/>
           <p:cNvSpPr/>
           <p:nvPr/>
         </p:nvSpPr>
@@ -9817,7 +10336,7 @@
       </p:sp>
       <p:sp>
         <p:nvSpPr>
-          <p:cNvPr id="193" name="Google Shape;193;p25"/>
+          <p:cNvPr id="188" name="Google Shape;188;p25"/>
           <p:cNvSpPr txBox="1"/>
           <p:nvPr/>
         </p:nvSpPr>
@@ -9864,20 +10383,33 @@
                 <a:cs typeface="Google Sans"/>
                 <a:sym typeface="Google Sans"/>
               </a:rPr>
-              <a:t>Gemini 3.8 - </a:t>
-            </a:r>
-            <a:r>
-              <a:rPr i="1" lang="en" sz="1800">
-                <a:solidFill>
-                  <a:srgbClr val="1E1E1E"/>
-                </a:solidFill>
-                <a:latin typeface="Google Sans"/>
-                <a:ea typeface="Google Sans"/>
-                <a:cs typeface="Google Sans"/>
-                <a:sym typeface="Google Sans"/>
-              </a:rPr>
-              <a:t>Argon is limited</a:t>
-            </a:r>
+              <a:t>Repo: gca-americas/codingjam-bulletproof</a:t>
+            </a:r>
+            <a:endParaRPr sz="1800">
+              <a:solidFill>
+                <a:srgbClr val="1E1E1E"/>
+              </a:solidFill>
+              <a:latin typeface="Google Sans"/>
+              <a:ea typeface="Google Sans"/>
+              <a:cs typeface="Google Sans"/>
+              <a:sym typeface="Google Sans"/>
+            </a:endParaRPr>
+          </a:p>
+          <a:p>
+            <a:pPr indent="-342900" lvl="0" marL="457200" rtl="0" algn="l">
+              <a:spcBef>
+                <a:spcPts val="1200"/>
+              </a:spcBef>
+              <a:spcAft>
+                <a:spcPts val="0"/>
+              </a:spcAft>
+              <a:buClr>
+                <a:srgbClr val="1E1E1E"/>
+              </a:buClr>
+              <a:buSzPts val="1800"/>
+              <a:buFont typeface="Google Sans"/>
+              <a:buChar char="●"/>
+            </a:pPr>
             <a:r>
               <a:rPr lang="en" sz="1800">
                 <a:solidFill>
@@ -9888,7 +10420,7 @@
                 <a:cs typeface="Google Sans"/>
                 <a:sym typeface="Google Sans"/>
               </a:rPr>
-              <a:t>*</a:t>
+              <a:t>Use Antigravity's Clone Repository button</a:t>
             </a:r>
             <a:endParaRPr sz="1800">
               <a:solidFill>
@@ -9925,7 +10457,7 @@
                 <a:cs typeface="Google Sans"/>
                 <a:sym typeface="Google Sans"/>
               </a:rPr>
-              <a:t>One prompt writes product.md, ui.md and engineering.md</a:t>
+              <a:t>Read BRIEF.md and the reference/ folder</a:t>
             </a:r>
             <a:endParaRPr sz="1800">
               <a:solidFill>
@@ -9943,7 +10475,7 @@
                 <a:spcPts val="1200"/>
               </a:spcBef>
               <a:spcAft>
-                <a:spcPts val="0"/>
+                <a:spcPts val="1200"/>
               </a:spcAft>
               <a:buClr>
                 <a:srgbClr val="1E1E1E"/>
@@ -9962,7 +10494,7 @@
                 <a:cs typeface="Google Sans"/>
                 <a:sym typeface="Google Sans"/>
               </a:rPr>
-              <a:t>engineering.md needs a Testing strategy section</a:t>
+              <a:t>Replace PASTE_YOUR_PROJECT and PASTE_YOUR_LOCATION, or .env gets placeholders</a:t>
             </a:r>
             <a:endParaRPr sz="1800">
               <a:solidFill>
@@ -9974,48 +10506,11 @@
               <a:sym typeface="Google Sans"/>
             </a:endParaRPr>
           </a:p>
-          <a:p>
-            <a:pPr indent="-342900" lvl="0" marL="457200" rtl="0" algn="l">
-              <a:spcBef>
-                <a:spcPts val="1200"/>
-              </a:spcBef>
-              <a:spcAft>
-                <a:spcPts val="1200"/>
-              </a:spcAft>
-              <a:buClr>
-                <a:srgbClr val="1E1E1E"/>
-              </a:buClr>
-              <a:buSzPts val="1800"/>
-              <a:buFont typeface="Google Sans"/>
-              <a:buChar char="●"/>
-            </a:pPr>
-            <a:r>
-              <a:rPr lang="en" sz="1800">
-                <a:solidFill>
-                  <a:srgbClr val="1E1E1E"/>
-                </a:solidFill>
-                <a:latin typeface="Google Sans"/>
-                <a:ea typeface="Google Sans"/>
-                <a:cs typeface="Google Sans"/>
-                <a:sym typeface="Google Sans"/>
-              </a:rPr>
-              <a:t>Comment on the docs; fix the doc, not the code</a:t>
-            </a:r>
-            <a:endParaRPr sz="1800">
-              <a:solidFill>
-                <a:srgbClr val="1E1E1E"/>
-              </a:solidFill>
-              <a:latin typeface="Google Sans"/>
-              <a:ea typeface="Google Sans"/>
-              <a:cs typeface="Google Sans"/>
-              <a:sym typeface="Google Sans"/>
-            </a:endParaRPr>
-          </a:p>
         </p:txBody>
       </p:sp>
       <p:sp>
         <p:nvSpPr>
-          <p:cNvPr id="194" name="Google Shape;194;p25"/>
+          <p:cNvPr id="189" name="Google Shape;189;p25"/>
           <p:cNvSpPr txBox="1"/>
           <p:nvPr/>
         </p:nvSpPr>
@@ -10057,7 +10552,7 @@
                 <a:cs typeface="Google Sans"/>
                 <a:sym typeface="Google Sans"/>
               </a:rPr>
-              <a:t>Codelab step 6</a:t>
+              <a:t>Codelab step 3</a:t>
             </a:r>
             <a:endParaRPr sz="1600">
               <a:solidFill>
@@ -10073,7 +10568,7 @@
       </p:sp>
       <p:pic>
         <p:nvPicPr>
-          <p:cNvPr id="195" name="Google Shape;195;p25"/>
+          <p:cNvPr id="190" name="Google Shape;190;p25"/>
           <p:cNvPicPr preferRelativeResize="0"/>
           <p:nvPr/>
         </p:nvPicPr>
@@ -10119,7 +10614,7 @@
     </p:bg>
     <p:spTree>
       <p:nvGrpSpPr>
-        <p:cNvPr id="199" name="Shape 199"/>
+        <p:cNvPr id="194" name="Shape 194"/>
         <p:cNvGrpSpPr/>
         <p:nvPr/>
       </p:nvGrpSpPr>
@@ -10133,14 +10628,14 @@
       </p:grpSpPr>
       <p:sp>
         <p:nvSpPr>
-          <p:cNvPr id="200" name="Google Shape;200;p26"/>
+          <p:cNvPr id="195" name="Google Shape;195;p26"/>
           <p:cNvSpPr/>
           <p:nvPr/>
         </p:nvSpPr>
         <p:spPr>
           <a:xfrm>
             <a:off x="411480" y="320040"/>
-            <a:ext cx="5280714" cy="566946"/>
+            <a:ext cx="4960386" cy="566946"/>
           </a:xfrm>
           <a:prstGeom prst="flowChartTerminator">
             <a:avLst/>
@@ -10183,7 +10678,7 @@
                 <a:cs typeface="Google Sans"/>
                 <a:sym typeface="Google Sans"/>
               </a:rPr>
-              <a:t>Build It, Make the Tests Pass</a:t>
+              <a:t>Install the Workshop Skills</a:t>
             </a:r>
             <a:endParaRPr sz="2400">
               <a:solidFill>
@@ -10199,7 +10694,7 @@
       </p:sp>
       <p:sp>
         <p:nvSpPr>
-          <p:cNvPr id="201" name="Google Shape;201;p26"/>
+          <p:cNvPr id="196" name="Google Shape;196;p26"/>
           <p:cNvSpPr/>
           <p:nvPr/>
         </p:nvSpPr>
@@ -10249,7 +10744,7 @@
                 <a:cs typeface="Google Sans"/>
                 <a:sym typeface="Google Sans"/>
               </a:rPr>
-              <a:t>Step 7</a:t>
+              <a:t>Step 4</a:t>
             </a:r>
             <a:endParaRPr>
               <a:solidFill>
@@ -10265,7 +10760,7 @@
       </p:sp>
       <p:sp>
         <p:nvSpPr>
-          <p:cNvPr id="202" name="Google Shape;202;p26"/>
+          <p:cNvPr id="197" name="Google Shape;197;p26"/>
           <p:cNvSpPr/>
           <p:nvPr/>
         </p:nvSpPr>
@@ -10316,7 +10811,7 @@
       </p:sp>
       <p:sp>
         <p:nvSpPr>
-          <p:cNvPr id="203" name="Google Shape;203;p26"/>
+          <p:cNvPr id="198" name="Google Shape;198;p26"/>
           <p:cNvSpPr/>
           <p:nvPr/>
         </p:nvSpPr>
@@ -10367,7 +10862,7 @@
       </p:sp>
       <p:sp>
         <p:nvSpPr>
-          <p:cNvPr id="204" name="Google Shape;204;p26"/>
+          <p:cNvPr id="199" name="Google Shape;199;p26"/>
           <p:cNvSpPr txBox="1"/>
           <p:nvPr/>
         </p:nvSpPr>
@@ -10414,7 +10909,7 @@
                 <a:cs typeface="Google Sans"/>
                 <a:sym typeface="Google Sans"/>
               </a:rPr>
-              <a:t>Gemini 3.8 - Argon Limited</a:t>
+              <a:t>Ask the agent to clone skills-garden and gemini-skills into .agent/skills/</a:t>
             </a:r>
             <a:endParaRPr sz="1800">
               <a:solidFill>
@@ -10451,7 +10946,7 @@
                 <a:cs typeface="Google Sans"/>
                 <a:sym typeface="Google Sans"/>
               </a:rPr>
-              <a:t>The agent builds from the docs and mocks Gemini in tests</a:t>
+              <a:t>Click Allow on both git pop-ups</a:t>
             </a:r>
             <a:endParaRPr sz="1800">
               <a:solidFill>
@@ -10469,7 +10964,7 @@
                 <a:spcPts val="1200"/>
               </a:spcBef>
               <a:spcAft>
-                <a:spcPts val="0"/>
+                <a:spcPts val="1200"/>
               </a:spcAft>
               <a:buClr>
                 <a:srgbClr val="1E1E1E"/>
@@ -10488,7 +10983,7 @@
                 <a:cs typeface="Google Sans"/>
                 <a:sym typeface="Google Sans"/>
               </a:rPr>
-              <a:t>Done: backend/, frontend/ and tests/ exist, all tests pass</a:t>
+              <a:t>Leave Turbo mode off</a:t>
             </a:r>
             <a:endParaRPr sz="1800">
               <a:solidFill>
@@ -10500,48 +10995,11 @@
               <a:sym typeface="Google Sans"/>
             </a:endParaRPr>
           </a:p>
-          <a:p>
-            <a:pPr indent="-342900" lvl="0" marL="457200" rtl="0" algn="l">
-              <a:spcBef>
-                <a:spcPts val="1200"/>
-              </a:spcBef>
-              <a:spcAft>
-                <a:spcPts val="1200"/>
-              </a:spcAft>
-              <a:buClr>
-                <a:srgbClr val="1E1E1E"/>
-              </a:buClr>
-              <a:buSzPts val="1800"/>
-              <a:buFont typeface="Google Sans"/>
-              <a:buChar char="●"/>
-            </a:pPr>
-            <a:r>
-              <a:rPr lang="en" sz="1800">
-                <a:solidFill>
-                  <a:srgbClr val="1E1E1E"/>
-                </a:solidFill>
-                <a:latin typeface="Google Sans"/>
-                <a:ea typeface="Google Sans"/>
-                <a:cs typeface="Google Sans"/>
-                <a:sym typeface="Google Sans"/>
-              </a:rPr>
-              <a:t>Never skip tests; fix the Testing strategy instead</a:t>
-            </a:r>
-            <a:endParaRPr sz="1800">
-              <a:solidFill>
-                <a:srgbClr val="1E1E1E"/>
-              </a:solidFill>
-              <a:latin typeface="Google Sans"/>
-              <a:ea typeface="Google Sans"/>
-              <a:cs typeface="Google Sans"/>
-              <a:sym typeface="Google Sans"/>
-            </a:endParaRPr>
-          </a:p>
         </p:txBody>
       </p:sp>
       <p:sp>
         <p:nvSpPr>
-          <p:cNvPr id="205" name="Google Shape;205;p26"/>
+          <p:cNvPr id="200" name="Google Shape;200;p26"/>
           <p:cNvSpPr txBox="1"/>
           <p:nvPr/>
         </p:nvSpPr>
@@ -10583,7 +11041,7 @@
                 <a:cs typeface="Google Sans"/>
                 <a:sym typeface="Google Sans"/>
               </a:rPr>
-              <a:t>Codelab step 7</a:t>
+              <a:t>Codelab step 4</a:t>
             </a:r>
             <a:endParaRPr sz="1600">
               <a:solidFill>
@@ -10599,7 +11057,7 @@
       </p:sp>
       <p:pic>
         <p:nvPicPr>
-          <p:cNvPr id="206" name="Google Shape;206;p26"/>
+          <p:cNvPr id="201" name="Google Shape;201;p26"/>
           <p:cNvPicPr preferRelativeResize="0"/>
           <p:nvPr/>
         </p:nvPicPr>
@@ -10645,7 +11103,7 @@
     </p:bg>
     <p:spTree>
       <p:nvGrpSpPr>
-        <p:cNvPr id="210" name="Shape 210"/>
+        <p:cNvPr id="205" name="Shape 205"/>
         <p:cNvGrpSpPr/>
         <p:nvPr/>
       </p:nvGrpSpPr>
@@ -10659,14 +11117,14 @@
       </p:grpSpPr>
       <p:sp>
         <p:nvSpPr>
-          <p:cNvPr id="211" name="Google Shape;211;p27"/>
+          <p:cNvPr id="206" name="Google Shape;206;p27"/>
           <p:cNvSpPr/>
           <p:nvPr/>
         </p:nvSpPr>
         <p:spPr>
           <a:xfrm>
             <a:off x="411480" y="320040"/>
-            <a:ext cx="4320324" cy="566946"/>
+            <a:ext cx="5600394" cy="566946"/>
           </a:xfrm>
           <a:prstGeom prst="flowChartTerminator">
             <a:avLst/>
@@ -10709,7 +11167,7 @@
                 <a:cs typeface="Google Sans"/>
                 <a:sym typeface="Google Sans"/>
               </a:rPr>
-              <a:t>Add Your Gemini API Key</a:t>
+              <a:t>The Spec Talk Takes Two Minutes</a:t>
             </a:r>
             <a:endParaRPr sz="2400">
               <a:solidFill>
@@ -10725,7 +11183,7 @@
       </p:sp>
       <p:sp>
         <p:nvSpPr>
-          <p:cNvPr id="212" name="Google Shape;212;p27"/>
+          <p:cNvPr id="207" name="Google Shape;207;p27"/>
           <p:cNvSpPr/>
           <p:nvPr/>
         </p:nvSpPr>
@@ -10775,7 +11233,7 @@
                 <a:cs typeface="Google Sans"/>
                 <a:sym typeface="Google Sans"/>
               </a:rPr>
-              <a:t>Step 8</a:t>
+              <a:t>Step 5</a:t>
             </a:r>
             <a:endParaRPr>
               <a:solidFill>
@@ -10791,7 +11249,7 @@
       </p:sp>
       <p:sp>
         <p:nvSpPr>
-          <p:cNvPr id="213" name="Google Shape;213;p27"/>
+          <p:cNvPr id="208" name="Google Shape;208;p27"/>
           <p:cNvSpPr/>
           <p:nvPr/>
         </p:nvSpPr>
@@ -10842,7 +11300,7 @@
       </p:sp>
       <p:sp>
         <p:nvSpPr>
-          <p:cNvPr id="214" name="Google Shape;214;p27"/>
+          <p:cNvPr id="209" name="Google Shape;209;p27"/>
           <p:cNvSpPr/>
           <p:nvPr/>
         </p:nvSpPr>
@@ -10893,7 +11351,7 @@
       </p:sp>
       <p:sp>
         <p:nvSpPr>
-          <p:cNvPr id="215" name="Google Shape;215;p27"/>
+          <p:cNvPr id="210" name="Google Shape;210;p27"/>
           <p:cNvSpPr txBox="1"/>
           <p:nvPr/>
         </p:nvSpPr>
@@ -10940,7 +11398,7 @@
                 <a:cs typeface="Google Sans"/>
                 <a:sym typeface="Google Sans"/>
               </a:rPr>
-              <a:t>Create a key in Google AI Studio</a:t>
+              <a:t>The agent asks three questions: inputs, the magical moment, out of scope</a:t>
             </a:r>
             <a:endParaRPr sz="1800">
               <a:solidFill>
@@ -10977,7 +11435,7 @@
                 <a:cs typeface="Google Sans"/>
                 <a:sym typeface="Google Sans"/>
               </a:rPr>
-              <a:t>The agent writes backend/.env with GEMINI_API_KEY</a:t>
+              <a:t>Answer them; no files get written yet</a:t>
             </a:r>
             <a:endParaRPr sz="1800">
               <a:solidFill>
@@ -10995,7 +11453,7 @@
                 <a:spcPts val="1200"/>
               </a:spcBef>
               <a:spcAft>
-                <a:spcPts val="0"/>
+                <a:spcPts val="1200"/>
               </a:spcAft>
               <a:buClr>
                 <a:srgbClr val="1E1E1E"/>
@@ -11014,7 +11472,7 @@
                 <a:cs typeface="Google Sans"/>
                 <a:sym typeface="Google Sans"/>
               </a:rPr>
-              <a:t>Check that .env is in .gitignore</a:t>
+              <a:t>If product.md appears, ask the agent to delete it</a:t>
             </a:r>
             <a:endParaRPr sz="1800">
               <a:solidFill>
@@ -11026,48 +11484,11 @@
               <a:sym typeface="Google Sans"/>
             </a:endParaRPr>
           </a:p>
-          <a:p>
-            <a:pPr indent="-342900" lvl="0" marL="457200" rtl="0" algn="l">
-              <a:spcBef>
-                <a:spcPts val="1200"/>
-              </a:spcBef>
-              <a:spcAft>
-                <a:spcPts val="1200"/>
-              </a:spcAft>
-              <a:buClr>
-                <a:srgbClr val="1E1E1E"/>
-              </a:buClr>
-              <a:buSzPts val="1800"/>
-              <a:buFont typeface="Google Sans"/>
-              <a:buChar char="●"/>
-            </a:pPr>
-            <a:r>
-              <a:rPr lang="en" sz="1800">
-                <a:solidFill>
-                  <a:srgbClr val="1E1E1E"/>
-                </a:solidFill>
-                <a:latin typeface="Google Sans"/>
-                <a:ea typeface="Google Sans"/>
-                <a:cs typeface="Google Sans"/>
-                <a:sym typeface="Google Sans"/>
-              </a:rPr>
-              <a:t>Treat the key like a password; never commit it</a:t>
-            </a:r>
-            <a:endParaRPr sz="1800">
-              <a:solidFill>
-                <a:srgbClr val="1E1E1E"/>
-              </a:solidFill>
-              <a:latin typeface="Google Sans"/>
-              <a:ea typeface="Google Sans"/>
-              <a:cs typeface="Google Sans"/>
-              <a:sym typeface="Google Sans"/>
-            </a:endParaRPr>
-          </a:p>
         </p:txBody>
       </p:sp>
       <p:sp>
         <p:nvSpPr>
-          <p:cNvPr id="216" name="Google Shape;216;p27"/>
+          <p:cNvPr id="211" name="Google Shape;211;p27"/>
           <p:cNvSpPr txBox="1"/>
           <p:nvPr/>
         </p:nvSpPr>
@@ -11109,7 +11530,7 @@
                 <a:cs typeface="Google Sans"/>
                 <a:sym typeface="Google Sans"/>
               </a:rPr>
-              <a:t>Codelab step 8</a:t>
+              <a:t>Codelab step 5</a:t>
             </a:r>
             <a:endParaRPr sz="1600">
               <a:solidFill>
@@ -11125,7 +11546,7 @@
       </p:sp>
       <p:pic>
         <p:nvPicPr>
-          <p:cNvPr id="217" name="Google Shape;217;p27"/>
+          <p:cNvPr id="212" name="Google Shape;212;p27"/>
           <p:cNvPicPr preferRelativeResize="0"/>
           <p:nvPr/>
         </p:nvPicPr>
@@ -11171,7 +11592,7 @@
     </p:bg>
     <p:spTree>
       <p:nvGrpSpPr>
-        <p:cNvPr id="221" name="Shape 221"/>
+        <p:cNvPr id="216" name="Shape 216"/>
         <p:cNvGrpSpPr/>
         <p:nvPr/>
       </p:nvGrpSpPr>
@@ -11185,14 +11606,14 @@
       </p:grpSpPr>
       <p:sp>
         <p:nvSpPr>
-          <p:cNvPr id="222" name="Google Shape;222;p28"/>
+          <p:cNvPr id="217" name="Google Shape;217;p28"/>
           <p:cNvSpPr/>
           <p:nvPr/>
         </p:nvSpPr>
         <p:spPr>
           <a:xfrm>
             <a:off x="411480" y="320040"/>
-            <a:ext cx="4960386" cy="566946"/>
+            <a:ext cx="5280714" cy="566946"/>
           </a:xfrm>
           <a:prstGeom prst="flowChartTerminator">
             <a:avLst/>
@@ -11235,7 +11656,7 @@
                 <a:cs typeface="Google Sans"/>
                 <a:sym typeface="Google Sans"/>
               </a:rPr>
-              <a:t>Run It and Check It by Hand</a:t>
+              <a:t>Three Design Docs Before Code</a:t>
             </a:r>
             <a:endParaRPr sz="2400">
               <a:solidFill>
@@ -11251,7 +11672,7 @@
       </p:sp>
       <p:sp>
         <p:nvSpPr>
-          <p:cNvPr id="223" name="Google Shape;223;p28"/>
+          <p:cNvPr id="218" name="Google Shape;218;p28"/>
           <p:cNvSpPr/>
           <p:nvPr/>
         </p:nvSpPr>
@@ -11301,7 +11722,7 @@
                 <a:cs typeface="Google Sans"/>
                 <a:sym typeface="Google Sans"/>
               </a:rPr>
-              <a:t>Step 9</a:t>
+              <a:t>Step 6</a:t>
             </a:r>
             <a:endParaRPr>
               <a:solidFill>
@@ -11317,7 +11738,7 @@
       </p:sp>
       <p:sp>
         <p:nvSpPr>
-          <p:cNvPr id="224" name="Google Shape;224;p28"/>
+          <p:cNvPr id="219" name="Google Shape;219;p28"/>
           <p:cNvSpPr/>
           <p:nvPr/>
         </p:nvSpPr>
@@ -11368,7 +11789,7 @@
       </p:sp>
       <p:sp>
         <p:nvSpPr>
-          <p:cNvPr id="225" name="Google Shape;225;p28"/>
+          <p:cNvPr id="220" name="Google Shape;220;p28"/>
           <p:cNvSpPr/>
           <p:nvPr/>
         </p:nvSpPr>
@@ -11419,7 +11840,7 @@
       </p:sp>
       <p:sp>
         <p:nvSpPr>
-          <p:cNvPr id="226" name="Google Shape;226;p28"/>
+          <p:cNvPr id="221" name="Google Shape;221;p28"/>
           <p:cNvSpPr txBox="1"/>
           <p:nvPr/>
         </p:nvSpPr>
@@ -11466,33 +11887,20 @@
                 <a:cs typeface="Google Sans"/>
                 <a:sym typeface="Google Sans"/>
               </a:rPr>
-              <a:t>Ask the agent to start the dev server; click Allow</a:t>
-            </a:r>
-            <a:endParaRPr sz="1800">
-              <a:solidFill>
-                <a:srgbClr val="1E1E1E"/>
-              </a:solidFill>
-              <a:latin typeface="Google Sans"/>
-              <a:ea typeface="Google Sans"/>
-              <a:cs typeface="Google Sans"/>
-              <a:sym typeface="Google Sans"/>
-            </a:endParaRPr>
-          </a:p>
-          <a:p>
-            <a:pPr indent="-342900" lvl="0" marL="457200" rtl="0" algn="l">
-              <a:spcBef>
-                <a:spcPts val="1200"/>
-              </a:spcBef>
-              <a:spcAft>
-                <a:spcPts val="0"/>
-              </a:spcAft>
-              <a:buClr>
-                <a:srgbClr val="1E1E1E"/>
-              </a:buClr>
-              <a:buSzPts val="1800"/>
-              <a:buFont typeface="Google Sans"/>
-              <a:buChar char="●"/>
-            </a:pPr>
+              <a:t>Gemini 3.8 - </a:t>
+            </a:r>
+            <a:r>
+              <a:rPr i="1" lang="en" sz="1800">
+                <a:solidFill>
+                  <a:srgbClr val="1E1E1E"/>
+                </a:solidFill>
+                <a:latin typeface="Google Sans"/>
+                <a:ea typeface="Google Sans"/>
+                <a:cs typeface="Google Sans"/>
+                <a:sym typeface="Google Sans"/>
+              </a:rPr>
+              <a:t>Argon is limited</a:t>
+            </a:r>
             <a:r>
               <a:rPr lang="en" sz="1800">
                 <a:solidFill>
@@ -11503,7 +11911,7 @@
                 <a:cs typeface="Google Sans"/>
                 <a:sym typeface="Google Sans"/>
               </a:rPr>
-              <a:t>Open localhost:8000 or localhost:5173</a:t>
+              <a:t>*</a:t>
             </a:r>
             <a:endParaRPr sz="1800">
               <a:solidFill>
@@ -11540,7 +11948,7 @@
                 <a:cs typeface="Google Sans"/>
                 <a:sym typeface="Google Sans"/>
               </a:rPr>
-              <a:t>Paste a real resume and a real job posting</a:t>
+              <a:t>One prompt writes product.md, ui.md and engineering.md</a:t>
             </a:r>
             <a:endParaRPr sz="1800">
               <a:solidFill>
@@ -11558,7 +11966,7 @@
                 <a:spcPts val="1200"/>
               </a:spcBef>
               <a:spcAft>
-                <a:spcPts val="1200"/>
+                <a:spcPts val="0"/>
               </a:spcAft>
               <a:buClr>
                 <a:srgbClr val="1E1E1E"/>
@@ -11577,7 +11985,7 @@
                 <a:cs typeface="Google Sans"/>
                 <a:sym typeface="Google Sans"/>
               </a:rPr>
-              <a:t>Report problems, then have the agent write the README</a:t>
+              <a:t>engineering.md needs a Testing strategy section</a:t>
             </a:r>
             <a:endParaRPr sz="1800">
               <a:solidFill>
@@ -11589,11 +11997,48 @@
               <a:sym typeface="Google Sans"/>
             </a:endParaRPr>
           </a:p>
+          <a:p>
+            <a:pPr indent="-342900" lvl="0" marL="457200" rtl="0" algn="l">
+              <a:spcBef>
+                <a:spcPts val="1200"/>
+              </a:spcBef>
+              <a:spcAft>
+                <a:spcPts val="1200"/>
+              </a:spcAft>
+              <a:buClr>
+                <a:srgbClr val="1E1E1E"/>
+              </a:buClr>
+              <a:buSzPts val="1800"/>
+              <a:buFont typeface="Google Sans"/>
+              <a:buChar char="●"/>
+            </a:pPr>
+            <a:r>
+              <a:rPr lang="en" sz="1800">
+                <a:solidFill>
+                  <a:srgbClr val="1E1E1E"/>
+                </a:solidFill>
+                <a:latin typeface="Google Sans"/>
+                <a:ea typeface="Google Sans"/>
+                <a:cs typeface="Google Sans"/>
+                <a:sym typeface="Google Sans"/>
+              </a:rPr>
+              <a:t>Comment on the docs; fix the doc, not the code</a:t>
+            </a:r>
+            <a:endParaRPr sz="1800">
+              <a:solidFill>
+                <a:srgbClr val="1E1E1E"/>
+              </a:solidFill>
+              <a:latin typeface="Google Sans"/>
+              <a:ea typeface="Google Sans"/>
+              <a:cs typeface="Google Sans"/>
+              <a:sym typeface="Google Sans"/>
+            </a:endParaRPr>
+          </a:p>
         </p:txBody>
       </p:sp>
       <p:sp>
         <p:nvSpPr>
-          <p:cNvPr id="227" name="Google Shape;227;p28"/>
+          <p:cNvPr id="222" name="Google Shape;222;p28"/>
           <p:cNvSpPr txBox="1"/>
           <p:nvPr/>
         </p:nvSpPr>
@@ -11635,7 +12080,7 @@
                 <a:cs typeface="Google Sans"/>
                 <a:sym typeface="Google Sans"/>
               </a:rPr>
-              <a:t>Codelab step 9</a:t>
+              <a:t>Codelab step 6</a:t>
             </a:r>
             <a:endParaRPr sz="1600">
               <a:solidFill>
@@ -11651,7 +12096,7 @@
       </p:sp>
       <p:pic>
         <p:nvPicPr>
-          <p:cNvPr id="228" name="Google Shape;228;p28"/>
+          <p:cNvPr id="223" name="Google Shape;223;p28"/>
           <p:cNvPicPr preferRelativeResize="0"/>
           <p:nvPr/>
         </p:nvPicPr>
@@ -11697,7 +12142,7 @@
     </p:bg>
     <p:spTree>
       <p:nvGrpSpPr>
-        <p:cNvPr id="232" name="Shape 232"/>
+        <p:cNvPr id="227" name="Shape 227"/>
         <p:cNvGrpSpPr/>
         <p:nvPr/>
       </p:nvGrpSpPr>
@@ -11711,14 +12156,14 @@
       </p:grpSpPr>
       <p:sp>
         <p:nvSpPr>
-          <p:cNvPr id="233" name="Google Shape;233;p29"/>
+          <p:cNvPr id="228" name="Google Shape;228;p29"/>
           <p:cNvSpPr/>
           <p:nvPr/>
         </p:nvSpPr>
         <p:spPr>
           <a:xfrm>
             <a:off x="411480" y="320040"/>
-            <a:ext cx="4320324" cy="566946"/>
+            <a:ext cx="5280714" cy="566946"/>
           </a:xfrm>
           <a:prstGeom prst="flowChartTerminator">
             <a:avLst/>
@@ -11761,7 +12206,7 @@
                 <a:cs typeface="Google Sans"/>
                 <a:sym typeface="Google Sans"/>
               </a:rPr>
-              <a:t>Tips for Better Bullets</a:t>
+              <a:t>Build It, Make the Tests Pass</a:t>
             </a:r>
             <a:endParaRPr sz="2400">
               <a:solidFill>
@@ -11777,7 +12222,7 @@
       </p:sp>
       <p:sp>
         <p:nvSpPr>
-          <p:cNvPr id="234" name="Google Shape;234;p29"/>
+          <p:cNvPr id="229" name="Google Shape;229;p29"/>
           <p:cNvSpPr/>
           <p:nvPr/>
         </p:nvSpPr>
@@ -11790,7 +12235,7 @@
             <a:avLst/>
           </a:prstGeom>
           <a:solidFill>
-            <a:srgbClr val="FF7DAF"/>
+            <a:srgbClr val="5CDB6D"/>
           </a:solidFill>
           <a:ln cap="flat" cmpd="sng" w="19050">
             <a:solidFill>
@@ -11827,7 +12272,7 @@
                 <a:cs typeface="Google Sans"/>
                 <a:sym typeface="Google Sans"/>
               </a:rPr>
-              <a:t>Tips</a:t>
+              <a:t>Step 7</a:t>
             </a:r>
             <a:endParaRPr>
               <a:solidFill>
@@ -11843,7 +12288,7 @@
       </p:sp>
       <p:sp>
         <p:nvSpPr>
-          <p:cNvPr id="235" name="Google Shape;235;p29"/>
+          <p:cNvPr id="230" name="Google Shape;230;p29"/>
           <p:cNvSpPr/>
           <p:nvPr/>
         </p:nvSpPr>
@@ -11858,7 +12303,7 @@
             </a:avLst>
           </a:prstGeom>
           <a:solidFill>
-            <a:srgbClr val="F8D8D8"/>
+            <a:srgbClr val="CCF6C5"/>
           </a:solidFill>
           <a:ln cap="flat" cmpd="sng" w="19050">
             <a:solidFill>
@@ -11894,7 +12339,7 @@
       </p:sp>
       <p:sp>
         <p:nvSpPr>
-          <p:cNvPr id="236" name="Google Shape;236;p29"/>
+          <p:cNvPr id="231" name="Google Shape;231;p29"/>
           <p:cNvSpPr/>
           <p:nvPr/>
         </p:nvSpPr>
@@ -11945,7 +12390,7 @@
       </p:sp>
       <p:sp>
         <p:nvSpPr>
-          <p:cNvPr id="237" name="Google Shape;237;p29"/>
+          <p:cNvPr id="232" name="Google Shape;232;p29"/>
           <p:cNvSpPr txBox="1"/>
           <p:nvPr/>
         </p:nvSpPr>
@@ -11992,7 +12437,7 @@
                 <a:cs typeface="Google Sans"/>
                 <a:sym typeface="Google Sans"/>
               </a:rPr>
-              <a:t>Paste the full job posting, not just the title</a:t>
+              <a:t>Gemini 3.8 - Argon Limited</a:t>
             </a:r>
             <a:endParaRPr sz="1800">
               <a:solidFill>
@@ -12029,7 +12474,7 @@
                 <a:cs typeface="Google Sans"/>
                 <a:sym typeface="Google Sans"/>
               </a:rPr>
-              <a:t>Read the bullets aloud; if you wouldn't say it in an interview, change the prompt</a:t>
+              <a:t>The agent builds from the docs and mocks Gemini in tests</a:t>
             </a:r>
             <a:endParaRPr sz="1800">
               <a:solidFill>
@@ -12066,7 +12511,7 @@
                 <a:cs typeface="Google Sans"/>
                 <a:sym typeface="Google Sans"/>
               </a:rPr>
-              <a:t>Skip cover letters, PDF parsing and ATS scoring on purpose</a:t>
+              <a:t>Done: backend/, frontend/ and tests/ exist, all tests pass</a:t>
             </a:r>
             <a:endParaRPr sz="1800">
               <a:solidFill>
@@ -12103,7 +12548,7 @@
                 <a:cs typeface="Google Sans"/>
                 <a:sym typeface="Google Sans"/>
               </a:rPr>
-              <a:t>Stuck? Ask the room, then a mentor</a:t>
+              <a:t>Never skip tests; fix the Testing strategy instead</a:t>
             </a:r>
             <a:endParaRPr sz="1800">
               <a:solidFill>
@@ -12119,7 +12564,7 @@
       </p:sp>
       <p:sp>
         <p:nvSpPr>
-          <p:cNvPr id="238" name="Google Shape;238;p29"/>
+          <p:cNvPr id="233" name="Google Shape;233;p29"/>
           <p:cNvSpPr txBox="1"/>
           <p:nvPr/>
         </p:nvSpPr>
@@ -12161,7 +12606,7 @@
                 <a:cs typeface="Google Sans"/>
                 <a:sym typeface="Google Sans"/>
               </a:rPr>
-              <a:t>Track tips</a:t>
+              <a:t>Codelab step 7</a:t>
             </a:r>
             <a:endParaRPr sz="1600">
               <a:solidFill>
@@ -12177,7 +12622,7 @@
       </p:sp>
       <p:pic>
         <p:nvPicPr>
-          <p:cNvPr id="239" name="Google Shape;239;p29"/>
+          <p:cNvPr id="234" name="Google Shape;234;p29"/>
           <p:cNvPicPr preferRelativeResize="0"/>
           <p:nvPr/>
         </p:nvPicPr>
@@ -12223,7 +12668,7 @@
     </p:bg>
     <p:spTree>
       <p:nvGrpSpPr>
-        <p:cNvPr id="243" name="Shape 243"/>
+        <p:cNvPr id="238" name="Shape 238"/>
         <p:cNvGrpSpPr/>
         <p:nvPr/>
       </p:nvGrpSpPr>
@@ -12237,14 +12682,14 @@
       </p:grpSpPr>
       <p:sp>
         <p:nvSpPr>
-          <p:cNvPr id="244" name="Google Shape;244;p30"/>
+          <p:cNvPr id="239" name="Google Shape;239;p30"/>
           <p:cNvSpPr/>
           <p:nvPr/>
         </p:nvSpPr>
         <p:spPr>
           <a:xfrm>
             <a:off x="411480" y="320040"/>
-            <a:ext cx="5920722" cy="566946"/>
+            <a:ext cx="4320324" cy="566946"/>
           </a:xfrm>
           <a:prstGeom prst="flowChartTerminator">
             <a:avLst/>
@@ -12287,7 +12732,7 @@
                 <a:cs typeface="Google Sans"/>
                 <a:sym typeface="Google Sans"/>
               </a:rPr>
-              <a:t>Share and Submit Before You Leave</a:t>
+              <a:t>Add Your Gemini API Key</a:t>
             </a:r>
             <a:endParaRPr sz="2400">
               <a:solidFill>
@@ -12303,7 +12748,7 @@
       </p:sp>
       <p:sp>
         <p:nvSpPr>
-          <p:cNvPr id="245" name="Google Shape;245;p30"/>
+          <p:cNvPr id="240" name="Google Shape;240;p30"/>
           <p:cNvSpPr/>
           <p:nvPr/>
         </p:nvSpPr>
@@ -12316,7 +12761,7 @@
             <a:avLst/>
           </a:prstGeom>
           <a:solidFill>
-            <a:srgbClr val="FF7DAF"/>
+            <a:srgbClr val="5CDB6D"/>
           </a:solidFill>
           <a:ln cap="flat" cmpd="sng" w="19050">
             <a:solidFill>
@@ -12353,7 +12798,7 @@
                 <a:cs typeface="Google Sans"/>
                 <a:sym typeface="Google Sans"/>
               </a:rPr>
-              <a:t>Step 10</a:t>
+              <a:t>Step 8</a:t>
             </a:r>
             <a:endParaRPr>
               <a:solidFill>
@@ -12369,7 +12814,7 @@
       </p:sp>
       <p:sp>
         <p:nvSpPr>
-          <p:cNvPr id="246" name="Google Shape;246;p30"/>
+          <p:cNvPr id="241" name="Google Shape;241;p30"/>
           <p:cNvSpPr/>
           <p:nvPr/>
         </p:nvSpPr>
@@ -12384,7 +12829,7 @@
             </a:avLst>
           </a:prstGeom>
           <a:solidFill>
-            <a:srgbClr val="F8D8D8"/>
+            <a:srgbClr val="CCF6C5"/>
           </a:solidFill>
           <a:ln cap="flat" cmpd="sng" w="19050">
             <a:solidFill>
@@ -12420,7 +12865,7 @@
       </p:sp>
       <p:sp>
         <p:nvSpPr>
-          <p:cNvPr id="247" name="Google Shape;247;p30"/>
+          <p:cNvPr id="242" name="Google Shape;242;p30"/>
           <p:cNvSpPr/>
           <p:nvPr/>
         </p:nvSpPr>
@@ -12471,7 +12916,7 @@
       </p:sp>
       <p:sp>
         <p:nvSpPr>
-          <p:cNvPr id="248" name="Google Shape;248;p30"/>
+          <p:cNvPr id="243" name="Google Shape;243;p30"/>
           <p:cNvSpPr txBox="1"/>
           <p:nvPr/>
         </p:nvSpPr>
@@ -12518,7 +12963,7 @@
                 <a:cs typeface="Google Sans"/>
                 <a:sym typeface="Google Sans"/>
               </a:rPr>
-              <a:t>Two-minute screen-share demo</a:t>
+              <a:t>Create a key in AI Studio; pick your jam project when it asks</a:t>
             </a:r>
             <a:endParaRPr sz="1800">
               <a:solidFill>
@@ -12555,7 +13000,7 @@
                 <a:cs typeface="Google Sans"/>
                 <a:sym typeface="Google Sans"/>
               </a:rPr>
-              <a:t>Submit your build: it goes on the showcase</a:t>
+              <a:t>Sign in with your personal @gmail.com, not Workspace</a:t>
             </a:r>
             <a:endParaRPr sz="1800">
               <a:solidFill>
@@ -12573,7 +13018,7 @@
                 <a:spcPts val="1200"/>
               </a:spcBef>
               <a:spcAft>
-                <a:spcPts val="1200"/>
+                <a:spcPts val="0"/>
               </a:spcAft>
               <a:buClr>
                 <a:srgbClr val="1E1E1E"/>
@@ -12592,7 +13037,7 @@
                 <a:cs typeface="Google Sans"/>
                 <a:sym typeface="Google Sans"/>
               </a:rPr>
-              <a:t>Your name and chapter go with it</a:t>
+              <a:t>The agent writes backend/.env with GEMINI_API_KEY</a:t>
             </a:r>
             <a:endParaRPr sz="1800">
               <a:solidFill>
@@ -12604,11 +13049,85 @@
               <a:sym typeface="Google Sans"/>
             </a:endParaRPr>
           </a:p>
+          <a:p>
+            <a:pPr indent="-342900" lvl="0" marL="457200" rtl="0" algn="l">
+              <a:spcBef>
+                <a:spcPts val="1200"/>
+              </a:spcBef>
+              <a:spcAft>
+                <a:spcPts val="0"/>
+              </a:spcAft>
+              <a:buClr>
+                <a:srgbClr val="1E1E1E"/>
+              </a:buClr>
+              <a:buSzPts val="1800"/>
+              <a:buFont typeface="Google Sans"/>
+              <a:buChar char="●"/>
+            </a:pPr>
+            <a:r>
+              <a:rPr lang="en" sz="1800">
+                <a:solidFill>
+                  <a:srgbClr val="1E1E1E"/>
+                </a:solidFill>
+                <a:latin typeface="Google Sans"/>
+                <a:ea typeface="Google Sans"/>
+                <a:cs typeface="Google Sans"/>
+                <a:sym typeface="Google Sans"/>
+              </a:rPr>
+              <a:t>Check that .env is in .gitignore</a:t>
+            </a:r>
+            <a:endParaRPr sz="1800">
+              <a:solidFill>
+                <a:srgbClr val="1E1E1E"/>
+              </a:solidFill>
+              <a:latin typeface="Google Sans"/>
+              <a:ea typeface="Google Sans"/>
+              <a:cs typeface="Google Sans"/>
+              <a:sym typeface="Google Sans"/>
+            </a:endParaRPr>
+          </a:p>
+          <a:p>
+            <a:pPr indent="-342900" lvl="0" marL="457200" rtl="0" algn="l">
+              <a:spcBef>
+                <a:spcPts val="1200"/>
+              </a:spcBef>
+              <a:spcAft>
+                <a:spcPts val="1200"/>
+              </a:spcAft>
+              <a:buClr>
+                <a:srgbClr val="1E1E1E"/>
+              </a:buClr>
+              <a:buSzPts val="1800"/>
+              <a:buFont typeface="Google Sans"/>
+              <a:buChar char="●"/>
+            </a:pPr>
+            <a:r>
+              <a:rPr lang="en" sz="1800">
+                <a:solidFill>
+                  <a:srgbClr val="1E1E1E"/>
+                </a:solidFill>
+                <a:latin typeface="Google Sans"/>
+                <a:ea typeface="Google Sans"/>
+                <a:cs typeface="Google Sans"/>
+                <a:sym typeface="Google Sans"/>
+              </a:rPr>
+              <a:t>Treat the key like a password; never commit it</a:t>
+            </a:r>
+            <a:endParaRPr sz="1800">
+              <a:solidFill>
+                <a:srgbClr val="1E1E1E"/>
+              </a:solidFill>
+              <a:latin typeface="Google Sans"/>
+              <a:ea typeface="Google Sans"/>
+              <a:cs typeface="Google Sans"/>
+              <a:sym typeface="Google Sans"/>
+            </a:endParaRPr>
+          </a:p>
         </p:txBody>
       </p:sp>
       <p:sp>
         <p:nvSpPr>
-          <p:cNvPr id="249" name="Google Shape;249;p30"/>
+          <p:cNvPr id="244" name="Google Shape;244;p30"/>
           <p:cNvSpPr txBox="1"/>
           <p:nvPr/>
         </p:nvSpPr>
@@ -12650,7 +13169,7 @@
                 <a:cs typeface="Google Sans"/>
                 <a:sym typeface="Google Sans"/>
               </a:rPr>
-              <a:t>Submit your build</a:t>
+              <a:t>Codelab step 8</a:t>
             </a:r>
             <a:endParaRPr sz="1600">
               <a:solidFill>
@@ -12666,7 +13185,7 @@
       </p:sp>
       <p:pic>
         <p:nvPicPr>
-          <p:cNvPr id="250" name="Google Shape;250;p30"/>
+          <p:cNvPr id="245" name="Google Shape;245;p30"/>
           <p:cNvPicPr preferRelativeResize="0"/>
           <p:nvPr/>
         </p:nvPicPr>
@@ -12712,7 +13231,7 @@
     </p:bg>
     <p:spTree>
       <p:nvGrpSpPr>
-        <p:cNvPr id="254" name="Shape 254"/>
+        <p:cNvPr id="249" name="Shape 249"/>
         <p:cNvGrpSpPr/>
         <p:nvPr/>
       </p:nvGrpSpPr>
@@ -12726,14 +13245,14 @@
       </p:grpSpPr>
       <p:sp>
         <p:nvSpPr>
-          <p:cNvPr id="255" name="Google Shape;255;p31"/>
+          <p:cNvPr id="250" name="Google Shape;250;p31"/>
           <p:cNvSpPr/>
           <p:nvPr/>
         </p:nvSpPr>
         <p:spPr>
           <a:xfrm>
             <a:off x="411480" y="320040"/>
-            <a:ext cx="4000644" cy="566946"/>
+            <a:ext cx="4960386" cy="566946"/>
           </a:xfrm>
           <a:prstGeom prst="flowChartTerminator">
             <a:avLst/>
@@ -12776,7 +13295,7 @@
                 <a:cs typeface="Google Sans"/>
                 <a:sym typeface="Google Sans"/>
               </a:rPr>
-              <a:t>Keep Building at Home</a:t>
+              <a:t>Run It and Check It by Hand</a:t>
             </a:r>
             <a:endParaRPr sz="2400">
               <a:solidFill>
@@ -12792,7 +13311,7 @@
       </p:sp>
       <p:sp>
         <p:nvSpPr>
-          <p:cNvPr id="256" name="Google Shape;256;p31"/>
+          <p:cNvPr id="251" name="Google Shape;251;p31"/>
           <p:cNvSpPr/>
           <p:nvPr/>
         </p:nvSpPr>
@@ -12805,7 +13324,7 @@
             <a:avLst/>
           </a:prstGeom>
           <a:solidFill>
-            <a:srgbClr val="F9AB00"/>
+            <a:srgbClr val="5CDB6D"/>
           </a:solidFill>
           <a:ln cap="flat" cmpd="sng" w="19050">
             <a:solidFill>
@@ -12842,7 +13361,7 @@
                 <a:cs typeface="Google Sans"/>
                 <a:sym typeface="Google Sans"/>
               </a:rPr>
-              <a:t>After the jam</a:t>
+              <a:t>Step 9</a:t>
             </a:r>
             <a:endParaRPr>
               <a:solidFill>
@@ -12858,7 +13377,7 @@
       </p:sp>
       <p:sp>
         <p:nvSpPr>
-          <p:cNvPr id="257" name="Google Shape;257;p31"/>
+          <p:cNvPr id="252" name="Google Shape;252;p31"/>
           <p:cNvSpPr/>
           <p:nvPr/>
         </p:nvSpPr>
@@ -12873,7 +13392,7 @@
             </a:avLst>
           </a:prstGeom>
           <a:solidFill>
-            <a:srgbClr val="FFE79C"/>
+            <a:srgbClr val="CCF6C5"/>
           </a:solidFill>
           <a:ln cap="flat" cmpd="sng" w="19050">
             <a:solidFill>
@@ -12909,7 +13428,7 @@
       </p:sp>
       <p:sp>
         <p:nvSpPr>
-          <p:cNvPr id="258" name="Google Shape;258;p31"/>
+          <p:cNvPr id="253" name="Google Shape;253;p31"/>
           <p:cNvSpPr/>
           <p:nvPr/>
         </p:nvSpPr>
@@ -12960,7 +13479,7 @@
       </p:sp>
       <p:sp>
         <p:nvSpPr>
-          <p:cNvPr id="259" name="Google Shape;259;p31"/>
+          <p:cNvPr id="254" name="Google Shape;254;p31"/>
           <p:cNvSpPr txBox="1"/>
           <p:nvPr/>
         </p:nvSpPr>
@@ -13007,7 +13526,7 @@
                 <a:cs typeface="Google Sans"/>
                 <a:sym typeface="Google Sans"/>
               </a:rPr>
-              <a:t>Match score and missing keywords</a:t>
+              <a:t>Ask the agent to start the dev server; click Allow</a:t>
             </a:r>
             <a:endParaRPr sz="1800">
               <a:solidFill>
@@ -13044,7 +13563,7 @@
                 <a:cs typeface="Google Sans"/>
                 <a:sym typeface="Google Sans"/>
               </a:rPr>
-              <a:t>PDF resume parsing</a:t>
+              <a:t>Open localhost:8000 or localhost:5173</a:t>
             </a:r>
             <a:endParaRPr sz="1800">
               <a:solidFill>
@@ -13081,7 +13600,7 @@
                 <a:cs typeface="Google Sans"/>
                 <a:sym typeface="Google Sans"/>
               </a:rPr>
-              <a:t>Cover letter generator</a:t>
+              <a:t>Paste a real resume and a real job posting</a:t>
             </a:r>
             <a:endParaRPr sz="1800">
               <a:solidFill>
@@ -13099,7 +13618,7 @@
                 <a:spcPts val="1200"/>
               </a:spcBef>
               <a:spcAft>
-                <a:spcPts val="0"/>
+                <a:spcPts val="1200"/>
               </a:spcAft>
               <a:buClr>
                 <a:srgbClr val="1E1E1E"/>
@@ -13118,7 +13637,7 @@
                 <a:cs typeface="Google Sans"/>
                 <a:sym typeface="Google Sans"/>
               </a:rPr>
-              <a:t>Interview question generator</a:t>
+              <a:t>Report problems, then have the agent write the README</a:t>
             </a:r>
             <a:endParaRPr sz="1800">
               <a:solidFill>
@@ -13130,48 +13649,11 @@
               <a:sym typeface="Google Sans"/>
             </a:endParaRPr>
           </a:p>
-          <a:p>
-            <a:pPr indent="-342900" lvl="0" marL="457200" rtl="0" algn="l">
-              <a:spcBef>
-                <a:spcPts val="1200"/>
-              </a:spcBef>
-              <a:spcAft>
-                <a:spcPts val="1200"/>
-              </a:spcAft>
-              <a:buClr>
-                <a:srgbClr val="1E1E1E"/>
-              </a:buClr>
-              <a:buSzPts val="1800"/>
-              <a:buFont typeface="Google Sans"/>
-              <a:buChar char="●"/>
-            </a:pPr>
-            <a:r>
-              <a:rPr lang="en" sz="1800">
-                <a:solidFill>
-                  <a:srgbClr val="1E1E1E"/>
-                </a:solidFill>
-                <a:latin typeface="Google Sans"/>
-                <a:ea typeface="Google Sans"/>
-                <a:cs typeface="Google Sans"/>
-                <a:sym typeface="Google Sans"/>
-              </a:rPr>
-              <a:t>Application tracker</a:t>
-            </a:r>
-            <a:endParaRPr sz="1800">
-              <a:solidFill>
-                <a:srgbClr val="1E1E1E"/>
-              </a:solidFill>
-              <a:latin typeface="Google Sans"/>
-              <a:ea typeface="Google Sans"/>
-              <a:cs typeface="Google Sans"/>
-              <a:sym typeface="Google Sans"/>
-            </a:endParaRPr>
-          </a:p>
         </p:txBody>
       </p:sp>
       <p:sp>
         <p:nvSpPr>
-          <p:cNvPr id="260" name="Google Shape;260;p31"/>
+          <p:cNvPr id="255" name="Google Shape;255;p31"/>
           <p:cNvSpPr txBox="1"/>
           <p:nvPr/>
         </p:nvSpPr>
@@ -13213,7 +13695,7 @@
                 <a:cs typeface="Google Sans"/>
                 <a:sym typeface="Google Sans"/>
               </a:rPr>
-              <a:t>Starter repo</a:t>
+              <a:t>Codelab step 9</a:t>
             </a:r>
             <a:endParaRPr sz="1600">
               <a:solidFill>
@@ -13229,7 +13711,7 @@
       </p:sp>
       <p:pic>
         <p:nvPicPr>
-          <p:cNvPr id="261" name="Google Shape;261;p31"/>
+          <p:cNvPr id="256" name="Google Shape;256;p31"/>
           <p:cNvPicPr preferRelativeResize="0"/>
           <p:nvPr/>
         </p:nvPicPr>
@@ -13414,7 +13896,7 @@
                 <a:cs typeface="Google Sans"/>
                 <a:sym typeface="Google Sans"/>
               </a:rPr>
-              <a:t>AWS Community Builder 2026, AI</a:t>
+              <a:t>CTO and co-founder, Glitnir Ticketing</a:t>
             </a:r>
             <a:endParaRPr sz="2000">
               <a:solidFill>
@@ -13446,7 +13928,7 @@
                 <a:cs typeface="Google Sans"/>
                 <a:sym typeface="Google Sans"/>
               </a:rPr>
-              <a:t>GDE (Google Developer Expert), Cloud and AI/ML</a:t>
+              <a:t>GDE (Google Developer Expert)</a:t>
             </a:r>
             <a:endParaRPr sz="2000">
               <a:solidFill>
@@ -13478,7 +13960,7 @@
                 <a:cs typeface="Google Sans"/>
                 <a:sym typeface="Google Sans"/>
               </a:rPr>
-              <a:t>CTO and co-founder, Glitnir Ticketing</a:t>
+              <a:t>Cloud and AI/ML</a:t>
             </a:r>
             <a:endParaRPr sz="2000">
               <a:solidFill>
@@ -13496,7 +13978,7 @@
                 <a:spcPts val="1200"/>
               </a:spcBef>
               <a:spcAft>
-                <a:spcPts val="1200"/>
+                <a:spcPts val="0"/>
               </a:spcAft>
               <a:buNone/>
             </a:pPr>
@@ -13510,7 +13992,7 @@
                 <a:cs typeface="Google Sans"/>
                 <a:sym typeface="Google Sans"/>
               </a:rPr>
-              <a:t>2026 goal: multi-cloud agents, tools and models</a:t>
+              <a:t>*** Do NOT Work for Google ***</a:t>
             </a:r>
             <a:endParaRPr sz="2000">
               <a:solidFill>
@@ -13522,8 +14004,119 @@
               <a:sym typeface="Google Sans"/>
             </a:endParaRPr>
           </a:p>
+          <a:p>
+            <a:pPr indent="0" lvl="0" marL="0" rtl="0" algn="l">
+              <a:spcBef>
+                <a:spcPts val="1200"/>
+              </a:spcBef>
+              <a:spcAft>
+                <a:spcPts val="0"/>
+              </a:spcAft>
+              <a:buClr>
+                <a:schemeClr val="dk1"/>
+              </a:buClr>
+              <a:buSzPts val="1100"/>
+              <a:buFont typeface="Arial"/>
+              <a:buNone/>
+            </a:pPr>
+            <a:r>
+              <a:rPr lang="en" sz="2000">
+                <a:solidFill>
+                  <a:srgbClr val="1E1E1E"/>
+                </a:solidFill>
+                <a:latin typeface="Google Sans"/>
+                <a:ea typeface="Google Sans"/>
+                <a:cs typeface="Google Sans"/>
+                <a:sym typeface="Google Sans"/>
+              </a:rPr>
+              <a:t>AWS Community Builder 2026, AI</a:t>
+            </a:r>
+            <a:endParaRPr sz="2000">
+              <a:solidFill>
+                <a:srgbClr val="1E1E1E"/>
+              </a:solidFill>
+              <a:latin typeface="Google Sans"/>
+              <a:ea typeface="Google Sans"/>
+              <a:cs typeface="Google Sans"/>
+              <a:sym typeface="Google Sans"/>
+            </a:endParaRPr>
+          </a:p>
+          <a:p>
+            <a:pPr indent="0" lvl="0" marL="0" rtl="0" algn="l">
+              <a:spcBef>
+                <a:spcPts val="1200"/>
+              </a:spcBef>
+              <a:spcAft>
+                <a:spcPts val="0"/>
+              </a:spcAft>
+              <a:buNone/>
+            </a:pPr>
+            <a:r>
+              <a:t/>
+            </a:r>
+            <a:endParaRPr sz="2000">
+              <a:solidFill>
+                <a:srgbClr val="1E1E1E"/>
+              </a:solidFill>
+              <a:latin typeface="Google Sans"/>
+              <a:ea typeface="Google Sans"/>
+              <a:cs typeface="Google Sans"/>
+              <a:sym typeface="Google Sans"/>
+            </a:endParaRPr>
+          </a:p>
+          <a:p>
+            <a:pPr indent="0" lvl="0" marL="0" rtl="0" algn="l">
+              <a:spcBef>
+                <a:spcPts val="1200"/>
+              </a:spcBef>
+              <a:spcAft>
+                <a:spcPts val="1200"/>
+              </a:spcAft>
+              <a:buNone/>
+            </a:pPr>
+            <a:r>
+              <a:t/>
+            </a:r>
+            <a:endParaRPr sz="2000">
+              <a:solidFill>
+                <a:srgbClr val="1E1E1E"/>
+              </a:solidFill>
+              <a:latin typeface="Google Sans"/>
+              <a:ea typeface="Google Sans"/>
+              <a:cs typeface="Google Sans"/>
+              <a:sym typeface="Google Sans"/>
+            </a:endParaRPr>
+          </a:p>
         </p:txBody>
       </p:sp>
+      <p:pic>
+        <p:nvPicPr>
+          <p:cNvPr id="71" name="Google Shape;71;p14"/>
+          <p:cNvPicPr preferRelativeResize="0"/>
+          <p:nvPr/>
+        </p:nvPicPr>
+        <p:blipFill>
+          <a:blip r:embed="rId3">
+            <a:alphaModFix/>
+          </a:blip>
+          <a:stretch>
+            <a:fillRect/>
+          </a:stretch>
+        </p:blipFill>
+        <p:spPr>
+          <a:xfrm>
+            <a:off x="5401400" y="941188"/>
+            <a:ext cx="2872575" cy="2872575"/>
+          </a:xfrm>
+          <a:prstGeom prst="rect">
+            <a:avLst/>
+          </a:prstGeom>
+          <a:noFill/>
+          <a:ln>
+            <a:noFill/>
+          </a:ln>
+        </p:spPr>
+      </p:pic>
     </p:spTree>
   </p:cSld>
   <p:clrMapOvr>
@@ -13544,7 +14137,7 @@
     </p:bg>
     <p:spTree>
       <p:nvGrpSpPr>
-        <p:cNvPr id="265" name="Shape 265"/>
+        <p:cNvPr id="260" name="Shape 260"/>
         <p:cNvGrpSpPr/>
         <p:nvPr/>
       </p:nvGrpSpPr>
@@ -13558,22 +14151,20 @@
       </p:grpSpPr>
       <p:sp>
         <p:nvSpPr>
-          <p:cNvPr id="266" name="Google Shape;266;p32"/>
+          <p:cNvPr id="261" name="Google Shape;261;p32"/>
           <p:cNvSpPr/>
           <p:nvPr/>
         </p:nvSpPr>
         <p:spPr>
           <a:xfrm>
-            <a:off x="365760" y="320040"/>
-            <a:ext cx="8412600" cy="4526400"/>
-          </a:xfrm>
-          <a:prstGeom prst="roundRect">
-            <a:avLst>
-              <a:gd fmla="val 16667" name="adj"/>
-            </a:avLst>
+            <a:off x="411480" y="320040"/>
+            <a:ext cx="4320324" cy="566946"/>
+          </a:xfrm>
+          <a:prstGeom prst="flowChartTerminator">
+            <a:avLst/>
           </a:prstGeom>
           <a:solidFill>
-            <a:srgbClr val="C3ECF6"/>
+            <a:srgbClr val="FFFFFF"/>
           </a:solidFill>
           <a:ln cap="flat" cmpd="sng" w="19050">
             <a:solidFill>
@@ -13601,48 +14192,7 @@
               <a:buNone/>
             </a:pPr>
             <a:r>
-              <a:t/>
-            </a:r>
-            <a:endParaRPr/>
-          </a:p>
-        </p:txBody>
-      </p:sp>
-      <p:sp>
-        <p:nvSpPr>
-          <p:cNvPr id="267" name="Google Shape;267;p32"/>
-          <p:cNvSpPr txBox="1"/>
-          <p:nvPr/>
-        </p:nvSpPr>
-        <p:spPr>
-          <a:xfrm>
-            <a:off x="777240" y="502920"/>
-            <a:ext cx="7589400" cy="3749100"/>
-          </a:xfrm>
-          <a:prstGeom prst="rect">
-            <a:avLst/>
-          </a:prstGeom>
-          <a:noFill/>
-          <a:ln>
-            <a:noFill/>
-          </a:ln>
-        </p:spPr>
-        <p:txBody>
-          <a:bodyPr anchorCtr="0" anchor="t" bIns="91425" lIns="91425" spcFirstLastPara="1" rIns="91425" wrap="square" tIns="91425">
-            <a:noAutofit/>
-          </a:bodyPr>
-          <a:lstStyle/>
-          <a:p>
-            <a:pPr indent="0" lvl="0" marL="0" rtl="0" algn="l">
-              <a:spcBef>
-                <a:spcPts val="0"/>
-              </a:spcBef>
-              <a:spcAft>
-                <a:spcPts val="0"/>
-              </a:spcAft>
-              <a:buNone/>
-            </a:pPr>
-            <a:r>
-              <a:rPr lang="en" sz="2800">
+              <a:rPr lang="en" sz="2400">
                 <a:solidFill>
                   <a:srgbClr val="1E1E1E"/>
                 </a:solidFill>
@@ -13651,9 +14201,9 @@
                 <a:cs typeface="Google Sans"/>
                 <a:sym typeface="Google Sans"/>
               </a:rPr>
-              <a:t>Where to Find Me</a:t>
-            </a:r>
-            <a:endParaRPr sz="2800">
+              <a:t>Tips for Better Bullets</a:t>
+            </a:r>
+            <a:endParaRPr sz="2400">
               <a:solidFill>
                 <a:srgbClr val="1E1E1E"/>
               </a:solidFill>
@@ -13663,18 +14213,52 @@
               <a:sym typeface="Google Sans"/>
             </a:endParaRPr>
           </a:p>
-          <a:p>
-            <a:pPr indent="0" lvl="0" marL="0" rtl="0" algn="l">
-              <a:spcBef>
-                <a:spcPts val="1200"/>
-              </a:spcBef>
-              <a:spcAft>
-                <a:spcPts val="0"/>
-              </a:spcAft>
-              <a:buNone/>
-            </a:pPr>
-            <a:r>
-              <a:rPr lang="en" sz="2000">
+        </p:txBody>
+      </p:sp>
+      <p:sp>
+        <p:nvSpPr>
+          <p:cNvPr id="262" name="Google Shape;262;p32"/>
+          <p:cNvSpPr/>
+          <p:nvPr/>
+        </p:nvSpPr>
+        <p:spPr>
+          <a:xfrm>
+            <a:off x="7086600" y="393192"/>
+            <a:ext cx="1645920" cy="420606"/>
+          </a:xfrm>
+          <a:prstGeom prst="flowChartTerminator">
+            <a:avLst/>
+          </a:prstGeom>
+          <a:solidFill>
+            <a:srgbClr val="FF7DAF"/>
+          </a:solidFill>
+          <a:ln cap="flat" cmpd="sng" w="19050">
+            <a:solidFill>
+              <a:srgbClr val="1E1E1E"/>
+            </a:solidFill>
+            <a:prstDash val="solid"/>
+            <a:round/>
+            <a:headEnd len="sm" w="sm" type="none"/>
+            <a:tailEnd len="sm" w="sm" type="none"/>
+          </a:ln>
+        </p:spPr>
+        <p:txBody>
+          <a:bodyPr anchorCtr="0" anchor="ctr" bIns="91425" lIns="91425" spcFirstLastPara="1" rIns="91425" wrap="square" tIns="91425">
+            <a:noAutofit/>
+          </a:bodyPr>
+          <a:lstStyle/>
+          <a:p>
+            <a:pPr indent="0" lvl="0" marL="0" rtl="0" algn="ctr">
+              <a:spcBef>
+                <a:spcPts val="0"/>
+              </a:spcBef>
+              <a:spcAft>
+                <a:spcPts val="0"/>
+              </a:spcAft>
+              <a:buNone/>
+            </a:pPr>
+            <a:r>
+              <a:rPr lang="en">
                 <a:solidFill>
                   <a:srgbClr val="1E1E1E"/>
                 </a:solidFill>
@@ -13683,9 +14267,9 @@
                 <a:cs typeface="Google Sans"/>
                 <a:sym typeface="Google Sans"/>
               </a:rPr>
-              <a:t>LinkedIn  linkedin.com/in/xbill</a:t>
-            </a:r>
-            <a:endParaRPr sz="2000">
+              <a:t>Tips</a:t>
+            </a:r>
+            <a:endParaRPr>
               <a:solidFill>
                 <a:srgbClr val="1E1E1E"/>
               </a:solidFill>
@@ -13695,18 +14279,151 @@
               <a:sym typeface="Google Sans"/>
             </a:endParaRPr>
           </a:p>
-          <a:p>
-            <a:pPr indent="0" lvl="0" marL="0" rtl="0" algn="l">
-              <a:spcBef>
-                <a:spcPts val="1200"/>
-              </a:spcBef>
-              <a:spcAft>
-                <a:spcPts val="0"/>
-              </a:spcAft>
-              <a:buNone/>
-            </a:pPr>
-            <a:r>
-              <a:rPr lang="en" sz="2000">
+        </p:txBody>
+      </p:sp>
+      <p:sp>
+        <p:nvSpPr>
+          <p:cNvPr id="263" name="Google Shape;263;p32"/>
+          <p:cNvSpPr/>
+          <p:nvPr/>
+        </p:nvSpPr>
+        <p:spPr>
+          <a:xfrm>
+            <a:off x="411480" y="1097280"/>
+            <a:ext cx="5715000" cy="3612000"/>
+          </a:xfrm>
+          <a:prstGeom prst="roundRect">
+            <a:avLst>
+              <a:gd fmla="val 16667" name="adj"/>
+            </a:avLst>
+          </a:prstGeom>
+          <a:solidFill>
+            <a:srgbClr val="F8D8D8"/>
+          </a:solidFill>
+          <a:ln cap="flat" cmpd="sng" w="19050">
+            <a:solidFill>
+              <a:srgbClr val="1E1E1E"/>
+            </a:solidFill>
+            <a:prstDash val="solid"/>
+            <a:round/>
+            <a:headEnd len="sm" w="sm" type="none"/>
+            <a:tailEnd len="sm" w="sm" type="none"/>
+          </a:ln>
+        </p:spPr>
+        <p:txBody>
+          <a:bodyPr anchorCtr="0" anchor="ctr" bIns="91425" lIns="91425" spcFirstLastPara="1" rIns="91425" wrap="square" tIns="91425">
+            <a:noAutofit/>
+          </a:bodyPr>
+          <a:lstStyle/>
+          <a:p>
+            <a:pPr indent="0" lvl="0" marL="0" rtl="0" algn="ctr">
+              <a:spcBef>
+                <a:spcPts val="0"/>
+              </a:spcBef>
+              <a:spcAft>
+                <a:spcPts val="0"/>
+              </a:spcAft>
+              <a:buNone/>
+            </a:pPr>
+            <a:r>
+              <a:t/>
+            </a:r>
+            <a:endParaRPr/>
+          </a:p>
+        </p:txBody>
+      </p:sp>
+      <p:sp>
+        <p:nvSpPr>
+          <p:cNvPr id="264" name="Google Shape;264;p32"/>
+          <p:cNvSpPr/>
+          <p:nvPr/>
+        </p:nvSpPr>
+        <p:spPr>
+          <a:xfrm>
+            <a:off x="6355080" y="1097280"/>
+            <a:ext cx="2377500" cy="3612000"/>
+          </a:xfrm>
+          <a:prstGeom prst="roundRect">
+            <a:avLst>
+              <a:gd fmla="val 16667" name="adj"/>
+            </a:avLst>
+          </a:prstGeom>
+          <a:solidFill>
+            <a:srgbClr val="FFFFFF"/>
+          </a:solidFill>
+          <a:ln cap="flat" cmpd="sng" w="19050">
+            <a:solidFill>
+              <a:srgbClr val="1E1E1E"/>
+            </a:solidFill>
+            <a:prstDash val="solid"/>
+            <a:round/>
+            <a:headEnd len="sm" w="sm" type="none"/>
+            <a:tailEnd len="sm" w="sm" type="none"/>
+          </a:ln>
+        </p:spPr>
+        <p:txBody>
+          <a:bodyPr anchorCtr="0" anchor="ctr" bIns="91425" lIns="91425" spcFirstLastPara="1" rIns="91425" wrap="square" tIns="91425">
+            <a:noAutofit/>
+          </a:bodyPr>
+          <a:lstStyle/>
+          <a:p>
+            <a:pPr indent="0" lvl="0" marL="0" rtl="0" algn="ctr">
+              <a:spcBef>
+                <a:spcPts val="0"/>
+              </a:spcBef>
+              <a:spcAft>
+                <a:spcPts val="0"/>
+              </a:spcAft>
+              <a:buNone/>
+            </a:pPr>
+            <a:r>
+              <a:t/>
+            </a:r>
+            <a:endParaRPr/>
+          </a:p>
+        </p:txBody>
+      </p:sp>
+      <p:sp>
+        <p:nvSpPr>
+          <p:cNvPr id="265" name="Google Shape;265;p32"/>
+          <p:cNvSpPr txBox="1"/>
+          <p:nvPr/>
+        </p:nvSpPr>
+        <p:spPr>
+          <a:xfrm>
+            <a:off x="731520" y="1463040"/>
+            <a:ext cx="5120700" cy="3108900"/>
+          </a:xfrm>
+          <a:prstGeom prst="rect">
+            <a:avLst/>
+          </a:prstGeom>
+          <a:noFill/>
+          <a:ln>
+            <a:noFill/>
+          </a:ln>
+        </p:spPr>
+        <p:txBody>
+          <a:bodyPr anchorCtr="0" anchor="t" bIns="91425" lIns="91425" spcFirstLastPara="1" rIns="91425" wrap="square" tIns="91425">
+            <a:noAutofit/>
+          </a:bodyPr>
+          <a:lstStyle/>
+          <a:p>
+            <a:pPr indent="-342900" lvl="0" marL="457200" rtl="0" algn="l">
+              <a:spcBef>
+                <a:spcPts val="0"/>
+              </a:spcBef>
+              <a:spcAft>
+                <a:spcPts val="0"/>
+              </a:spcAft>
+              <a:buClr>
+                <a:srgbClr val="1E1E1E"/>
+              </a:buClr>
+              <a:buSzPts val="1800"/>
+              <a:buFont typeface="Google Sans"/>
+              <a:buChar char="●"/>
+            </a:pPr>
+            <a:r>
+              <a:rPr lang="en" sz="1800">
                 <a:solidFill>
                   <a:srgbClr val="1E1E1E"/>
                 </a:solidFill>
@@ -13715,9 +14432,9 @@
                 <a:cs typeface="Google Sans"/>
                 <a:sym typeface="Google Sans"/>
               </a:rPr>
-              <a:t>Dev.to  dev.to/xbill</a:t>
-            </a:r>
-            <a:endParaRPr sz="2000">
+              <a:t>Paste the full job posting, not just the title</a:t>
+            </a:r>
+            <a:endParaRPr sz="1800">
               <a:solidFill>
                 <a:srgbClr val="1E1E1E"/>
               </a:solidFill>
@@ -13728,17 +14445,22 @@
             </a:endParaRPr>
           </a:p>
           <a:p>
-            <a:pPr indent="0" lvl="0" marL="0" rtl="0" algn="l">
+            <a:pPr indent="-342900" lvl="0" marL="457200" rtl="0" algn="l">
               <a:spcBef>
                 <a:spcPts val="1200"/>
               </a:spcBef>
               <a:spcAft>
                 <a:spcPts val="0"/>
               </a:spcAft>
-              <a:buNone/>
-            </a:pPr>
-            <a:r>
-              <a:rPr lang="en" sz="2000">
+              <a:buClr>
+                <a:srgbClr val="1E1E1E"/>
+              </a:buClr>
+              <a:buSzPts val="1800"/>
+              <a:buFont typeface="Google Sans"/>
+              <a:buChar char="●"/>
+            </a:pPr>
+            <a:r>
+              <a:rPr lang="en" sz="1800">
                 <a:solidFill>
                   <a:srgbClr val="1E1E1E"/>
                 </a:solidFill>
@@ -13747,9 +14469,9 @@
                 <a:cs typeface="Google Sans"/>
                 <a:sym typeface="Google Sans"/>
               </a:rPr>
-              <a:t>Medium  medium.com/@xbill999</a:t>
-            </a:r>
-            <a:endParaRPr sz="2000">
+              <a:t>Read the bullets aloud; if you wouldn't say it in an interview, change the prompt</a:t>
+            </a:r>
+            <a:endParaRPr sz="1800">
               <a:solidFill>
                 <a:srgbClr val="1E1E1E"/>
               </a:solidFill>
@@ -13760,17 +14482,22 @@
             </a:endParaRPr>
           </a:p>
           <a:p>
-            <a:pPr indent="0" lvl="0" marL="0" rtl="0" algn="l">
+            <a:pPr indent="-342900" lvl="0" marL="457200" rtl="0" algn="l">
               <a:spcBef>
                 <a:spcPts val="1200"/>
               </a:spcBef>
               <a:spcAft>
                 <a:spcPts val="0"/>
               </a:spcAft>
-              <a:buNone/>
-            </a:pPr>
-            <a:r>
-              <a:rPr lang="en" sz="2000">
+              <a:buClr>
+                <a:srgbClr val="1E1E1E"/>
+              </a:buClr>
+              <a:buSzPts val="1800"/>
+              <a:buFont typeface="Google Sans"/>
+              <a:buChar char="●"/>
+            </a:pPr>
+            <a:r>
+              <a:rPr lang="en" sz="1800">
                 <a:solidFill>
                   <a:srgbClr val="1E1E1E"/>
                 </a:solidFill>
@@ -13779,9 +14506,9 @@
                 <a:cs typeface="Google Sans"/>
                 <a:sym typeface="Google Sans"/>
               </a:rPr>
-              <a:t>GitHub  github.com/xbill9</a:t>
-            </a:r>
-            <a:endParaRPr sz="2000">
+              <a:t>Skip cover letters, PDF parsing and ATS scoring on purpose</a:t>
+            </a:r>
+            <a:endParaRPr sz="1800">
               <a:solidFill>
                 <a:srgbClr val="1E1E1E"/>
               </a:solidFill>
@@ -13792,17 +14519,22 @@
             </a:endParaRPr>
           </a:p>
           <a:p>
-            <a:pPr indent="0" lvl="0" marL="0" rtl="0" algn="l">
+            <a:pPr indent="-342900" lvl="0" marL="457200" rtl="0" algn="l">
               <a:spcBef>
                 <a:spcPts val="1200"/>
               </a:spcBef>
               <a:spcAft>
-                <a:spcPts val="0"/>
-              </a:spcAft>
-              <a:buNone/>
-            </a:pPr>
-            <a:r>
-              <a:rPr lang="en" sz="2000">
+                <a:spcPts val="1200"/>
+              </a:spcAft>
+              <a:buClr>
+                <a:srgbClr val="1E1E1E"/>
+              </a:buClr>
+              <a:buSzPts val="1800"/>
+              <a:buFont typeface="Google Sans"/>
+              <a:buChar char="●"/>
+            </a:pPr>
+            <a:r>
+              <a:rPr lang="en" sz="1800">
                 <a:solidFill>
                   <a:srgbClr val="1E1E1E"/>
                 </a:solidFill>
@@ -13811,9 +14543,9 @@
                 <a:cs typeface="Google Sans"/>
                 <a:sym typeface="Google Sans"/>
               </a:rPr>
-              <a:t>Hugging Face  huggingface.co/xbill9</a:t>
-            </a:r>
-            <a:endParaRPr sz="2000">
+              <a:t>Stuck? Ask the room, then a mentor</a:t>
+            </a:r>
+            <a:endParaRPr sz="1800">
               <a:solidFill>
                 <a:srgbClr val="1E1E1E"/>
               </a:solidFill>
@@ -13823,18 +14555,44 @@
               <a:sym typeface="Google Sans"/>
             </a:endParaRPr>
           </a:p>
-          <a:p>
-            <a:pPr indent="0" lvl="0" marL="0" rtl="0" algn="l">
-              <a:spcBef>
-                <a:spcPts val="1200"/>
-              </a:spcBef>
-              <a:spcAft>
-                <a:spcPts val="1200"/>
-              </a:spcAft>
-              <a:buNone/>
-            </a:pPr>
-            <a:r>
-              <a:rPr lang="en" sz="2000">
+        </p:txBody>
+      </p:sp>
+      <p:sp>
+        <p:nvSpPr>
+          <p:cNvPr id="266" name="Google Shape;266;p32"/>
+          <p:cNvSpPr txBox="1"/>
+          <p:nvPr/>
+        </p:nvSpPr>
+        <p:spPr>
+          <a:xfrm>
+            <a:off x="6492240" y="3566160"/>
+            <a:ext cx="2103000" cy="457200"/>
+          </a:xfrm>
+          <a:prstGeom prst="rect">
+            <a:avLst/>
+          </a:prstGeom>
+          <a:noFill/>
+          <a:ln>
+            <a:noFill/>
+          </a:ln>
+        </p:spPr>
+        <p:txBody>
+          <a:bodyPr anchorCtr="0" anchor="t" bIns="91425" lIns="91425" spcFirstLastPara="1" rIns="91425" wrap="square" tIns="91425">
+            <a:noAutofit/>
+          </a:bodyPr>
+          <a:lstStyle/>
+          <a:p>
+            <a:pPr indent="0" lvl="0" marL="0" rtl="0" algn="ctr">
+              <a:spcBef>
+                <a:spcPts val="0"/>
+              </a:spcBef>
+              <a:spcAft>
+                <a:spcPts val="0"/>
+              </a:spcAft>
+              <a:buNone/>
+            </a:pPr>
+            <a:r>
+              <a:rPr lang="en" sz="1600">
                 <a:solidFill>
                   <a:srgbClr val="1E1E1E"/>
                 </a:solidFill>
@@ -13843,31 +14601,9 @@
                 <a:cs typeface="Google Sans"/>
                 <a:sym typeface="Google Sans"/>
               </a:rPr>
-              <a:t>AWS Builder Center  </a:t>
-            </a:r>
-            <a:r>
-              <a:rPr lang="en" sz="2000">
-                <a:solidFill>
-                  <a:srgbClr val="1E1E1E"/>
-                </a:solidFill>
-                <a:uFill>
-                  <a:noFill/>
-                </a:uFill>
-                <a:latin typeface="Google Sans"/>
-                <a:ea typeface="Google Sans"/>
-                <a:cs typeface="Google Sans"/>
-                <a:sym typeface="Google Sans"/>
-                <a:hlinkClick r:id="rId3">
-                  <a:extLst>
-                    <a:ext uri="{A12FA001-AC4F-418D-AE19-62706E023703}">
-                      <ahyp:hlinkClr val="tx"/>
-                    </a:ext>
-                  </a:extLst>
-                </a:hlinkClick>
-              </a:rPr>
-              <a:t>builder.aws.com/community/@xbill9</a:t>
-            </a:r>
-            <a:endParaRPr sz="2000">
+              <a:t>Track tips</a:t>
+            </a:r>
+            <a:endParaRPr sz="1600">
               <a:solidFill>
                 <a:srgbClr val="1E1E1E"/>
               </a:solidFill>
@@ -13881,9 +14617,1611 @@
       </p:sp>
       <p:pic>
         <p:nvPicPr>
-          <p:cNvPr id="268" name="Google Shape;268;p32">
-            <a:hlinkClick r:id="rId4"/>
-          </p:cNvPr>
+          <p:cNvPr id="267" name="Google Shape;267;p32"/>
+          <p:cNvPicPr preferRelativeResize="0"/>
+          <p:nvPr/>
+        </p:nvPicPr>
+        <p:blipFill>
+          <a:blip r:embed="rId3">
+            <a:alphaModFix/>
+          </a:blip>
+          <a:stretch>
+            <a:fillRect/>
+          </a:stretch>
+        </p:blipFill>
+        <p:spPr>
+          <a:xfrm>
+            <a:off x="6537960" y="1417320"/>
+            <a:ext cx="2011680" cy="2011680"/>
+          </a:xfrm>
+          <a:prstGeom prst="rect">
+            <a:avLst/>
+          </a:prstGeom>
+          <a:noFill/>
+          <a:ln>
+            <a:noFill/>
+          </a:ln>
+        </p:spPr>
+      </p:pic>
+    </p:spTree>
+  </p:cSld>
+  <p:clrMapOvr>
+    <a:masterClrMapping/>
+  </p:clrMapOvr>
+</p:sld>
+</file>
+
+<file path=ppt/slides/slide21.xml><?xml version="1.0" encoding="utf-8"?>
+<p:sld xmlns:a="http://schemas.openxmlformats.org/drawingml/2006/main" xmlns:r="http://schemas.openxmlformats.org/officeDocument/2006/relationships" xmlns:mc="http://schemas.openxmlformats.org/markup-compatibility/2006" xmlns:mv="urn:schemas-microsoft-com:mac:vml" xmlns:p="http://schemas.openxmlformats.org/presentationml/2006/main" xmlns:c="http://schemas.openxmlformats.org/drawingml/2006/chart" xmlns:dgm="http://schemas.openxmlformats.org/drawingml/2006/diagram" xmlns:o="urn:schemas-microsoft-com:office:office" xmlns:v="urn:schemas-microsoft-com:vml" xmlns:pvml="urn:schemas-microsoft-com:office:powerpoint" xmlns:com="http://schemas.openxmlformats.org/drawingml/2006/compatibility" xmlns:p14="http://schemas.microsoft.com/office/powerpoint/2010/main" xmlns:p15="http://schemas.microsoft.com/office/powerpoint/2012/main" xmlns:ahyp="http://schemas.microsoft.com/office/drawing/2018/hyperlinkcolor">
+  <p:cSld>
+    <p:bg>
+      <p:bgPr>
+        <a:solidFill>
+          <a:srgbClr val="FFFFFF"/>
+        </a:solidFill>
+      </p:bgPr>
+    </p:bg>
+    <p:spTree>
+      <p:nvGrpSpPr>
+        <p:cNvPr id="271" name="Shape 271"/>
+        <p:cNvGrpSpPr/>
+        <p:nvPr/>
+      </p:nvGrpSpPr>
+      <p:grpSpPr>
+        <a:xfrm>
+          <a:off x="0" y="0"/>
+          <a:ext cx="0" cy="0"/>
+          <a:chOff x="0" y="0"/>
+          <a:chExt cx="0" cy="0"/>
+        </a:xfrm>
+      </p:grpSpPr>
+      <p:sp>
+        <p:nvSpPr>
+          <p:cNvPr id="272" name="Google Shape;272;p33"/>
+          <p:cNvSpPr/>
+          <p:nvPr/>
+        </p:nvSpPr>
+        <p:spPr>
+          <a:xfrm>
+            <a:off x="411480" y="320040"/>
+            <a:ext cx="5920722" cy="566946"/>
+          </a:xfrm>
+          <a:prstGeom prst="flowChartTerminator">
+            <a:avLst/>
+          </a:prstGeom>
+          <a:solidFill>
+            <a:srgbClr val="FFFFFF"/>
+          </a:solidFill>
+          <a:ln cap="flat" cmpd="sng" w="19050">
+            <a:solidFill>
+              <a:srgbClr val="1E1E1E"/>
+            </a:solidFill>
+            <a:prstDash val="solid"/>
+            <a:round/>
+            <a:headEnd len="sm" w="sm" type="none"/>
+            <a:tailEnd len="sm" w="sm" type="none"/>
+          </a:ln>
+        </p:spPr>
+        <p:txBody>
+          <a:bodyPr anchorCtr="0" anchor="ctr" bIns="91425" lIns="91425" spcFirstLastPara="1" rIns="91425" wrap="square" tIns="91425">
+            <a:noAutofit/>
+          </a:bodyPr>
+          <a:lstStyle/>
+          <a:p>
+            <a:pPr indent="0" lvl="0" marL="0" rtl="0" algn="ctr">
+              <a:spcBef>
+                <a:spcPts val="0"/>
+              </a:spcBef>
+              <a:spcAft>
+                <a:spcPts val="0"/>
+              </a:spcAft>
+              <a:buNone/>
+            </a:pPr>
+            <a:r>
+              <a:rPr lang="en" sz="2400">
+                <a:solidFill>
+                  <a:srgbClr val="1E1E1E"/>
+                </a:solidFill>
+                <a:latin typeface="Google Sans"/>
+                <a:ea typeface="Google Sans"/>
+                <a:cs typeface="Google Sans"/>
+                <a:sym typeface="Google Sans"/>
+              </a:rPr>
+              <a:t>Share and Submit Before You Leave</a:t>
+            </a:r>
+            <a:endParaRPr sz="2400">
+              <a:solidFill>
+                <a:srgbClr val="1E1E1E"/>
+              </a:solidFill>
+              <a:latin typeface="Google Sans"/>
+              <a:ea typeface="Google Sans"/>
+              <a:cs typeface="Google Sans"/>
+              <a:sym typeface="Google Sans"/>
+            </a:endParaRPr>
+          </a:p>
+        </p:txBody>
+      </p:sp>
+      <p:sp>
+        <p:nvSpPr>
+          <p:cNvPr id="273" name="Google Shape;273;p33"/>
+          <p:cNvSpPr/>
+          <p:nvPr/>
+        </p:nvSpPr>
+        <p:spPr>
+          <a:xfrm>
+            <a:off x="7086600" y="393192"/>
+            <a:ext cx="1645920" cy="420606"/>
+          </a:xfrm>
+          <a:prstGeom prst="flowChartTerminator">
+            <a:avLst/>
+          </a:prstGeom>
+          <a:solidFill>
+            <a:srgbClr val="FF7DAF"/>
+          </a:solidFill>
+          <a:ln cap="flat" cmpd="sng" w="19050">
+            <a:solidFill>
+              <a:srgbClr val="1E1E1E"/>
+            </a:solidFill>
+            <a:prstDash val="solid"/>
+            <a:round/>
+            <a:headEnd len="sm" w="sm" type="none"/>
+            <a:tailEnd len="sm" w="sm" type="none"/>
+          </a:ln>
+        </p:spPr>
+        <p:txBody>
+          <a:bodyPr anchorCtr="0" anchor="ctr" bIns="91425" lIns="91425" spcFirstLastPara="1" rIns="91425" wrap="square" tIns="91425">
+            <a:noAutofit/>
+          </a:bodyPr>
+          <a:lstStyle/>
+          <a:p>
+            <a:pPr indent="0" lvl="0" marL="0" rtl="0" algn="ctr">
+              <a:spcBef>
+                <a:spcPts val="0"/>
+              </a:spcBef>
+              <a:spcAft>
+                <a:spcPts val="0"/>
+              </a:spcAft>
+              <a:buNone/>
+            </a:pPr>
+            <a:r>
+              <a:rPr lang="en">
+                <a:solidFill>
+                  <a:srgbClr val="1E1E1E"/>
+                </a:solidFill>
+                <a:latin typeface="Google Sans"/>
+                <a:ea typeface="Google Sans"/>
+                <a:cs typeface="Google Sans"/>
+                <a:sym typeface="Google Sans"/>
+              </a:rPr>
+              <a:t>Step 10</a:t>
+            </a:r>
+            <a:endParaRPr>
+              <a:solidFill>
+                <a:srgbClr val="1E1E1E"/>
+              </a:solidFill>
+              <a:latin typeface="Google Sans"/>
+              <a:ea typeface="Google Sans"/>
+              <a:cs typeface="Google Sans"/>
+              <a:sym typeface="Google Sans"/>
+            </a:endParaRPr>
+          </a:p>
+        </p:txBody>
+      </p:sp>
+      <p:sp>
+        <p:nvSpPr>
+          <p:cNvPr id="274" name="Google Shape;274;p33"/>
+          <p:cNvSpPr/>
+          <p:nvPr/>
+        </p:nvSpPr>
+        <p:spPr>
+          <a:xfrm>
+            <a:off x="411480" y="1097280"/>
+            <a:ext cx="5715000" cy="3612000"/>
+          </a:xfrm>
+          <a:prstGeom prst="roundRect">
+            <a:avLst>
+              <a:gd fmla="val 16667" name="adj"/>
+            </a:avLst>
+          </a:prstGeom>
+          <a:solidFill>
+            <a:srgbClr val="F8D8D8"/>
+          </a:solidFill>
+          <a:ln cap="flat" cmpd="sng" w="19050">
+            <a:solidFill>
+              <a:srgbClr val="1E1E1E"/>
+            </a:solidFill>
+            <a:prstDash val="solid"/>
+            <a:round/>
+            <a:headEnd len="sm" w="sm" type="none"/>
+            <a:tailEnd len="sm" w="sm" type="none"/>
+          </a:ln>
+        </p:spPr>
+        <p:txBody>
+          <a:bodyPr anchorCtr="0" anchor="ctr" bIns="91425" lIns="91425" spcFirstLastPara="1" rIns="91425" wrap="square" tIns="91425">
+            <a:noAutofit/>
+          </a:bodyPr>
+          <a:lstStyle/>
+          <a:p>
+            <a:pPr indent="0" lvl="0" marL="0" rtl="0" algn="ctr">
+              <a:spcBef>
+                <a:spcPts val="0"/>
+              </a:spcBef>
+              <a:spcAft>
+                <a:spcPts val="0"/>
+              </a:spcAft>
+              <a:buNone/>
+            </a:pPr>
+            <a:r>
+              <a:t/>
+            </a:r>
+            <a:endParaRPr/>
+          </a:p>
+        </p:txBody>
+      </p:sp>
+      <p:sp>
+        <p:nvSpPr>
+          <p:cNvPr id="275" name="Google Shape;275;p33"/>
+          <p:cNvSpPr/>
+          <p:nvPr/>
+        </p:nvSpPr>
+        <p:spPr>
+          <a:xfrm>
+            <a:off x="6355080" y="1097280"/>
+            <a:ext cx="2377500" cy="3612000"/>
+          </a:xfrm>
+          <a:prstGeom prst="roundRect">
+            <a:avLst>
+              <a:gd fmla="val 16667" name="adj"/>
+            </a:avLst>
+          </a:prstGeom>
+          <a:solidFill>
+            <a:srgbClr val="FFFFFF"/>
+          </a:solidFill>
+          <a:ln cap="flat" cmpd="sng" w="19050">
+            <a:solidFill>
+              <a:srgbClr val="1E1E1E"/>
+            </a:solidFill>
+            <a:prstDash val="solid"/>
+            <a:round/>
+            <a:headEnd len="sm" w="sm" type="none"/>
+            <a:tailEnd len="sm" w="sm" type="none"/>
+          </a:ln>
+        </p:spPr>
+        <p:txBody>
+          <a:bodyPr anchorCtr="0" anchor="ctr" bIns="91425" lIns="91425" spcFirstLastPara="1" rIns="91425" wrap="square" tIns="91425">
+            <a:noAutofit/>
+          </a:bodyPr>
+          <a:lstStyle/>
+          <a:p>
+            <a:pPr indent="0" lvl="0" marL="0" rtl="0" algn="ctr">
+              <a:spcBef>
+                <a:spcPts val="0"/>
+              </a:spcBef>
+              <a:spcAft>
+                <a:spcPts val="0"/>
+              </a:spcAft>
+              <a:buNone/>
+            </a:pPr>
+            <a:r>
+              <a:t/>
+            </a:r>
+            <a:endParaRPr/>
+          </a:p>
+        </p:txBody>
+      </p:sp>
+      <p:sp>
+        <p:nvSpPr>
+          <p:cNvPr id="276" name="Google Shape;276;p33"/>
+          <p:cNvSpPr txBox="1"/>
+          <p:nvPr/>
+        </p:nvSpPr>
+        <p:spPr>
+          <a:xfrm>
+            <a:off x="731520" y="1463040"/>
+            <a:ext cx="5120700" cy="3108900"/>
+          </a:xfrm>
+          <a:prstGeom prst="rect">
+            <a:avLst/>
+          </a:prstGeom>
+          <a:noFill/>
+          <a:ln>
+            <a:noFill/>
+          </a:ln>
+        </p:spPr>
+        <p:txBody>
+          <a:bodyPr anchorCtr="0" anchor="t" bIns="91425" lIns="91425" spcFirstLastPara="1" rIns="91425" wrap="square" tIns="91425">
+            <a:noAutofit/>
+          </a:bodyPr>
+          <a:lstStyle/>
+          <a:p>
+            <a:pPr indent="-342900" lvl="0" marL="457200" rtl="0" algn="l">
+              <a:spcBef>
+                <a:spcPts val="0"/>
+              </a:spcBef>
+              <a:spcAft>
+                <a:spcPts val="0"/>
+              </a:spcAft>
+              <a:buClr>
+                <a:srgbClr val="1E1E1E"/>
+              </a:buClr>
+              <a:buSzPts val="1800"/>
+              <a:buFont typeface="Google Sans"/>
+              <a:buChar char="●"/>
+            </a:pPr>
+            <a:r>
+              <a:rPr lang="en" sz="1800">
+                <a:solidFill>
+                  <a:srgbClr val="1E1E1E"/>
+                </a:solidFill>
+                <a:latin typeface="Google Sans"/>
+                <a:ea typeface="Google Sans"/>
+                <a:cs typeface="Google Sans"/>
+                <a:sym typeface="Google Sans"/>
+              </a:rPr>
+              <a:t>Two-minute screen-share demo</a:t>
+            </a:r>
+            <a:endParaRPr sz="1800">
+              <a:solidFill>
+                <a:srgbClr val="1E1E1E"/>
+              </a:solidFill>
+              <a:latin typeface="Google Sans"/>
+              <a:ea typeface="Google Sans"/>
+              <a:cs typeface="Google Sans"/>
+              <a:sym typeface="Google Sans"/>
+            </a:endParaRPr>
+          </a:p>
+          <a:p>
+            <a:pPr indent="-342900" lvl="0" marL="457200" rtl="0" algn="l">
+              <a:spcBef>
+                <a:spcPts val="1200"/>
+              </a:spcBef>
+              <a:spcAft>
+                <a:spcPts val="0"/>
+              </a:spcAft>
+              <a:buClr>
+                <a:srgbClr val="1E1E1E"/>
+              </a:buClr>
+              <a:buSzPts val="1800"/>
+              <a:buFont typeface="Google Sans"/>
+              <a:buChar char="●"/>
+            </a:pPr>
+            <a:r>
+              <a:rPr lang="en" sz="1800">
+                <a:solidFill>
+                  <a:srgbClr val="1E1E1E"/>
+                </a:solidFill>
+                <a:latin typeface="Google Sans"/>
+                <a:ea typeface="Google Sans"/>
+                <a:cs typeface="Google Sans"/>
+                <a:sym typeface="Google Sans"/>
+              </a:rPr>
+              <a:t>Submit your build: it goes on the showcase</a:t>
+            </a:r>
+            <a:endParaRPr sz="1800">
+              <a:solidFill>
+                <a:srgbClr val="1E1E1E"/>
+              </a:solidFill>
+              <a:latin typeface="Google Sans"/>
+              <a:ea typeface="Google Sans"/>
+              <a:cs typeface="Google Sans"/>
+              <a:sym typeface="Google Sans"/>
+            </a:endParaRPr>
+          </a:p>
+          <a:p>
+            <a:pPr indent="-342900" lvl="0" marL="457200" rtl="0" algn="l">
+              <a:spcBef>
+                <a:spcPts val="1200"/>
+              </a:spcBef>
+              <a:spcAft>
+                <a:spcPts val="1200"/>
+              </a:spcAft>
+              <a:buClr>
+                <a:srgbClr val="1E1E1E"/>
+              </a:buClr>
+              <a:buSzPts val="1800"/>
+              <a:buFont typeface="Google Sans"/>
+              <a:buChar char="●"/>
+            </a:pPr>
+            <a:r>
+              <a:rPr lang="en" sz="1800">
+                <a:solidFill>
+                  <a:srgbClr val="1E1E1E"/>
+                </a:solidFill>
+                <a:latin typeface="Google Sans"/>
+                <a:ea typeface="Google Sans"/>
+                <a:cs typeface="Google Sans"/>
+                <a:sym typeface="Google Sans"/>
+              </a:rPr>
+              <a:t>Your name and chapter go with it</a:t>
+            </a:r>
+            <a:endParaRPr sz="1800">
+              <a:solidFill>
+                <a:srgbClr val="1E1E1E"/>
+              </a:solidFill>
+              <a:latin typeface="Google Sans"/>
+              <a:ea typeface="Google Sans"/>
+              <a:cs typeface="Google Sans"/>
+              <a:sym typeface="Google Sans"/>
+            </a:endParaRPr>
+          </a:p>
+        </p:txBody>
+      </p:sp>
+      <p:sp>
+        <p:nvSpPr>
+          <p:cNvPr id="277" name="Google Shape;277;p33"/>
+          <p:cNvSpPr txBox="1"/>
+          <p:nvPr/>
+        </p:nvSpPr>
+        <p:spPr>
+          <a:xfrm>
+            <a:off x="6492240" y="3566160"/>
+            <a:ext cx="2103000" cy="457200"/>
+          </a:xfrm>
+          <a:prstGeom prst="rect">
+            <a:avLst/>
+          </a:prstGeom>
+          <a:noFill/>
+          <a:ln>
+            <a:noFill/>
+          </a:ln>
+        </p:spPr>
+        <p:txBody>
+          <a:bodyPr anchorCtr="0" anchor="t" bIns="91425" lIns="91425" spcFirstLastPara="1" rIns="91425" wrap="square" tIns="91425">
+            <a:noAutofit/>
+          </a:bodyPr>
+          <a:lstStyle/>
+          <a:p>
+            <a:pPr indent="0" lvl="0" marL="0" rtl="0" algn="ctr">
+              <a:spcBef>
+                <a:spcPts val="0"/>
+              </a:spcBef>
+              <a:spcAft>
+                <a:spcPts val="0"/>
+              </a:spcAft>
+              <a:buNone/>
+            </a:pPr>
+            <a:r>
+              <a:rPr lang="en" sz="1600">
+                <a:solidFill>
+                  <a:srgbClr val="1E1E1E"/>
+                </a:solidFill>
+                <a:latin typeface="Google Sans"/>
+                <a:ea typeface="Google Sans"/>
+                <a:cs typeface="Google Sans"/>
+                <a:sym typeface="Google Sans"/>
+              </a:rPr>
+              <a:t>Submit your build</a:t>
+            </a:r>
+            <a:endParaRPr sz="1600">
+              <a:solidFill>
+                <a:srgbClr val="1E1E1E"/>
+              </a:solidFill>
+              <a:latin typeface="Google Sans"/>
+              <a:ea typeface="Google Sans"/>
+              <a:cs typeface="Google Sans"/>
+              <a:sym typeface="Google Sans"/>
+            </a:endParaRPr>
+          </a:p>
+        </p:txBody>
+      </p:sp>
+      <p:pic>
+        <p:nvPicPr>
+          <p:cNvPr id="278" name="Google Shape;278;p33"/>
+          <p:cNvPicPr preferRelativeResize="0"/>
+          <p:nvPr/>
+        </p:nvPicPr>
+        <p:blipFill>
+          <a:blip r:embed="rId3">
+            <a:alphaModFix/>
+          </a:blip>
+          <a:stretch>
+            <a:fillRect/>
+          </a:stretch>
+        </p:blipFill>
+        <p:spPr>
+          <a:xfrm>
+            <a:off x="6537960" y="1417320"/>
+            <a:ext cx="2011680" cy="2011680"/>
+          </a:xfrm>
+          <a:prstGeom prst="rect">
+            <a:avLst/>
+          </a:prstGeom>
+          <a:noFill/>
+          <a:ln>
+            <a:noFill/>
+          </a:ln>
+        </p:spPr>
+      </p:pic>
+    </p:spTree>
+  </p:cSld>
+  <p:clrMapOvr>
+    <a:masterClrMapping/>
+  </p:clrMapOvr>
+</p:sld>
+</file>
+
+<file path=ppt/slides/slide22.xml><?xml version="1.0" encoding="utf-8"?>
+<p:sld xmlns:a="http://schemas.openxmlformats.org/drawingml/2006/main" xmlns:r="http://schemas.openxmlformats.org/officeDocument/2006/relationships" xmlns:mc="http://schemas.openxmlformats.org/markup-compatibility/2006" xmlns:mv="urn:schemas-microsoft-com:mac:vml" xmlns:p="http://schemas.openxmlformats.org/presentationml/2006/main" xmlns:c="http://schemas.openxmlformats.org/drawingml/2006/chart" xmlns:dgm="http://schemas.openxmlformats.org/drawingml/2006/diagram" xmlns:o="urn:schemas-microsoft-com:office:office" xmlns:v="urn:schemas-microsoft-com:vml" xmlns:pvml="urn:schemas-microsoft-com:office:powerpoint" xmlns:com="http://schemas.openxmlformats.org/drawingml/2006/compatibility" xmlns:p14="http://schemas.microsoft.com/office/powerpoint/2010/main" xmlns:p15="http://schemas.microsoft.com/office/powerpoint/2012/main" xmlns:ahyp="http://schemas.microsoft.com/office/drawing/2018/hyperlinkcolor">
+  <p:cSld>
+    <p:bg>
+      <p:bgPr>
+        <a:solidFill>
+          <a:srgbClr val="FFFFFF"/>
+        </a:solidFill>
+      </p:bgPr>
+    </p:bg>
+    <p:spTree>
+      <p:nvGrpSpPr>
+        <p:cNvPr id="282" name="Shape 282"/>
+        <p:cNvGrpSpPr/>
+        <p:nvPr/>
+      </p:nvGrpSpPr>
+      <p:grpSpPr>
+        <a:xfrm>
+          <a:off x="0" y="0"/>
+          <a:ext cx="0" cy="0"/>
+          <a:chOff x="0" y="0"/>
+          <a:chExt cx="0" cy="0"/>
+        </a:xfrm>
+      </p:grpSpPr>
+      <p:sp>
+        <p:nvSpPr>
+          <p:cNvPr id="283" name="Google Shape;283;p34"/>
+          <p:cNvSpPr/>
+          <p:nvPr/>
+        </p:nvSpPr>
+        <p:spPr>
+          <a:xfrm>
+            <a:off x="411480" y="320040"/>
+            <a:ext cx="4000644" cy="566946"/>
+          </a:xfrm>
+          <a:prstGeom prst="flowChartTerminator">
+            <a:avLst/>
+          </a:prstGeom>
+          <a:solidFill>
+            <a:srgbClr val="FFFFFF"/>
+          </a:solidFill>
+          <a:ln cap="flat" cmpd="sng" w="19050">
+            <a:solidFill>
+              <a:srgbClr val="1E1E1E"/>
+            </a:solidFill>
+            <a:prstDash val="solid"/>
+            <a:round/>
+            <a:headEnd len="sm" w="sm" type="none"/>
+            <a:tailEnd len="sm" w="sm" type="none"/>
+          </a:ln>
+        </p:spPr>
+        <p:txBody>
+          <a:bodyPr anchorCtr="0" anchor="ctr" bIns="91425" lIns="91425" spcFirstLastPara="1" rIns="91425" wrap="square" tIns="91425">
+            <a:noAutofit/>
+          </a:bodyPr>
+          <a:lstStyle/>
+          <a:p>
+            <a:pPr indent="0" lvl="0" marL="0" rtl="0" algn="ctr">
+              <a:spcBef>
+                <a:spcPts val="0"/>
+              </a:spcBef>
+              <a:spcAft>
+                <a:spcPts val="0"/>
+              </a:spcAft>
+              <a:buNone/>
+            </a:pPr>
+            <a:r>
+              <a:rPr lang="en" sz="2400">
+                <a:solidFill>
+                  <a:srgbClr val="1E1E1E"/>
+                </a:solidFill>
+                <a:latin typeface="Google Sans"/>
+                <a:ea typeface="Google Sans"/>
+                <a:cs typeface="Google Sans"/>
+                <a:sym typeface="Google Sans"/>
+              </a:rPr>
+              <a:t>Keep Building at Home</a:t>
+            </a:r>
+            <a:endParaRPr sz="2400">
+              <a:solidFill>
+                <a:srgbClr val="1E1E1E"/>
+              </a:solidFill>
+              <a:latin typeface="Google Sans"/>
+              <a:ea typeface="Google Sans"/>
+              <a:cs typeface="Google Sans"/>
+              <a:sym typeface="Google Sans"/>
+            </a:endParaRPr>
+          </a:p>
+        </p:txBody>
+      </p:sp>
+      <p:sp>
+        <p:nvSpPr>
+          <p:cNvPr id="284" name="Google Shape;284;p34"/>
+          <p:cNvSpPr/>
+          <p:nvPr/>
+        </p:nvSpPr>
+        <p:spPr>
+          <a:xfrm>
+            <a:off x="7086600" y="393192"/>
+            <a:ext cx="1645920" cy="420606"/>
+          </a:xfrm>
+          <a:prstGeom prst="flowChartTerminator">
+            <a:avLst/>
+          </a:prstGeom>
+          <a:solidFill>
+            <a:srgbClr val="F9AB00"/>
+          </a:solidFill>
+          <a:ln cap="flat" cmpd="sng" w="19050">
+            <a:solidFill>
+              <a:srgbClr val="1E1E1E"/>
+            </a:solidFill>
+            <a:prstDash val="solid"/>
+            <a:round/>
+            <a:headEnd len="sm" w="sm" type="none"/>
+            <a:tailEnd len="sm" w="sm" type="none"/>
+          </a:ln>
+        </p:spPr>
+        <p:txBody>
+          <a:bodyPr anchorCtr="0" anchor="ctr" bIns="91425" lIns="91425" spcFirstLastPara="1" rIns="91425" wrap="square" tIns="91425">
+            <a:noAutofit/>
+          </a:bodyPr>
+          <a:lstStyle/>
+          <a:p>
+            <a:pPr indent="0" lvl="0" marL="0" rtl="0" algn="ctr">
+              <a:spcBef>
+                <a:spcPts val="0"/>
+              </a:spcBef>
+              <a:spcAft>
+                <a:spcPts val="0"/>
+              </a:spcAft>
+              <a:buNone/>
+            </a:pPr>
+            <a:r>
+              <a:rPr lang="en">
+                <a:solidFill>
+                  <a:srgbClr val="1E1E1E"/>
+                </a:solidFill>
+                <a:latin typeface="Google Sans"/>
+                <a:ea typeface="Google Sans"/>
+                <a:cs typeface="Google Sans"/>
+                <a:sym typeface="Google Sans"/>
+              </a:rPr>
+              <a:t>After the jam</a:t>
+            </a:r>
+            <a:endParaRPr>
+              <a:solidFill>
+                <a:srgbClr val="1E1E1E"/>
+              </a:solidFill>
+              <a:latin typeface="Google Sans"/>
+              <a:ea typeface="Google Sans"/>
+              <a:cs typeface="Google Sans"/>
+              <a:sym typeface="Google Sans"/>
+            </a:endParaRPr>
+          </a:p>
+        </p:txBody>
+      </p:sp>
+      <p:sp>
+        <p:nvSpPr>
+          <p:cNvPr id="285" name="Google Shape;285;p34"/>
+          <p:cNvSpPr/>
+          <p:nvPr/>
+        </p:nvSpPr>
+        <p:spPr>
+          <a:xfrm>
+            <a:off x="411480" y="1097280"/>
+            <a:ext cx="5715000" cy="3612000"/>
+          </a:xfrm>
+          <a:prstGeom prst="roundRect">
+            <a:avLst>
+              <a:gd fmla="val 16667" name="adj"/>
+            </a:avLst>
+          </a:prstGeom>
+          <a:solidFill>
+            <a:srgbClr val="FFE79C"/>
+          </a:solidFill>
+          <a:ln cap="flat" cmpd="sng" w="19050">
+            <a:solidFill>
+              <a:srgbClr val="1E1E1E"/>
+            </a:solidFill>
+            <a:prstDash val="solid"/>
+            <a:round/>
+            <a:headEnd len="sm" w="sm" type="none"/>
+            <a:tailEnd len="sm" w="sm" type="none"/>
+          </a:ln>
+        </p:spPr>
+        <p:txBody>
+          <a:bodyPr anchorCtr="0" anchor="ctr" bIns="91425" lIns="91425" spcFirstLastPara="1" rIns="91425" wrap="square" tIns="91425">
+            <a:noAutofit/>
+          </a:bodyPr>
+          <a:lstStyle/>
+          <a:p>
+            <a:pPr indent="0" lvl="0" marL="0" rtl="0" algn="ctr">
+              <a:spcBef>
+                <a:spcPts val="0"/>
+              </a:spcBef>
+              <a:spcAft>
+                <a:spcPts val="0"/>
+              </a:spcAft>
+              <a:buNone/>
+            </a:pPr>
+            <a:r>
+              <a:t/>
+            </a:r>
+            <a:endParaRPr/>
+          </a:p>
+        </p:txBody>
+      </p:sp>
+      <p:sp>
+        <p:nvSpPr>
+          <p:cNvPr id="286" name="Google Shape;286;p34"/>
+          <p:cNvSpPr/>
+          <p:nvPr/>
+        </p:nvSpPr>
+        <p:spPr>
+          <a:xfrm>
+            <a:off x="6355080" y="1097280"/>
+            <a:ext cx="2377500" cy="3612000"/>
+          </a:xfrm>
+          <a:prstGeom prst="roundRect">
+            <a:avLst>
+              <a:gd fmla="val 16667" name="adj"/>
+            </a:avLst>
+          </a:prstGeom>
+          <a:solidFill>
+            <a:srgbClr val="FFFFFF"/>
+          </a:solidFill>
+          <a:ln cap="flat" cmpd="sng" w="19050">
+            <a:solidFill>
+              <a:srgbClr val="1E1E1E"/>
+            </a:solidFill>
+            <a:prstDash val="solid"/>
+            <a:round/>
+            <a:headEnd len="sm" w="sm" type="none"/>
+            <a:tailEnd len="sm" w="sm" type="none"/>
+          </a:ln>
+        </p:spPr>
+        <p:txBody>
+          <a:bodyPr anchorCtr="0" anchor="ctr" bIns="91425" lIns="91425" spcFirstLastPara="1" rIns="91425" wrap="square" tIns="91425">
+            <a:noAutofit/>
+          </a:bodyPr>
+          <a:lstStyle/>
+          <a:p>
+            <a:pPr indent="0" lvl="0" marL="0" rtl="0" algn="ctr">
+              <a:spcBef>
+                <a:spcPts val="0"/>
+              </a:spcBef>
+              <a:spcAft>
+                <a:spcPts val="0"/>
+              </a:spcAft>
+              <a:buNone/>
+            </a:pPr>
+            <a:r>
+              <a:t/>
+            </a:r>
+            <a:endParaRPr/>
+          </a:p>
+        </p:txBody>
+      </p:sp>
+      <p:sp>
+        <p:nvSpPr>
+          <p:cNvPr id="287" name="Google Shape;287;p34"/>
+          <p:cNvSpPr txBox="1"/>
+          <p:nvPr/>
+        </p:nvSpPr>
+        <p:spPr>
+          <a:xfrm>
+            <a:off x="731520" y="1463040"/>
+            <a:ext cx="5120700" cy="3108900"/>
+          </a:xfrm>
+          <a:prstGeom prst="rect">
+            <a:avLst/>
+          </a:prstGeom>
+          <a:noFill/>
+          <a:ln>
+            <a:noFill/>
+          </a:ln>
+        </p:spPr>
+        <p:txBody>
+          <a:bodyPr anchorCtr="0" anchor="t" bIns="91425" lIns="91425" spcFirstLastPara="1" rIns="91425" wrap="square" tIns="91425">
+            <a:noAutofit/>
+          </a:bodyPr>
+          <a:lstStyle/>
+          <a:p>
+            <a:pPr indent="-342900" lvl="0" marL="457200" rtl="0" algn="l">
+              <a:spcBef>
+                <a:spcPts val="0"/>
+              </a:spcBef>
+              <a:spcAft>
+                <a:spcPts val="0"/>
+              </a:spcAft>
+              <a:buClr>
+                <a:srgbClr val="1E1E1E"/>
+              </a:buClr>
+              <a:buSzPts val="1800"/>
+              <a:buFont typeface="Google Sans"/>
+              <a:buChar char="●"/>
+            </a:pPr>
+            <a:r>
+              <a:rPr lang="en" sz="1800">
+                <a:solidFill>
+                  <a:srgbClr val="1E1E1E"/>
+                </a:solidFill>
+                <a:latin typeface="Google Sans"/>
+                <a:ea typeface="Google Sans"/>
+                <a:cs typeface="Google Sans"/>
+                <a:sym typeface="Google Sans"/>
+              </a:rPr>
+              <a:t>Match score and missing keywords</a:t>
+            </a:r>
+            <a:endParaRPr sz="1800">
+              <a:solidFill>
+                <a:srgbClr val="1E1E1E"/>
+              </a:solidFill>
+              <a:latin typeface="Google Sans"/>
+              <a:ea typeface="Google Sans"/>
+              <a:cs typeface="Google Sans"/>
+              <a:sym typeface="Google Sans"/>
+            </a:endParaRPr>
+          </a:p>
+          <a:p>
+            <a:pPr indent="-342900" lvl="0" marL="457200" rtl="0" algn="l">
+              <a:spcBef>
+                <a:spcPts val="1200"/>
+              </a:spcBef>
+              <a:spcAft>
+                <a:spcPts val="0"/>
+              </a:spcAft>
+              <a:buClr>
+                <a:srgbClr val="1E1E1E"/>
+              </a:buClr>
+              <a:buSzPts val="1800"/>
+              <a:buFont typeface="Google Sans"/>
+              <a:buChar char="●"/>
+            </a:pPr>
+            <a:r>
+              <a:rPr lang="en" sz="1800">
+                <a:solidFill>
+                  <a:srgbClr val="1E1E1E"/>
+                </a:solidFill>
+                <a:latin typeface="Google Sans"/>
+                <a:ea typeface="Google Sans"/>
+                <a:cs typeface="Google Sans"/>
+                <a:sym typeface="Google Sans"/>
+              </a:rPr>
+              <a:t>PDF resume parsing</a:t>
+            </a:r>
+            <a:endParaRPr sz="1800">
+              <a:solidFill>
+                <a:srgbClr val="1E1E1E"/>
+              </a:solidFill>
+              <a:latin typeface="Google Sans"/>
+              <a:ea typeface="Google Sans"/>
+              <a:cs typeface="Google Sans"/>
+              <a:sym typeface="Google Sans"/>
+            </a:endParaRPr>
+          </a:p>
+          <a:p>
+            <a:pPr indent="-342900" lvl="0" marL="457200" rtl="0" algn="l">
+              <a:spcBef>
+                <a:spcPts val="1200"/>
+              </a:spcBef>
+              <a:spcAft>
+                <a:spcPts val="0"/>
+              </a:spcAft>
+              <a:buClr>
+                <a:srgbClr val="1E1E1E"/>
+              </a:buClr>
+              <a:buSzPts val="1800"/>
+              <a:buFont typeface="Google Sans"/>
+              <a:buChar char="●"/>
+            </a:pPr>
+            <a:r>
+              <a:rPr lang="en" sz="1800">
+                <a:solidFill>
+                  <a:srgbClr val="1E1E1E"/>
+                </a:solidFill>
+                <a:latin typeface="Google Sans"/>
+                <a:ea typeface="Google Sans"/>
+                <a:cs typeface="Google Sans"/>
+                <a:sym typeface="Google Sans"/>
+              </a:rPr>
+              <a:t>Cover letter generator</a:t>
+            </a:r>
+            <a:endParaRPr sz="1800">
+              <a:solidFill>
+                <a:srgbClr val="1E1E1E"/>
+              </a:solidFill>
+              <a:latin typeface="Google Sans"/>
+              <a:ea typeface="Google Sans"/>
+              <a:cs typeface="Google Sans"/>
+              <a:sym typeface="Google Sans"/>
+            </a:endParaRPr>
+          </a:p>
+          <a:p>
+            <a:pPr indent="-342900" lvl="0" marL="457200" rtl="0" algn="l">
+              <a:spcBef>
+                <a:spcPts val="1200"/>
+              </a:spcBef>
+              <a:spcAft>
+                <a:spcPts val="0"/>
+              </a:spcAft>
+              <a:buClr>
+                <a:srgbClr val="1E1E1E"/>
+              </a:buClr>
+              <a:buSzPts val="1800"/>
+              <a:buFont typeface="Google Sans"/>
+              <a:buChar char="●"/>
+            </a:pPr>
+            <a:r>
+              <a:rPr lang="en" sz="1800">
+                <a:solidFill>
+                  <a:srgbClr val="1E1E1E"/>
+                </a:solidFill>
+                <a:latin typeface="Google Sans"/>
+                <a:ea typeface="Google Sans"/>
+                <a:cs typeface="Google Sans"/>
+                <a:sym typeface="Google Sans"/>
+              </a:rPr>
+              <a:t>Interview question generator</a:t>
+            </a:r>
+            <a:endParaRPr sz="1800">
+              <a:solidFill>
+                <a:srgbClr val="1E1E1E"/>
+              </a:solidFill>
+              <a:latin typeface="Google Sans"/>
+              <a:ea typeface="Google Sans"/>
+              <a:cs typeface="Google Sans"/>
+              <a:sym typeface="Google Sans"/>
+            </a:endParaRPr>
+          </a:p>
+          <a:p>
+            <a:pPr indent="-342900" lvl="0" marL="457200" rtl="0" algn="l">
+              <a:spcBef>
+                <a:spcPts val="1200"/>
+              </a:spcBef>
+              <a:spcAft>
+                <a:spcPts val="1200"/>
+              </a:spcAft>
+              <a:buClr>
+                <a:srgbClr val="1E1E1E"/>
+              </a:buClr>
+              <a:buSzPts val="1800"/>
+              <a:buFont typeface="Google Sans"/>
+              <a:buChar char="●"/>
+            </a:pPr>
+            <a:r>
+              <a:rPr lang="en" sz="1800">
+                <a:solidFill>
+                  <a:srgbClr val="1E1E1E"/>
+                </a:solidFill>
+                <a:latin typeface="Google Sans"/>
+                <a:ea typeface="Google Sans"/>
+                <a:cs typeface="Google Sans"/>
+                <a:sym typeface="Google Sans"/>
+              </a:rPr>
+              <a:t>Application tracker</a:t>
+            </a:r>
+            <a:endParaRPr sz="1800">
+              <a:solidFill>
+                <a:srgbClr val="1E1E1E"/>
+              </a:solidFill>
+              <a:latin typeface="Google Sans"/>
+              <a:ea typeface="Google Sans"/>
+              <a:cs typeface="Google Sans"/>
+              <a:sym typeface="Google Sans"/>
+            </a:endParaRPr>
+          </a:p>
+        </p:txBody>
+      </p:sp>
+      <p:sp>
+        <p:nvSpPr>
+          <p:cNvPr id="288" name="Google Shape;288;p34"/>
+          <p:cNvSpPr txBox="1"/>
+          <p:nvPr/>
+        </p:nvSpPr>
+        <p:spPr>
+          <a:xfrm>
+            <a:off x="6492240" y="3566160"/>
+            <a:ext cx="2103000" cy="457200"/>
+          </a:xfrm>
+          <a:prstGeom prst="rect">
+            <a:avLst/>
+          </a:prstGeom>
+          <a:noFill/>
+          <a:ln>
+            <a:noFill/>
+          </a:ln>
+        </p:spPr>
+        <p:txBody>
+          <a:bodyPr anchorCtr="0" anchor="t" bIns="91425" lIns="91425" spcFirstLastPara="1" rIns="91425" wrap="square" tIns="91425">
+            <a:noAutofit/>
+          </a:bodyPr>
+          <a:lstStyle/>
+          <a:p>
+            <a:pPr indent="0" lvl="0" marL="0" rtl="0" algn="ctr">
+              <a:spcBef>
+                <a:spcPts val="0"/>
+              </a:spcBef>
+              <a:spcAft>
+                <a:spcPts val="0"/>
+              </a:spcAft>
+              <a:buNone/>
+            </a:pPr>
+            <a:r>
+              <a:rPr lang="en" sz="1600">
+                <a:solidFill>
+                  <a:srgbClr val="1E1E1E"/>
+                </a:solidFill>
+                <a:latin typeface="Google Sans"/>
+                <a:ea typeface="Google Sans"/>
+                <a:cs typeface="Google Sans"/>
+                <a:sym typeface="Google Sans"/>
+              </a:rPr>
+              <a:t>Starter repo</a:t>
+            </a:r>
+            <a:endParaRPr sz="1600">
+              <a:solidFill>
+                <a:srgbClr val="1E1E1E"/>
+              </a:solidFill>
+              <a:latin typeface="Google Sans"/>
+              <a:ea typeface="Google Sans"/>
+              <a:cs typeface="Google Sans"/>
+              <a:sym typeface="Google Sans"/>
+            </a:endParaRPr>
+          </a:p>
+        </p:txBody>
+      </p:sp>
+      <p:pic>
+        <p:nvPicPr>
+          <p:cNvPr id="289" name="Google Shape;289;p34"/>
+          <p:cNvPicPr preferRelativeResize="0"/>
+          <p:nvPr/>
+        </p:nvPicPr>
+        <p:blipFill>
+          <a:blip r:embed="rId3">
+            <a:alphaModFix/>
+          </a:blip>
+          <a:stretch>
+            <a:fillRect/>
+          </a:stretch>
+        </p:blipFill>
+        <p:spPr>
+          <a:xfrm>
+            <a:off x="6537960" y="1417320"/>
+            <a:ext cx="2011680" cy="2011680"/>
+          </a:xfrm>
+          <a:prstGeom prst="rect">
+            <a:avLst/>
+          </a:prstGeom>
+          <a:noFill/>
+          <a:ln>
+            <a:noFill/>
+          </a:ln>
+        </p:spPr>
+      </p:pic>
+    </p:spTree>
+  </p:cSld>
+  <p:clrMapOvr>
+    <a:masterClrMapping/>
+  </p:clrMapOvr>
+</p:sld>
+</file>
+
+<file path=ppt/slides/slide23.xml><?xml version="1.0" encoding="utf-8"?>
+<p:sld xmlns:a="http://schemas.openxmlformats.org/drawingml/2006/main" xmlns:r="http://schemas.openxmlformats.org/officeDocument/2006/relationships" xmlns:mc="http://schemas.openxmlformats.org/markup-compatibility/2006" xmlns:mv="urn:schemas-microsoft-com:mac:vml" xmlns:p="http://schemas.openxmlformats.org/presentationml/2006/main" xmlns:c="http://schemas.openxmlformats.org/drawingml/2006/chart" xmlns:dgm="http://schemas.openxmlformats.org/drawingml/2006/diagram" xmlns:o="urn:schemas-microsoft-com:office:office" xmlns:v="urn:schemas-microsoft-com:vml" xmlns:pvml="urn:schemas-microsoft-com:office:powerpoint" xmlns:com="http://schemas.openxmlformats.org/drawingml/2006/compatibility" xmlns:p14="http://schemas.microsoft.com/office/powerpoint/2010/main" xmlns:p15="http://schemas.microsoft.com/office/powerpoint/2012/main" xmlns:ahyp="http://schemas.microsoft.com/office/drawing/2018/hyperlinkcolor">
+  <p:cSld>
+    <p:bg>
+      <p:bgPr>
+        <a:solidFill>
+          <a:srgbClr val="FFFFFF"/>
+        </a:solidFill>
+      </p:bgPr>
+    </p:bg>
+    <p:spTree>
+      <p:nvGrpSpPr>
+        <p:cNvPr id="293" name="Shape 293"/>
+        <p:cNvGrpSpPr/>
+        <p:nvPr/>
+      </p:nvGrpSpPr>
+      <p:grpSpPr>
+        <a:xfrm>
+          <a:off x="0" y="0"/>
+          <a:ext cx="0" cy="0"/>
+          <a:chOff x="0" y="0"/>
+          <a:chExt cx="0" cy="0"/>
+        </a:xfrm>
+      </p:grpSpPr>
+      <p:sp>
+        <p:nvSpPr>
+          <p:cNvPr id="294" name="Google Shape;294;p35"/>
+          <p:cNvSpPr/>
+          <p:nvPr/>
+        </p:nvSpPr>
+        <p:spPr>
+          <a:xfrm>
+            <a:off x="411480" y="320040"/>
+            <a:ext cx="4000644" cy="566946"/>
+          </a:xfrm>
+          <a:prstGeom prst="flowChartTerminator">
+            <a:avLst/>
+          </a:prstGeom>
+          <a:solidFill>
+            <a:srgbClr val="FFFFFF"/>
+          </a:solidFill>
+          <a:ln cap="flat" cmpd="sng" w="19050">
+            <a:solidFill>
+              <a:srgbClr val="1E1E1E"/>
+            </a:solidFill>
+            <a:prstDash val="solid"/>
+            <a:round/>
+            <a:headEnd len="sm" w="sm" type="none"/>
+            <a:tailEnd len="sm" w="sm" type="none"/>
+          </a:ln>
+        </p:spPr>
+        <p:txBody>
+          <a:bodyPr anchorCtr="0" anchor="ctr" bIns="91425" lIns="91425" spcFirstLastPara="1" rIns="91425" wrap="square" tIns="91425">
+            <a:noAutofit/>
+          </a:bodyPr>
+          <a:lstStyle/>
+          <a:p>
+            <a:pPr indent="0" lvl="0" marL="0" rtl="0" algn="ctr">
+              <a:spcBef>
+                <a:spcPts val="0"/>
+              </a:spcBef>
+              <a:spcAft>
+                <a:spcPts val="0"/>
+              </a:spcAft>
+              <a:buNone/>
+            </a:pPr>
+            <a:r>
+              <a:rPr lang="en" sz="2400">
+                <a:solidFill>
+                  <a:srgbClr val="1E1E1E"/>
+                </a:solidFill>
+                <a:latin typeface="Google Sans"/>
+                <a:ea typeface="Google Sans"/>
+                <a:cs typeface="Google Sans"/>
+                <a:sym typeface="Google Sans"/>
+              </a:rPr>
+              <a:t>Demo Builds to Fork</a:t>
+            </a:r>
+            <a:endParaRPr sz="2400">
+              <a:solidFill>
+                <a:srgbClr val="1E1E1E"/>
+              </a:solidFill>
+              <a:latin typeface="Google Sans"/>
+              <a:ea typeface="Google Sans"/>
+              <a:cs typeface="Google Sans"/>
+              <a:sym typeface="Google Sans"/>
+            </a:endParaRPr>
+          </a:p>
+        </p:txBody>
+      </p:sp>
+      <p:sp>
+        <p:nvSpPr>
+          <p:cNvPr id="295" name="Google Shape;295;p35"/>
+          <p:cNvSpPr/>
+          <p:nvPr/>
+        </p:nvSpPr>
+        <p:spPr>
+          <a:xfrm>
+            <a:off x="7086600" y="393192"/>
+            <a:ext cx="1645920" cy="420606"/>
+          </a:xfrm>
+          <a:prstGeom prst="flowChartTerminator">
+            <a:avLst/>
+          </a:prstGeom>
+          <a:solidFill>
+            <a:srgbClr val="F9AB00"/>
+          </a:solidFill>
+          <a:ln cap="flat" cmpd="sng" w="19050">
+            <a:solidFill>
+              <a:srgbClr val="1E1E1E"/>
+            </a:solidFill>
+            <a:prstDash val="solid"/>
+            <a:round/>
+            <a:headEnd len="sm" w="sm" type="none"/>
+            <a:tailEnd len="sm" w="sm" type="none"/>
+          </a:ln>
+        </p:spPr>
+        <p:txBody>
+          <a:bodyPr anchorCtr="0" anchor="ctr" bIns="91425" lIns="91425" spcFirstLastPara="1" rIns="91425" wrap="square" tIns="91425">
+            <a:noAutofit/>
+          </a:bodyPr>
+          <a:lstStyle/>
+          <a:p>
+            <a:pPr indent="0" lvl="0" marL="0" rtl="0" algn="ctr">
+              <a:spcBef>
+                <a:spcPts val="0"/>
+              </a:spcBef>
+              <a:spcAft>
+                <a:spcPts val="0"/>
+              </a:spcAft>
+              <a:buNone/>
+            </a:pPr>
+            <a:r>
+              <a:rPr lang="en">
+                <a:solidFill>
+                  <a:srgbClr val="1E1E1E"/>
+                </a:solidFill>
+                <a:latin typeface="Google Sans"/>
+                <a:ea typeface="Google Sans"/>
+                <a:cs typeface="Google Sans"/>
+                <a:sym typeface="Google Sans"/>
+              </a:rPr>
+              <a:t>Demo repos</a:t>
+            </a:r>
+            <a:endParaRPr>
+              <a:solidFill>
+                <a:srgbClr val="1E1E1E"/>
+              </a:solidFill>
+              <a:latin typeface="Google Sans"/>
+              <a:ea typeface="Google Sans"/>
+              <a:cs typeface="Google Sans"/>
+              <a:sym typeface="Google Sans"/>
+            </a:endParaRPr>
+          </a:p>
+        </p:txBody>
+      </p:sp>
+      <p:sp>
+        <p:nvSpPr>
+          <p:cNvPr id="296" name="Google Shape;296;p35"/>
+          <p:cNvSpPr/>
+          <p:nvPr/>
+        </p:nvSpPr>
+        <p:spPr>
+          <a:xfrm>
+            <a:off x="411480" y="1097280"/>
+            <a:ext cx="5715000" cy="3612000"/>
+          </a:xfrm>
+          <a:prstGeom prst="roundRect">
+            <a:avLst>
+              <a:gd fmla="val 16667" name="adj"/>
+            </a:avLst>
+          </a:prstGeom>
+          <a:solidFill>
+            <a:srgbClr val="FFE79C"/>
+          </a:solidFill>
+          <a:ln cap="flat" cmpd="sng" w="19050">
+            <a:solidFill>
+              <a:srgbClr val="1E1E1E"/>
+            </a:solidFill>
+            <a:prstDash val="solid"/>
+            <a:round/>
+            <a:headEnd len="sm" w="sm" type="none"/>
+            <a:tailEnd len="sm" w="sm" type="none"/>
+          </a:ln>
+        </p:spPr>
+        <p:txBody>
+          <a:bodyPr anchorCtr="0" anchor="ctr" bIns="91425" lIns="91425" spcFirstLastPara="1" rIns="91425" wrap="square" tIns="91425">
+            <a:noAutofit/>
+          </a:bodyPr>
+          <a:lstStyle/>
+          <a:p>
+            <a:pPr indent="0" lvl="0" marL="0" rtl="0" algn="ctr">
+              <a:spcBef>
+                <a:spcPts val="0"/>
+              </a:spcBef>
+              <a:spcAft>
+                <a:spcPts val="0"/>
+              </a:spcAft>
+              <a:buNone/>
+            </a:pPr>
+            <a:r>
+              <a:t/>
+            </a:r>
+            <a:endParaRPr/>
+          </a:p>
+        </p:txBody>
+      </p:sp>
+      <p:sp>
+        <p:nvSpPr>
+          <p:cNvPr id="297" name="Google Shape;297;p35"/>
+          <p:cNvSpPr/>
+          <p:nvPr/>
+        </p:nvSpPr>
+        <p:spPr>
+          <a:xfrm>
+            <a:off x="6355080" y="1097280"/>
+            <a:ext cx="2377500" cy="3612000"/>
+          </a:xfrm>
+          <a:prstGeom prst="roundRect">
+            <a:avLst>
+              <a:gd fmla="val 16667" name="adj"/>
+            </a:avLst>
+          </a:prstGeom>
+          <a:solidFill>
+            <a:srgbClr val="FFFFFF"/>
+          </a:solidFill>
+          <a:ln cap="flat" cmpd="sng" w="19050">
+            <a:solidFill>
+              <a:srgbClr val="1E1E1E"/>
+            </a:solidFill>
+            <a:prstDash val="solid"/>
+            <a:round/>
+            <a:headEnd len="sm" w="sm" type="none"/>
+            <a:tailEnd len="sm" w="sm" type="none"/>
+          </a:ln>
+        </p:spPr>
+        <p:txBody>
+          <a:bodyPr anchorCtr="0" anchor="ctr" bIns="91425" lIns="91425" spcFirstLastPara="1" rIns="91425" wrap="square" tIns="91425">
+            <a:noAutofit/>
+          </a:bodyPr>
+          <a:lstStyle/>
+          <a:p>
+            <a:pPr indent="0" lvl="0" marL="0" rtl="0" algn="ctr">
+              <a:spcBef>
+                <a:spcPts val="0"/>
+              </a:spcBef>
+              <a:spcAft>
+                <a:spcPts val="0"/>
+              </a:spcAft>
+              <a:buNone/>
+            </a:pPr>
+            <a:r>
+              <a:t/>
+            </a:r>
+            <a:endParaRPr/>
+          </a:p>
+        </p:txBody>
+      </p:sp>
+      <p:sp>
+        <p:nvSpPr>
+          <p:cNvPr id="298" name="Google Shape;298;p35"/>
+          <p:cNvSpPr txBox="1"/>
+          <p:nvPr/>
+        </p:nvSpPr>
+        <p:spPr>
+          <a:xfrm>
+            <a:off x="731520" y="1463040"/>
+            <a:ext cx="5120700" cy="3108900"/>
+          </a:xfrm>
+          <a:prstGeom prst="rect">
+            <a:avLst/>
+          </a:prstGeom>
+          <a:noFill/>
+          <a:ln>
+            <a:noFill/>
+          </a:ln>
+        </p:spPr>
+        <p:txBody>
+          <a:bodyPr anchorCtr="0" anchor="t" bIns="91425" lIns="91425" spcFirstLastPara="1" rIns="91425" wrap="square" tIns="91425">
+            <a:noAutofit/>
+          </a:bodyPr>
+          <a:lstStyle/>
+          <a:p>
+            <a:pPr indent="-342900" lvl="0" marL="457200" rtl="0" algn="l">
+              <a:spcBef>
+                <a:spcPts val="0"/>
+              </a:spcBef>
+              <a:spcAft>
+                <a:spcPts val="0"/>
+              </a:spcAft>
+              <a:buClr>
+                <a:srgbClr val="1E1E1E"/>
+              </a:buClr>
+              <a:buSzPts val="1800"/>
+              <a:buFont typeface="Google Sans"/>
+              <a:buChar char="●"/>
+            </a:pPr>
+            <a:r>
+              <a:rPr lang="en" sz="1800" u="sng">
+                <a:solidFill>
+                  <a:schemeClr val="hlink"/>
+                </a:solidFill>
+                <a:latin typeface="Google Sans"/>
+                <a:ea typeface="Google Sans"/>
+                <a:cs typeface="Google Sans"/>
+                <a:sym typeface="Google Sans"/>
+                <a:hlinkClick r:id="rId3"/>
+              </a:rPr>
+              <a:t>codejam</a:t>
+            </a:r>
+            <a:r>
+              <a:rPr lang="en" sz="1800">
+                <a:solidFill>
+                  <a:srgbClr val="1E1E1E"/>
+                </a:solidFill>
+                <a:latin typeface="Google Sans"/>
+                <a:ea typeface="Google Sans"/>
+                <a:cs typeface="Google Sans"/>
+                <a:sym typeface="Google Sans"/>
+              </a:rPr>
+              <a:t>: the finished build from the starter repo</a:t>
+            </a:r>
+            <a:endParaRPr sz="1800">
+              <a:solidFill>
+                <a:srgbClr val="1E1E1E"/>
+              </a:solidFill>
+              <a:latin typeface="Google Sans"/>
+              <a:ea typeface="Google Sans"/>
+              <a:cs typeface="Google Sans"/>
+              <a:sym typeface="Google Sans"/>
+            </a:endParaRPr>
+          </a:p>
+          <a:p>
+            <a:pPr indent="-342900" lvl="0" marL="457200" rtl="0" algn="l">
+              <a:spcBef>
+                <a:spcPts val="1200"/>
+              </a:spcBef>
+              <a:spcAft>
+                <a:spcPts val="0"/>
+              </a:spcAft>
+              <a:buClr>
+                <a:srgbClr val="1E1E1E"/>
+              </a:buClr>
+              <a:buSzPts val="1800"/>
+              <a:buFont typeface="Google Sans"/>
+              <a:buChar char="●"/>
+            </a:pPr>
+            <a:r>
+              <a:rPr lang="en" sz="1800" u="sng">
+                <a:solidFill>
+                  <a:schemeClr val="hlink"/>
+                </a:solidFill>
+                <a:latin typeface="Google Sans"/>
+                <a:ea typeface="Google Sans"/>
+                <a:cs typeface="Google Sans"/>
+                <a:sym typeface="Google Sans"/>
+                <a:hlinkClick r:id="rId4"/>
+              </a:rPr>
+              <a:t>codejam-claude</a:t>
+            </a:r>
+            <a:r>
+              <a:rPr lang="en" sz="1800">
+                <a:solidFill>
+                  <a:srgbClr val="1E1E1E"/>
+                </a:solidFill>
+                <a:latin typeface="Google Sans"/>
+                <a:ea typeface="Google Sans"/>
+                <a:cs typeface="Google Sans"/>
+                <a:sym typeface="Google Sans"/>
+              </a:rPr>
+              <a:t>: the same app, set up for Claude Code</a:t>
+            </a:r>
+            <a:endParaRPr sz="1800">
+              <a:solidFill>
+                <a:srgbClr val="1E1E1E"/>
+              </a:solidFill>
+              <a:latin typeface="Google Sans"/>
+              <a:ea typeface="Google Sans"/>
+              <a:cs typeface="Google Sans"/>
+              <a:sym typeface="Google Sans"/>
+            </a:endParaRPr>
+          </a:p>
+          <a:p>
+            <a:pPr indent="-342900" lvl="0" marL="457200" rtl="0" algn="l">
+              <a:spcBef>
+                <a:spcPts val="1200"/>
+              </a:spcBef>
+              <a:spcAft>
+                <a:spcPts val="0"/>
+              </a:spcAft>
+              <a:buClr>
+                <a:srgbClr val="1E1E1E"/>
+              </a:buClr>
+              <a:buSzPts val="1800"/>
+              <a:buFont typeface="Google Sans"/>
+              <a:buChar char="●"/>
+            </a:pPr>
+            <a:r>
+              <a:rPr lang="en" sz="1800">
+                <a:solidFill>
+                  <a:srgbClr val="1E1E1E"/>
+                </a:solidFill>
+                <a:latin typeface="Google Sans"/>
+                <a:ea typeface="Google Sans"/>
+                <a:cs typeface="Google Sans"/>
+                <a:sym typeface="Google Sans"/>
+              </a:rPr>
+              <a:t>FastAPI and Gemini backend, plain JavaScript front end</a:t>
+            </a:r>
+            <a:endParaRPr sz="1800">
+              <a:solidFill>
+                <a:srgbClr val="1E1E1E"/>
+              </a:solidFill>
+              <a:latin typeface="Google Sans"/>
+              <a:ea typeface="Google Sans"/>
+              <a:cs typeface="Google Sans"/>
+              <a:sym typeface="Google Sans"/>
+            </a:endParaRPr>
+          </a:p>
+          <a:p>
+            <a:pPr indent="-342900" lvl="0" marL="457200" rtl="0" algn="l">
+              <a:spcBef>
+                <a:spcPts val="1200"/>
+              </a:spcBef>
+              <a:spcAft>
+                <a:spcPts val="1200"/>
+              </a:spcAft>
+              <a:buClr>
+                <a:srgbClr val="1E1E1E"/>
+              </a:buClr>
+              <a:buSzPts val="1800"/>
+              <a:buFont typeface="Google Sans"/>
+              <a:buChar char="●"/>
+            </a:pPr>
+            <a:r>
+              <a:rPr lang="en" sz="1800">
+                <a:solidFill>
+                  <a:srgbClr val="1E1E1E"/>
+                </a:solidFill>
+                <a:latin typeface="Google Sans"/>
+                <a:ea typeface="Google Sans"/>
+                <a:cs typeface="Google Sans"/>
+                <a:sym typeface="Google Sans"/>
+              </a:rPr>
+              <a:t>Both at github.com/xbill9, with design docs and tests</a:t>
+            </a:r>
+            <a:endParaRPr sz="1800">
+              <a:solidFill>
+                <a:srgbClr val="1E1E1E"/>
+              </a:solidFill>
+              <a:latin typeface="Google Sans"/>
+              <a:ea typeface="Google Sans"/>
+              <a:cs typeface="Google Sans"/>
+              <a:sym typeface="Google Sans"/>
+            </a:endParaRPr>
+          </a:p>
+        </p:txBody>
+      </p:sp>
+      <p:sp>
+        <p:nvSpPr>
+          <p:cNvPr id="299" name="Google Shape;299;p35"/>
+          <p:cNvSpPr txBox="1"/>
+          <p:nvPr/>
+        </p:nvSpPr>
+        <p:spPr>
+          <a:xfrm>
+            <a:off x="6492240" y="3566160"/>
+            <a:ext cx="2103000" cy="457200"/>
+          </a:xfrm>
+          <a:prstGeom prst="rect">
+            <a:avLst/>
+          </a:prstGeom>
+          <a:noFill/>
+          <a:ln>
+            <a:noFill/>
+          </a:ln>
+        </p:spPr>
+        <p:txBody>
+          <a:bodyPr anchorCtr="0" anchor="t" bIns="91425" lIns="91425" spcFirstLastPara="1" rIns="91425" wrap="square" tIns="91425">
+            <a:noAutofit/>
+          </a:bodyPr>
+          <a:lstStyle/>
+          <a:p>
+            <a:pPr indent="0" lvl="0" marL="0" rtl="0" algn="ctr">
+              <a:spcBef>
+                <a:spcPts val="0"/>
+              </a:spcBef>
+              <a:spcAft>
+                <a:spcPts val="0"/>
+              </a:spcAft>
+              <a:buNone/>
+            </a:pPr>
+            <a:r>
+              <a:rPr lang="en" sz="1600">
+                <a:solidFill>
+                  <a:srgbClr val="1E1E1E"/>
+                </a:solidFill>
+                <a:latin typeface="Google Sans"/>
+                <a:ea typeface="Google Sans"/>
+                <a:cs typeface="Google Sans"/>
+                <a:sym typeface="Google Sans"/>
+              </a:rPr>
+              <a:t>My GitHub</a:t>
+            </a:r>
+            <a:endParaRPr sz="1600">
+              <a:solidFill>
+                <a:srgbClr val="1E1E1E"/>
+              </a:solidFill>
+              <a:latin typeface="Google Sans"/>
+              <a:ea typeface="Google Sans"/>
+              <a:cs typeface="Google Sans"/>
+              <a:sym typeface="Google Sans"/>
+            </a:endParaRPr>
+          </a:p>
+        </p:txBody>
+      </p:sp>
+      <p:pic>
+        <p:nvPicPr>
+          <p:cNvPr id="300" name="Google Shape;300;p35"/>
           <p:cNvPicPr preferRelativeResize="0"/>
           <p:nvPr/>
         </p:nvPicPr>
@@ -13897,8 +16235,8 @@
         </p:blipFill>
         <p:spPr>
           <a:xfrm>
-            <a:off x="6700000" y="1150000"/>
-            <a:ext cx="1900000" cy="1900000"/>
+            <a:off x="6537960" y="1417320"/>
+            <a:ext cx="2011680" cy="2011680"/>
           </a:xfrm>
           <a:prstGeom prst="rect">
             <a:avLst/>
@@ -13929,7 +16267,7 @@
     </p:bg>
     <p:spTree>
       <p:nvGrpSpPr>
-        <p:cNvPr id="74" name="Shape 74"/>
+        <p:cNvPr id="75" name="Shape 75"/>
         <p:cNvGrpSpPr/>
         <p:nvPr/>
       </p:nvGrpSpPr>
@@ -13943,146 +16281,14 @@
       </p:grpSpPr>
       <p:sp>
         <p:nvSpPr>
-          <p:cNvPr id="75" name="Google Shape;75;p15"/>
-          <p:cNvSpPr/>
-          <p:nvPr/>
-        </p:nvSpPr>
-        <p:spPr>
-          <a:xfrm>
-            <a:off x="411480" y="320040"/>
-            <a:ext cx="5920722" cy="566946"/>
-          </a:xfrm>
-          <a:prstGeom prst="flowChartTerminator">
-            <a:avLst/>
-          </a:prstGeom>
-          <a:solidFill>
-            <a:srgbClr val="FFFFFF"/>
-          </a:solidFill>
-          <a:ln cap="flat" cmpd="sng" w="19050">
-            <a:solidFill>
-              <a:srgbClr val="1E1E1E"/>
-            </a:solidFill>
-            <a:prstDash val="solid"/>
-            <a:round/>
-            <a:headEnd len="sm" w="sm" type="none"/>
-            <a:tailEnd len="sm" w="sm" type="none"/>
-          </a:ln>
-        </p:spPr>
-        <p:txBody>
-          <a:bodyPr anchorCtr="0" anchor="ctr" bIns="91425" lIns="91425" spcFirstLastPara="1" rIns="91425" wrap="square" tIns="91425">
-            <a:noAutofit/>
-          </a:bodyPr>
-          <a:lstStyle/>
-          <a:p>
-            <a:pPr indent="0" lvl="0" marL="0" rtl="0" algn="ctr">
-              <a:spcBef>
-                <a:spcPts val="0"/>
-              </a:spcBef>
-              <a:spcAft>
-                <a:spcPts val="0"/>
-              </a:spcAft>
-              <a:buNone/>
-            </a:pPr>
-            <a:r>
-              <a:rPr lang="en" sz="2400">
-                <a:solidFill>
-                  <a:srgbClr val="1E1E1E"/>
-                </a:solidFill>
-                <a:latin typeface="Google Sans"/>
-                <a:ea typeface="Google Sans"/>
-                <a:cs typeface="Google Sans"/>
-                <a:sym typeface="Google Sans"/>
-              </a:rPr>
-              <a:t>What You're Building: BulletProof</a:t>
-            </a:r>
-            <a:endParaRPr sz="2400">
-              <a:solidFill>
-                <a:srgbClr val="1E1E1E"/>
-              </a:solidFill>
-              <a:latin typeface="Google Sans"/>
-              <a:ea typeface="Google Sans"/>
-              <a:cs typeface="Google Sans"/>
-              <a:sym typeface="Google Sans"/>
-            </a:endParaRPr>
-          </a:p>
-        </p:txBody>
-      </p:sp>
-      <p:sp>
-        <p:nvSpPr>
           <p:cNvPr id="76" name="Google Shape;76;p15"/>
           <p:cNvSpPr/>
           <p:nvPr/>
         </p:nvSpPr>
         <p:spPr>
           <a:xfrm>
-            <a:off x="7086600" y="393192"/>
-            <a:ext cx="1645920" cy="420606"/>
-          </a:xfrm>
-          <a:prstGeom prst="flowChartTerminator">
-            <a:avLst/>
-          </a:prstGeom>
-          <a:solidFill>
-            <a:srgbClr val="4285F4"/>
-          </a:solidFill>
-          <a:ln cap="flat" cmpd="sng" w="19050">
-            <a:solidFill>
-              <a:srgbClr val="1E1E1E"/>
-            </a:solidFill>
-            <a:prstDash val="solid"/>
-            <a:round/>
-            <a:headEnd len="sm" w="sm" type="none"/>
-            <a:tailEnd len="sm" w="sm" type="none"/>
-          </a:ln>
-        </p:spPr>
-        <p:txBody>
-          <a:bodyPr anchorCtr="0" anchor="ctr" bIns="91425" lIns="91425" spcFirstLastPara="1" rIns="91425" wrap="square" tIns="91425">
-            <a:noAutofit/>
-          </a:bodyPr>
-          <a:lstStyle/>
-          <a:p>
-            <a:pPr indent="0" lvl="0" marL="0" rtl="0" algn="ctr">
-              <a:spcBef>
-                <a:spcPts val="0"/>
-              </a:spcBef>
-              <a:spcAft>
-                <a:spcPts val="0"/>
-              </a:spcAft>
-              <a:buNone/>
-            </a:pPr>
-            <a:r>
-              <a:rPr lang="en">
-                <a:solidFill>
-                  <a:srgbClr val="FFFFFF"/>
-                </a:solidFill>
-                <a:latin typeface="Google Sans"/>
-                <a:ea typeface="Google Sans"/>
-                <a:cs typeface="Google Sans"/>
-                <a:sym typeface="Google Sans"/>
-              </a:rPr>
-              <a:t>The brief</a:t>
-            </a:r>
-            <a:endParaRPr>
-              <a:solidFill>
-                <a:srgbClr val="FFFFFF"/>
-              </a:solidFill>
-              <a:latin typeface="Google Sans"/>
-              <a:ea typeface="Google Sans"/>
-              <a:cs typeface="Google Sans"/>
-              <a:sym typeface="Google Sans"/>
-            </a:endParaRPr>
-          </a:p>
-        </p:txBody>
-      </p:sp>
-      <p:sp>
-        <p:nvSpPr>
-          <p:cNvPr id="77" name="Google Shape;77;p15"/>
-          <p:cNvSpPr/>
-          <p:nvPr/>
-        </p:nvSpPr>
-        <p:spPr>
-          <a:xfrm>
-            <a:off x="411480" y="1097280"/>
-            <a:ext cx="5715000" cy="3612000"/>
+            <a:off x="365760" y="320040"/>
+            <a:ext cx="8412600" cy="4526400"/>
           </a:xfrm>
           <a:prstGeom prst="roundRect">
             <a:avLst>
@@ -14126,65 +16332,14 @@
       </p:sp>
       <p:sp>
         <p:nvSpPr>
-          <p:cNvPr id="78" name="Google Shape;78;p15"/>
-          <p:cNvSpPr/>
-          <p:nvPr/>
-        </p:nvSpPr>
-        <p:spPr>
-          <a:xfrm>
-            <a:off x="6355080" y="1097280"/>
-            <a:ext cx="2377500" cy="3612000"/>
-          </a:xfrm>
-          <a:prstGeom prst="roundRect">
-            <a:avLst>
-              <a:gd fmla="val 16667" name="adj"/>
-            </a:avLst>
-          </a:prstGeom>
-          <a:solidFill>
-            <a:srgbClr val="FFFFFF"/>
-          </a:solidFill>
-          <a:ln cap="flat" cmpd="sng" w="19050">
-            <a:solidFill>
-              <a:srgbClr val="1E1E1E"/>
-            </a:solidFill>
-            <a:prstDash val="solid"/>
-            <a:round/>
-            <a:headEnd len="sm" w="sm" type="none"/>
-            <a:tailEnd len="sm" w="sm" type="none"/>
-          </a:ln>
-        </p:spPr>
-        <p:txBody>
-          <a:bodyPr anchorCtr="0" anchor="ctr" bIns="91425" lIns="91425" spcFirstLastPara="1" rIns="91425" wrap="square" tIns="91425">
-            <a:noAutofit/>
-          </a:bodyPr>
-          <a:lstStyle/>
-          <a:p>
-            <a:pPr indent="0" lvl="0" marL="0" rtl="0" algn="ctr">
-              <a:spcBef>
-                <a:spcPts val="0"/>
-              </a:spcBef>
-              <a:spcAft>
-                <a:spcPts val="0"/>
-              </a:spcAft>
-              <a:buNone/>
-            </a:pPr>
-            <a:r>
-              <a:t/>
-            </a:r>
-            <a:endParaRPr/>
-          </a:p>
-        </p:txBody>
-      </p:sp>
-      <p:sp>
-        <p:nvSpPr>
-          <p:cNvPr id="79" name="Google Shape;79;p15"/>
+          <p:cNvPr id="77" name="Google Shape;77;p15"/>
           <p:cNvSpPr txBox="1"/>
           <p:nvPr/>
         </p:nvSpPr>
         <p:spPr>
           <a:xfrm>
-            <a:off x="731520" y="1463040"/>
-            <a:ext cx="5120700" cy="3108900"/>
+            <a:off x="777240" y="502920"/>
+            <a:ext cx="7589400" cy="3749100"/>
           </a:xfrm>
           <a:prstGeom prst="rect">
             <a:avLst/>
@@ -14200,22 +16355,17 @@
           </a:bodyPr>
           <a:lstStyle/>
           <a:p>
-            <a:pPr indent="-342900" lvl="0" marL="457200" rtl="0" algn="l">
-              <a:spcBef>
-                <a:spcPts val="0"/>
-              </a:spcBef>
-              <a:spcAft>
-                <a:spcPts val="0"/>
-              </a:spcAft>
-              <a:buClr>
-                <a:srgbClr val="1E1E1E"/>
-              </a:buClr>
-              <a:buSzPts val="1800"/>
-              <a:buFont typeface="Google Sans"/>
-              <a:buChar char="●"/>
-            </a:pPr>
-            <a:r>
-              <a:rPr lang="en" sz="1800">
+            <a:pPr indent="0" lvl="0" marL="0" rtl="0" algn="l">
+              <a:spcBef>
+                <a:spcPts val="0"/>
+              </a:spcBef>
+              <a:spcAft>
+                <a:spcPts val="0"/>
+              </a:spcAft>
+              <a:buNone/>
+            </a:pPr>
+            <a:r>
+              <a:rPr lang="en" sz="2800">
                 <a:solidFill>
                   <a:srgbClr val="1E1E1E"/>
                 </a:solidFill>
@@ -14224,9 +16374,9 @@
                 <a:cs typeface="Google Sans"/>
                 <a:sym typeface="Google Sans"/>
               </a:rPr>
-              <a:t>Paste a resume and a job posting</a:t>
-            </a:r>
-            <a:endParaRPr sz="1800">
+              <a:t>Where to Find Me</a:t>
+            </a:r>
+            <a:endParaRPr sz="2800">
               <a:solidFill>
                 <a:srgbClr val="1E1E1E"/>
               </a:solidFill>
@@ -14237,22 +16387,17 @@
             </a:endParaRPr>
           </a:p>
           <a:p>
-            <a:pPr indent="-342900" lvl="0" marL="457200" rtl="0" algn="l">
+            <a:pPr indent="0" lvl="0" marL="0" rtl="0" algn="l">
               <a:spcBef>
                 <a:spcPts val="1200"/>
               </a:spcBef>
               <a:spcAft>
                 <a:spcPts val="0"/>
               </a:spcAft>
-              <a:buClr>
-                <a:srgbClr val="1E1E1E"/>
-              </a:buClr>
-              <a:buSzPts val="1800"/>
-              <a:buFont typeface="Google Sans"/>
-              <a:buChar char="●"/>
-            </a:pPr>
-            <a:r>
-              <a:rPr lang="en" sz="1800">
+              <a:buNone/>
+            </a:pPr>
+            <a:r>
+              <a:rPr lang="en" sz="2000">
                 <a:solidFill>
                   <a:srgbClr val="1E1E1E"/>
                 </a:solidFill>
@@ -14261,9 +16406,9 @@
                 <a:cs typeface="Google Sans"/>
                 <a:sym typeface="Google Sans"/>
               </a:rPr>
-              <a:t>Click one button</a:t>
-            </a:r>
-            <a:endParaRPr sz="1800">
+              <a:t>LinkedIn  linkedin.com/in/xbill</a:t>
+            </a:r>
+            <a:endParaRPr sz="2000">
               <a:solidFill>
                 <a:srgbClr val="1E1E1E"/>
               </a:solidFill>
@@ -14274,22 +16419,17 @@
             </a:endParaRPr>
           </a:p>
           <a:p>
-            <a:pPr indent="-342900" lvl="0" marL="457200" rtl="0" algn="l">
+            <a:pPr indent="0" lvl="0" marL="0" rtl="0" algn="l">
               <a:spcBef>
                 <a:spcPts val="1200"/>
               </a:spcBef>
               <a:spcAft>
                 <a:spcPts val="0"/>
               </a:spcAft>
-              <a:buClr>
-                <a:srgbClr val="1E1E1E"/>
-              </a:buClr>
-              <a:buSzPts val="1800"/>
-              <a:buFont typeface="Google Sans"/>
-              <a:buChar char="●"/>
-            </a:pPr>
-            <a:r>
-              <a:rPr lang="en" sz="1800">
+              <a:buNone/>
+            </a:pPr>
+            <a:r>
+              <a:rPr lang="en" sz="2000">
                 <a:solidFill>
                   <a:srgbClr val="1E1E1E"/>
                 </a:solidFill>
@@ -14298,9 +16438,9 @@
                 <a:cs typeface="Google Sans"/>
                 <a:sym typeface="Google Sans"/>
               </a:rPr>
-              <a:t>Copy tailored resume bullets</a:t>
-            </a:r>
-            <a:endParaRPr sz="1800">
+              <a:t>Dev.to  dev.to/xbill</a:t>
+            </a:r>
+            <a:endParaRPr sz="2000">
               <a:solidFill>
                 <a:srgbClr val="1E1E1E"/>
               </a:solidFill>
@@ -14311,22 +16451,17 @@
             </a:endParaRPr>
           </a:p>
           <a:p>
-            <a:pPr indent="-342900" lvl="0" marL="457200" rtl="0" algn="l">
+            <a:pPr indent="0" lvl="0" marL="0" rtl="0" algn="l">
               <a:spcBef>
                 <a:spcPts val="1200"/>
               </a:spcBef>
               <a:spcAft>
-                <a:spcPts val="1200"/>
-              </a:spcAft>
-              <a:buClr>
-                <a:srgbClr val="1E1E1E"/>
-              </a:buClr>
-              <a:buSzPts val="1800"/>
-              <a:buFont typeface="Google Sans"/>
-              <a:buChar char="●"/>
-            </a:pPr>
-            <a:r>
-              <a:rPr lang="en" sz="1800">
+                <a:spcPts val="0"/>
+              </a:spcAft>
+              <a:buNone/>
+            </a:pPr>
+            <a:r>
+              <a:rPr lang="en" sz="2000">
                 <a:solidFill>
                   <a:srgbClr val="1E1E1E"/>
                 </a:solidFill>
@@ -14335,9 +16470,9 @@
                 <a:cs typeface="Google Sans"/>
                 <a:sym typeface="Google Sans"/>
               </a:rPr>
-              <a:t>Out of scope today: PDF parsing, cover letters, export</a:t>
-            </a:r>
-            <a:endParaRPr sz="1800">
+              <a:t>Medium  medium.com/@xbill999</a:t>
+            </a:r>
+            <a:endParaRPr sz="2000">
               <a:solidFill>
                 <a:srgbClr val="1E1E1E"/>
               </a:solidFill>
@@ -14347,72 +16482,18 @@
               <a:sym typeface="Google Sans"/>
             </a:endParaRPr>
           </a:p>
-        </p:txBody>
-      </p:sp>
-      <p:pic>
-        <p:nvPicPr>
-          <p:cNvPr id="80" name="Google Shape;80;p15"/>
-          <p:cNvPicPr preferRelativeResize="0"/>
-          <p:nvPr/>
-        </p:nvPicPr>
-        <p:blipFill>
-          <a:blip r:embed="rId3">
-            <a:alphaModFix/>
-          </a:blip>
-          <a:stretch>
-            <a:fillRect/>
-          </a:stretch>
-        </p:blipFill>
-        <p:spPr>
-          <a:xfrm>
-            <a:off x="6537960" y="1417320"/>
-            <a:ext cx="2011680" cy="2011680"/>
-          </a:xfrm>
-          <a:prstGeom prst="rect">
-            <a:avLst/>
-          </a:prstGeom>
-          <a:noFill/>
-          <a:ln>
-            <a:noFill/>
-          </a:ln>
-        </p:spPr>
-      </p:pic>
-      <p:sp>
-        <p:nvSpPr>
-          <p:cNvPr id="81" name="Google Shape;81;p15"/>
-          <p:cNvSpPr txBox="1"/>
-          <p:nvPr/>
-        </p:nvSpPr>
-        <p:spPr>
-          <a:xfrm>
-            <a:off x="6492240" y="3566160"/>
-            <a:ext cx="2103000" cy="457200"/>
-          </a:xfrm>
-          <a:prstGeom prst="rect">
-            <a:avLst/>
-          </a:prstGeom>
-          <a:noFill/>
-          <a:ln>
-            <a:noFill/>
-          </a:ln>
-        </p:spPr>
-        <p:txBody>
-          <a:bodyPr anchorCtr="0" anchor="t" bIns="91425" lIns="91425" spcFirstLastPara="1" rIns="91425" wrap="square" tIns="91425">
-            <a:noAutofit/>
-          </a:bodyPr>
-          <a:lstStyle/>
-          <a:p>
-            <a:pPr indent="0" lvl="0" marL="0" rtl="0" algn="ctr">
-              <a:spcBef>
-                <a:spcPts val="0"/>
-              </a:spcBef>
-              <a:spcAft>
-                <a:spcPts val="0"/>
-              </a:spcAft>
-              <a:buNone/>
-            </a:pPr>
-            <a:r>
-              <a:rPr lang="en" sz="1600">
+          <a:p>
+            <a:pPr indent="0" lvl="0" marL="0" rtl="0" algn="l">
+              <a:spcBef>
+                <a:spcPts val="1200"/>
+              </a:spcBef>
+              <a:spcAft>
+                <a:spcPts val="0"/>
+              </a:spcAft>
+              <a:buNone/>
+            </a:pPr>
+            <a:r>
+              <a:rPr lang="en" sz="2000">
                 <a:solidFill>
                   <a:srgbClr val="1E1E1E"/>
                 </a:solidFill>
@@ -14421,9 +16502,9 @@
                 <a:cs typeface="Google Sans"/>
                 <a:sym typeface="Google Sans"/>
               </a:rPr>
-              <a:t>Track brief</a:t>
-            </a:r>
-            <a:endParaRPr sz="1600">
+              <a:t>GitHub  github.com/xbill9</a:t>
+            </a:r>
+            <a:endParaRPr sz="2000">
               <a:solidFill>
                 <a:srgbClr val="1E1E1E"/>
               </a:solidFill>
@@ -14433,8 +16514,124 @@
               <a:sym typeface="Google Sans"/>
             </a:endParaRPr>
           </a:p>
+          <a:p>
+            <a:pPr indent="0" lvl="0" marL="0" rtl="0" algn="l">
+              <a:spcBef>
+                <a:spcPts val="1200"/>
+              </a:spcBef>
+              <a:spcAft>
+                <a:spcPts val="0"/>
+              </a:spcAft>
+              <a:buNone/>
+            </a:pPr>
+            <a:r>
+              <a:rPr lang="en" sz="2000">
+                <a:solidFill>
+                  <a:srgbClr val="1E1E1E"/>
+                </a:solidFill>
+                <a:latin typeface="Google Sans"/>
+                <a:ea typeface="Google Sans"/>
+                <a:cs typeface="Google Sans"/>
+                <a:sym typeface="Google Sans"/>
+              </a:rPr>
+              <a:t>Hugging Face  huggingface.co/xbill9</a:t>
+            </a:r>
+            <a:endParaRPr sz="2000">
+              <a:solidFill>
+                <a:srgbClr val="1E1E1E"/>
+              </a:solidFill>
+              <a:latin typeface="Google Sans"/>
+              <a:ea typeface="Google Sans"/>
+              <a:cs typeface="Google Sans"/>
+              <a:sym typeface="Google Sans"/>
+            </a:endParaRPr>
+          </a:p>
+          <a:p>
+            <a:pPr indent="0" lvl="0" marL="0" rtl="0" algn="l">
+              <a:spcBef>
+                <a:spcPts val="1200"/>
+              </a:spcBef>
+              <a:spcAft>
+                <a:spcPts val="1200"/>
+              </a:spcAft>
+              <a:buNone/>
+            </a:pPr>
+            <a:r>
+              <a:rPr lang="en" sz="2000">
+                <a:solidFill>
+                  <a:srgbClr val="1E1E1E"/>
+                </a:solidFill>
+                <a:latin typeface="Google Sans"/>
+                <a:ea typeface="Google Sans"/>
+                <a:cs typeface="Google Sans"/>
+                <a:sym typeface="Google Sans"/>
+              </a:rPr>
+              <a:t>AWS Builder Center  </a:t>
+            </a:r>
+            <a:r>
+              <a:rPr lang="en" sz="2000">
+                <a:solidFill>
+                  <a:srgbClr val="1E1E1E"/>
+                </a:solidFill>
+                <a:uFill>
+                  <a:noFill/>
+                </a:uFill>
+                <a:latin typeface="Google Sans"/>
+                <a:ea typeface="Google Sans"/>
+                <a:cs typeface="Google Sans"/>
+                <a:sym typeface="Google Sans"/>
+                <a:hlinkClick r:id="rId3">
+                  <a:extLst>
+                    <a:ext uri="{A12FA001-AC4F-418D-AE19-62706E023703}">
+                      <ahyp:hlinkClr val="tx"/>
+                    </a:ext>
+                  </a:extLst>
+                </a:hlinkClick>
+              </a:rPr>
+              <a:t>builder.aws.com/community/@xbill9</a:t>
+            </a:r>
+            <a:endParaRPr sz="2000">
+              <a:solidFill>
+                <a:srgbClr val="1E1E1E"/>
+              </a:solidFill>
+              <a:latin typeface="Google Sans"/>
+              <a:ea typeface="Google Sans"/>
+              <a:cs typeface="Google Sans"/>
+              <a:sym typeface="Google Sans"/>
+            </a:endParaRPr>
+          </a:p>
         </p:txBody>
       </p:sp>
+      <p:pic>
+        <p:nvPicPr>
+          <p:cNvPr id="78" name="Google Shape;78;p15">
+            <a:hlinkClick r:id="rId4"/>
+          </p:cNvPr>
+          <p:cNvPicPr preferRelativeResize="0"/>
+          <p:nvPr/>
+        </p:nvPicPr>
+        <p:blipFill>
+          <a:blip r:embed="rId5">
+            <a:alphaModFix/>
+          </a:blip>
+          <a:stretch>
+            <a:fillRect/>
+          </a:stretch>
+        </p:blipFill>
+        <p:spPr>
+          <a:xfrm>
+            <a:off x="6700000" y="1150000"/>
+            <a:ext cx="1900000" cy="1900000"/>
+          </a:xfrm>
+          <a:prstGeom prst="rect">
+            <a:avLst/>
+          </a:prstGeom>
+          <a:noFill/>
+          <a:ln>
+            <a:noFill/>
+          </a:ln>
+        </p:spPr>
+      </p:pic>
     </p:spTree>
   </p:cSld>
   <p:clrMapOvr>
@@ -14455,7 +16652,7 @@
     </p:bg>
     <p:spTree>
       <p:nvGrpSpPr>
-        <p:cNvPr id="85" name="Shape 85"/>
+        <p:cNvPr id="82" name="Shape 82"/>
         <p:cNvGrpSpPr/>
         <p:nvPr/>
       </p:nvGrpSpPr>
@@ -14469,14 +16666,14 @@
       </p:grpSpPr>
       <p:sp>
         <p:nvSpPr>
-          <p:cNvPr id="86" name="Google Shape;86;p16"/>
+          <p:cNvPr id="83" name="Google Shape;83;p16"/>
           <p:cNvSpPr/>
           <p:nvPr/>
         </p:nvSpPr>
         <p:spPr>
           <a:xfrm>
             <a:off x="411480" y="320040"/>
-            <a:ext cx="5440554" cy="566946"/>
+            <a:ext cx="5920722" cy="566946"/>
           </a:xfrm>
           <a:prstGeom prst="flowChartTerminator">
             <a:avLst/>
@@ -14519,7 +16716,7 @@
                 <a:cs typeface="Google Sans"/>
                 <a:sym typeface="Google Sans"/>
               </a:rPr>
-              <a:t>Two Hours, Build in the Middle</a:t>
+              <a:t>What You're Building: BulletProof</a:t>
             </a:r>
             <a:endParaRPr sz="2400">
               <a:solidFill>
@@ -14535,7 +16732,7 @@
       </p:sp>
       <p:sp>
         <p:nvSpPr>
-          <p:cNvPr id="87" name="Google Shape;87;p16"/>
+          <p:cNvPr id="84" name="Google Shape;84;p16"/>
           <p:cNvSpPr/>
           <p:nvPr/>
         </p:nvSpPr>
@@ -14585,7 +16782,7 @@
                 <a:cs typeface="Google Sans"/>
                 <a:sym typeface="Google Sans"/>
               </a:rPr>
-              <a:t>Agenda</a:t>
+              <a:t>The brief</a:t>
             </a:r>
             <a:endParaRPr>
               <a:solidFill>
@@ -14601,7 +16798,7 @@
       </p:sp>
       <p:sp>
         <p:nvSpPr>
-          <p:cNvPr id="88" name="Google Shape;88;p16"/>
+          <p:cNvPr id="85" name="Google Shape;85;p16"/>
           <p:cNvSpPr/>
           <p:nvPr/>
         </p:nvSpPr>
@@ -14652,7 +16849,7 @@
       </p:sp>
       <p:sp>
         <p:nvSpPr>
-          <p:cNvPr id="89" name="Google Shape;89;p16"/>
+          <p:cNvPr id="86" name="Google Shape;86;p16"/>
           <p:cNvSpPr/>
           <p:nvPr/>
         </p:nvSpPr>
@@ -14703,7 +16900,7 @@
       </p:sp>
       <p:sp>
         <p:nvSpPr>
-          <p:cNvPr id="90" name="Google Shape;90;p16"/>
+          <p:cNvPr id="87" name="Google Shape;87;p16"/>
           <p:cNvSpPr txBox="1"/>
           <p:nvPr/>
         </p:nvSpPr>
@@ -14750,7 +16947,7 @@
                 <a:cs typeface="Google Sans"/>
                 <a:sym typeface="Google Sans"/>
               </a:rPr>
-              <a:t>0:00  Check in and meet your neighbors</a:t>
+              <a:t>Paste a resume and a job posting</a:t>
             </a:r>
             <a:endParaRPr sz="1800">
               <a:solidFill>
@@ -14787,7 +16984,7 @@
                 <a:cs typeface="Google Sans"/>
                 <a:sym typeface="Google Sans"/>
               </a:rPr>
-              <a:t>0:15  Claim credits and finish setup</a:t>
+              <a:t>Click one button</a:t>
             </a:r>
             <a:endParaRPr sz="1800">
               <a:solidFill>
@@ -14824,7 +17021,7 @@
                 <a:cs typeface="Google Sans"/>
                 <a:sym typeface="Google Sans"/>
               </a:rPr>
-              <a:t>0:30  Build with Antigravity and the codelab</a:t>
+              <a:t>Copy tailored resume bullets</a:t>
             </a:r>
             <a:endParaRPr sz="1800">
               <a:solidFill>
@@ -14861,7 +17058,7 @@
                 <a:cs typeface="Google Sans"/>
                 <a:sym typeface="Google Sans"/>
               </a:rPr>
-              <a:t>1:35  Two-minute demo, then submit</a:t>
+              <a:t>Out of scope today: PDF parsing, cover letters, export</a:t>
             </a:r>
             <a:endParaRPr sz="1800">
               <a:solidFill>
@@ -14875,67 +17072,9 @@
           </a:p>
         </p:txBody>
       </p:sp>
-      <p:sp>
-        <p:nvSpPr>
-          <p:cNvPr id="91" name="Google Shape;91;p16"/>
-          <p:cNvSpPr txBox="1"/>
-          <p:nvPr/>
-        </p:nvSpPr>
-        <p:spPr>
-          <a:xfrm>
-            <a:off x="6492240" y="3566160"/>
-            <a:ext cx="2103000" cy="457200"/>
-          </a:xfrm>
-          <a:prstGeom prst="rect">
-            <a:avLst/>
-          </a:prstGeom>
-          <a:noFill/>
-          <a:ln>
-            <a:noFill/>
-          </a:ln>
-        </p:spPr>
-        <p:txBody>
-          <a:bodyPr anchorCtr="0" anchor="t" bIns="91425" lIns="91425" spcFirstLastPara="1" rIns="91425" wrap="square" tIns="91425">
-            <a:noAutofit/>
-          </a:bodyPr>
-          <a:lstStyle/>
-          <a:p>
-            <a:pPr indent="0" lvl="0" marL="0" rtl="0" algn="ctr">
-              <a:spcBef>
-                <a:spcPts val="0"/>
-              </a:spcBef>
-              <a:spcAft>
-                <a:spcPts val="0"/>
-              </a:spcAft>
-              <a:buNone/>
-            </a:pPr>
-            <a:r>
-              <a:rPr lang="en" sz="1600">
-                <a:solidFill>
-                  <a:srgbClr val="1E1E1E"/>
-                </a:solidFill>
-                <a:latin typeface="Google Sans"/>
-                <a:ea typeface="Google Sans"/>
-                <a:cs typeface="Google Sans"/>
-                <a:sym typeface="Google Sans"/>
-              </a:rPr>
-              <a:t>Jam page</a:t>
-            </a:r>
-            <a:endParaRPr sz="1600">
-              <a:solidFill>
-                <a:srgbClr val="1E1E1E"/>
-              </a:solidFill>
-              <a:latin typeface="Google Sans"/>
-              <a:ea typeface="Google Sans"/>
-              <a:cs typeface="Google Sans"/>
-              <a:sym typeface="Google Sans"/>
-            </a:endParaRPr>
-          </a:p>
-        </p:txBody>
-      </p:sp>
       <p:pic>
         <p:nvPicPr>
-          <p:cNvPr id="92" name="Google Shape;92;p16"/>
+          <p:cNvPr id="88" name="Google Shape;88;p16"/>
           <p:cNvPicPr preferRelativeResize="0"/>
           <p:nvPr/>
         </p:nvPicPr>
@@ -14961,6 +17100,64 @@
           </a:ln>
         </p:spPr>
       </p:pic>
+      <p:sp>
+        <p:nvSpPr>
+          <p:cNvPr id="89" name="Google Shape;89;p16"/>
+          <p:cNvSpPr txBox="1"/>
+          <p:nvPr/>
+        </p:nvSpPr>
+        <p:spPr>
+          <a:xfrm>
+            <a:off x="6492240" y="3566160"/>
+            <a:ext cx="2103000" cy="457200"/>
+          </a:xfrm>
+          <a:prstGeom prst="rect">
+            <a:avLst/>
+          </a:prstGeom>
+          <a:noFill/>
+          <a:ln>
+            <a:noFill/>
+          </a:ln>
+        </p:spPr>
+        <p:txBody>
+          <a:bodyPr anchorCtr="0" anchor="t" bIns="91425" lIns="91425" spcFirstLastPara="1" rIns="91425" wrap="square" tIns="91425">
+            <a:noAutofit/>
+          </a:bodyPr>
+          <a:lstStyle/>
+          <a:p>
+            <a:pPr indent="0" lvl="0" marL="0" rtl="0" algn="ctr">
+              <a:spcBef>
+                <a:spcPts val="0"/>
+              </a:spcBef>
+              <a:spcAft>
+                <a:spcPts val="0"/>
+              </a:spcAft>
+              <a:buNone/>
+            </a:pPr>
+            <a:r>
+              <a:rPr lang="en" sz="1600">
+                <a:solidFill>
+                  <a:srgbClr val="1E1E1E"/>
+                </a:solidFill>
+                <a:latin typeface="Google Sans"/>
+                <a:ea typeface="Google Sans"/>
+                <a:cs typeface="Google Sans"/>
+                <a:sym typeface="Google Sans"/>
+              </a:rPr>
+              <a:t>Track brief</a:t>
+            </a:r>
+            <a:endParaRPr sz="1600">
+              <a:solidFill>
+                <a:srgbClr val="1E1E1E"/>
+              </a:solidFill>
+              <a:latin typeface="Google Sans"/>
+              <a:ea typeface="Google Sans"/>
+              <a:cs typeface="Google Sans"/>
+              <a:sym typeface="Google Sans"/>
+            </a:endParaRPr>
+          </a:p>
+        </p:txBody>
+      </p:sp>
     </p:spTree>
   </p:cSld>
   <p:clrMapOvr>
@@ -14981,7 +17178,7 @@
     </p:bg>
     <p:spTree>
       <p:nvGrpSpPr>
-        <p:cNvPr id="96" name="Shape 96"/>
+        <p:cNvPr id="93" name="Shape 93"/>
         <p:cNvGrpSpPr/>
         <p:nvPr/>
       </p:nvGrpSpPr>
@@ -14995,14 +17192,14 @@
       </p:grpSpPr>
       <p:sp>
         <p:nvSpPr>
-          <p:cNvPr id="97" name="Google Shape;97;p17"/>
+          <p:cNvPr id="94" name="Google Shape;94;p17"/>
           <p:cNvSpPr/>
           <p:nvPr/>
         </p:nvSpPr>
         <p:spPr>
           <a:xfrm>
             <a:off x="411480" y="320040"/>
-            <a:ext cx="5600394" cy="566946"/>
+            <a:ext cx="5440554" cy="566946"/>
           </a:xfrm>
           <a:prstGeom prst="flowChartTerminator">
             <a:avLst/>
@@ -15045,7 +17242,7 @@
                 <a:cs typeface="Google Sans"/>
                 <a:sym typeface="Google Sans"/>
               </a:rPr>
-              <a:t>Install Before the Build Starts</a:t>
+              <a:t>Two Hours, Build in the Middle</a:t>
             </a:r>
             <a:endParaRPr sz="2400">
               <a:solidFill>
@@ -15061,7 +17258,7 @@
       </p:sp>
       <p:sp>
         <p:nvSpPr>
-          <p:cNvPr id="98" name="Google Shape;98;p17"/>
+          <p:cNvPr id="95" name="Google Shape;95;p17"/>
           <p:cNvSpPr/>
           <p:nvPr/>
         </p:nvSpPr>
@@ -15111,7 +17308,7 @@
                 <a:cs typeface="Google Sans"/>
                 <a:sym typeface="Google Sans"/>
               </a:rPr>
-              <a:t>Setup</a:t>
+              <a:t>Agenda</a:t>
             </a:r>
             <a:endParaRPr>
               <a:solidFill>
@@ -15127,7 +17324,7 @@
       </p:sp>
       <p:sp>
         <p:nvSpPr>
-          <p:cNvPr id="99" name="Google Shape;99;p17"/>
+          <p:cNvPr id="96" name="Google Shape;96;p17"/>
           <p:cNvSpPr/>
           <p:nvPr/>
         </p:nvSpPr>
@@ -15178,7 +17375,7 @@
       </p:sp>
       <p:sp>
         <p:nvSpPr>
-          <p:cNvPr id="100" name="Google Shape;100;p17"/>
+          <p:cNvPr id="97" name="Google Shape;97;p17"/>
           <p:cNvSpPr/>
           <p:nvPr/>
         </p:nvSpPr>
@@ -15229,7 +17426,7 @@
       </p:sp>
       <p:sp>
         <p:nvSpPr>
-          <p:cNvPr id="101" name="Google Shape;101;p17"/>
+          <p:cNvPr id="98" name="Google Shape;98;p17"/>
           <p:cNvSpPr txBox="1"/>
           <p:nvPr/>
         </p:nvSpPr>
@@ -15276,7 +17473,7 @@
                 <a:cs typeface="Google Sans"/>
                 <a:sym typeface="Google Sans"/>
               </a:rPr>
-              <a:t>Antigravity: antigravity.google/download</a:t>
+              <a:t>0:00  Check in and meet your neighbors</a:t>
             </a:r>
             <a:endParaRPr sz="1800">
               <a:solidFill>
@@ -15313,7 +17510,7 @@
                 <a:cs typeface="Google Sans"/>
                 <a:sym typeface="Google Sans"/>
               </a:rPr>
-              <a:t>Git, and a GitHub account that can clone</a:t>
+              <a:t>0:15  Claim credits, run setup, install and sign in</a:t>
             </a:r>
             <a:endParaRPr sz="1800">
               <a:solidFill>
@@ -15350,7 +17547,7 @@
                 <a:cs typeface="Google Sans"/>
                 <a:sym typeface="Google Sans"/>
               </a:rPr>
-              <a:t>A Gemini API key from ai.google.dev</a:t>
+              <a:t>0:30  Build with Antigravity and the codelab</a:t>
             </a:r>
             <a:endParaRPr sz="1800">
               <a:solidFill>
@@ -15387,7 +17584,7 @@
                 <a:cs typeface="Google Sans"/>
                 <a:sym typeface="Google Sans"/>
               </a:rPr>
-              <a:t>Do it at home on good Wi-Fi; no installs once the build starts</a:t>
+              <a:t>1:35  Two-minute demo, then submit</a:t>
             </a:r>
             <a:endParaRPr sz="1800">
               <a:solidFill>
@@ -15403,7 +17600,7 @@
       </p:sp>
       <p:sp>
         <p:nvSpPr>
-          <p:cNvPr id="102" name="Google Shape;102;p17"/>
+          <p:cNvPr id="99" name="Google Shape;99;p17"/>
           <p:cNvSpPr txBox="1"/>
           <p:nvPr/>
         </p:nvSpPr>
@@ -15445,7 +17642,7 @@
                 <a:cs typeface="Google Sans"/>
                 <a:sym typeface="Google Sans"/>
               </a:rPr>
-              <a:t>Antigravity setup</a:t>
+              <a:t>Jam page</a:t>
             </a:r>
             <a:endParaRPr sz="1600">
               <a:solidFill>
@@ -15461,7 +17658,7 @@
       </p:sp>
       <p:pic>
         <p:nvPicPr>
-          <p:cNvPr id="103" name="Google Shape;103;p17"/>
+          <p:cNvPr id="100" name="Google Shape;100;p17"/>
           <p:cNvPicPr preferRelativeResize="0"/>
           <p:nvPr/>
         </p:nvPicPr>
@@ -15507,7 +17704,7 @@
     </p:bg>
     <p:spTree>
       <p:nvGrpSpPr>
-        <p:cNvPr id="107" name="Shape 107"/>
+        <p:cNvPr id="104" name="Shape 104"/>
         <p:cNvGrpSpPr/>
         <p:nvPr/>
       </p:nvGrpSpPr>
@@ -15521,7 +17718,7 @@
       </p:grpSpPr>
       <p:sp>
         <p:nvSpPr>
-          <p:cNvPr id="108" name="Google Shape;108;p18"/>
+          <p:cNvPr id="105" name="Google Shape;105;p18"/>
           <p:cNvSpPr/>
           <p:nvPr/>
         </p:nvSpPr>
@@ -15571,7 +17768,7 @@
                 <a:cs typeface="Google Sans"/>
                 <a:sym typeface="Google Sans"/>
               </a:rPr>
-              <a:t>Claim Credits, Create a Project</a:t>
+              <a:t>Claim Your Credits Now</a:t>
             </a:r>
             <a:endParaRPr sz="2400">
               <a:solidFill>
@@ -15587,7 +17784,7 @@
       </p:sp>
       <p:sp>
         <p:nvSpPr>
-          <p:cNvPr id="109" name="Google Shape;109;p18"/>
+          <p:cNvPr id="106" name="Google Shape;106;p18"/>
           <p:cNvSpPr/>
           <p:nvPr/>
         </p:nvSpPr>
@@ -15653,7 +17850,7 @@
       </p:sp>
       <p:sp>
         <p:nvSpPr>
-          <p:cNvPr id="110" name="Google Shape;110;p18"/>
+          <p:cNvPr id="107" name="Google Shape;107;p18"/>
           <p:cNvSpPr/>
           <p:nvPr/>
         </p:nvSpPr>
@@ -15704,7 +17901,7 @@
       </p:sp>
       <p:sp>
         <p:nvSpPr>
-          <p:cNvPr id="111" name="Google Shape;111;p18"/>
+          <p:cNvPr id="108" name="Google Shape;108;p18"/>
           <p:cNvSpPr/>
           <p:nvPr/>
         </p:nvSpPr>
@@ -15755,7 +17952,7 @@
       </p:sp>
       <p:sp>
         <p:nvSpPr>
-          <p:cNvPr id="112" name="Google Shape;112;p18"/>
+          <p:cNvPr id="109" name="Google Shape;109;p18"/>
           <p:cNvSpPr txBox="1"/>
           <p:nvPr/>
         </p:nvSpPr>
@@ -15802,7 +17999,7 @@
                 <a:cs typeface="Google Sans"/>
                 <a:sym typeface="Google Sans"/>
               </a:rPr>
-              <a:t>Claim credits with a personal Gmail account</a:t>
+              <a:t>Open the claim link and sign in with your personal Gmail</a:t>
             </a:r>
             <a:endParaRPr sz="1800">
               <a:solidFill>
@@ -15839,7 +18036,7 @@
                 <a:cs typeface="Google Sans"/>
                 <a:sym typeface="Google Sans"/>
               </a:rPr>
-              <a:t>Create a fresh project and attach the credits</a:t>
+              <a:t>Join the Google Developer Program, claim the badge</a:t>
             </a:r>
             <a:endParaRPr sz="1800">
               <a:solidFill>
@@ -15876,7 +18073,7 @@
                 <a:cs typeface="Google Sans"/>
                 <a:sym typeface="Google Sans"/>
               </a:rPr>
-              <a:t>Enable Agent Platform: the step people skip most</a:t>
+              <a:t>Finish the verification on your phone</a:t>
             </a:r>
             <a:endParaRPr sz="1800">
               <a:solidFill>
@@ -15894,7 +18091,7 @@
                 <a:spcPts val="1200"/>
               </a:spcBef>
               <a:spcAft>
-                <a:spcPts val="1200"/>
+                <a:spcPts val="0"/>
               </a:spcAft>
               <a:buClr>
                 <a:srgbClr val="1E1E1E"/>
@@ -15913,7 +18110,7 @@
                 <a:cs typeface="Google Sans"/>
                 <a:sym typeface="Google Sans"/>
               </a:rPr>
-              <a:t>Sign in to Antigravity with your project ID, not the display name</a:t>
+              <a:t>Wait 2 to 5 minutes for the billing account to appear</a:t>
             </a:r>
             <a:endParaRPr sz="1800">
               <a:solidFill>
@@ -15925,18 +18122,55 @@
               <a:sym typeface="Google Sans"/>
             </a:endParaRPr>
           </a:p>
+          <a:p>
+            <a:pPr indent="-342900" lvl="0" marL="457200" rtl="0" algn="l">
+              <a:spcBef>
+                <a:spcPts val="1200"/>
+              </a:spcBef>
+              <a:spcAft>
+                <a:spcPts val="1200"/>
+              </a:spcAft>
+              <a:buClr>
+                <a:srgbClr val="1E1E1E"/>
+              </a:buClr>
+              <a:buSzPts val="1800"/>
+              <a:buFont typeface="Google Sans"/>
+              <a:buChar char="●"/>
+            </a:pPr>
+            <a:r>
+              <a:rPr lang="en" sz="1800">
+                <a:solidFill>
+                  <a:srgbClr val="1E1E1E"/>
+                </a:solidFill>
+                <a:latin typeface="Google Sans"/>
+                <a:ea typeface="Google Sans"/>
+                <a:cs typeface="Google Sans"/>
+                <a:sym typeface="Google Sans"/>
+              </a:rPr>
+              <a:t>Claim today: credits can't be saved</a:t>
+            </a:r>
+            <a:endParaRPr sz="1800">
+              <a:solidFill>
+                <a:srgbClr val="1E1E1E"/>
+              </a:solidFill>
+              <a:latin typeface="Google Sans"/>
+              <a:ea typeface="Google Sans"/>
+              <a:cs typeface="Google Sans"/>
+              <a:sym typeface="Google Sans"/>
+            </a:endParaRPr>
+          </a:p>
         </p:txBody>
       </p:sp>
       <p:sp>
         <p:nvSpPr>
-          <p:cNvPr id="113" name="Google Shape;113;p18"/>
+          <p:cNvPr id="110" name="Google Shape;110;p18"/>
           <p:cNvSpPr txBox="1"/>
           <p:nvPr/>
         </p:nvSpPr>
         <p:spPr>
           <a:xfrm>
-            <a:off x="6492240" y="3566160"/>
-            <a:ext cx="2103000" cy="457200"/>
+            <a:off x="6492240" y="1371600"/>
+            <a:ext cx="2103000" cy="3291900"/>
           </a:xfrm>
           <a:prstGeom prst="rect">
             <a:avLst/>
@@ -15952,9 +18186,41 @@
           </a:bodyPr>
           <a:lstStyle/>
           <a:p>
-            <a:pPr indent="0" lvl="0" marL="0" rtl="0" algn="ctr">
-              <a:spcBef>
-                <a:spcPts val="0"/>
+            <a:pPr indent="0" lvl="0" marL="0" rtl="0" algn="l">
+              <a:spcBef>
+                <a:spcPts val="0"/>
+              </a:spcBef>
+              <a:spcAft>
+                <a:spcPts val="0"/>
+              </a:spcAft>
+              <a:buNone/>
+            </a:pPr>
+            <a:r>
+              <a:rPr b="1" lang="en" sz="1600">
+                <a:solidFill>
+                  <a:srgbClr val="1E1E1E"/>
+                </a:solidFill>
+                <a:latin typeface="Google Sans"/>
+                <a:ea typeface="Google Sans"/>
+                <a:cs typeface="Google Sans"/>
+                <a:sym typeface="Google Sans"/>
+              </a:rPr>
+              <a:t>If it fails</a:t>
+            </a:r>
+            <a:endParaRPr b="1" sz="1600">
+              <a:solidFill>
+                <a:srgbClr val="1E1E1E"/>
+              </a:solidFill>
+              <a:latin typeface="Google Sans"/>
+              <a:ea typeface="Google Sans"/>
+              <a:cs typeface="Google Sans"/>
+              <a:sym typeface="Google Sans"/>
+            </a:endParaRPr>
+          </a:p>
+          <a:p>
+            <a:pPr indent="0" lvl="0" marL="0" rtl="0" algn="l">
+              <a:spcBef>
+                <a:spcPts val="400"/>
               </a:spcBef>
               <a:spcAft>
                 <a:spcPts val="0"/>
@@ -15971,7 +18237,7 @@
                 <a:cs typeface="Google Sans"/>
                 <a:sym typeface="Google Sans"/>
               </a:rPr>
-              <a:t>Enable Agent Platform</a:t>
+              <a:t>CRED-101: you're on a work or school account. Switch to your @gmail.com.</a:t>
             </a:r>
             <a:endParaRPr sz="1600">
               <a:solidFill>
@@ -15983,36 +18249,63 @@
               <a:sym typeface="Google Sans"/>
             </a:endParaRPr>
           </a:p>
+          <a:p>
+            <a:pPr indent="0" lvl="0" marL="0" rtl="0" algn="l">
+              <a:spcBef>
+                <a:spcPts val="400"/>
+              </a:spcBef>
+              <a:spcAft>
+                <a:spcPts val="0"/>
+              </a:spcAft>
+              <a:buNone/>
+            </a:pPr>
+            <a:r>
+              <a:t/>
+            </a:r>
+            <a:endParaRPr sz="1600">
+              <a:solidFill>
+                <a:srgbClr val="1E1E1E"/>
+              </a:solidFill>
+              <a:latin typeface="Google Sans"/>
+              <a:ea typeface="Google Sans"/>
+              <a:cs typeface="Google Sans"/>
+              <a:sym typeface="Google Sans"/>
+            </a:endParaRPr>
+          </a:p>
+          <a:p>
+            <a:pPr indent="0" lvl="0" marL="0" rtl="0" algn="l">
+              <a:spcBef>
+                <a:spcPts val="400"/>
+              </a:spcBef>
+              <a:spcAft>
+                <a:spcPts val="400"/>
+              </a:spcAft>
+              <a:buNone/>
+            </a:pPr>
+            <a:r>
+              <a:rPr lang="en" sz="1600">
+                <a:solidFill>
+                  <a:srgbClr val="1E1E1E"/>
+                </a:solidFill>
+                <a:latin typeface="Google Sans"/>
+                <a:ea typeface="Google Sans"/>
+                <a:cs typeface="Google Sans"/>
+                <a:sym typeface="Google Sans"/>
+              </a:rPr>
+              <a:t>CRED-103: verification failed. Refresh, retry, or switch your phone to mobile data.</a:t>
+            </a:r>
+            <a:endParaRPr sz="1600">
+              <a:solidFill>
+                <a:srgbClr val="1E1E1E"/>
+              </a:solidFill>
+              <a:latin typeface="Google Sans"/>
+              <a:ea typeface="Google Sans"/>
+              <a:cs typeface="Google Sans"/>
+              <a:sym typeface="Google Sans"/>
+            </a:endParaRPr>
+          </a:p>
         </p:txBody>
       </p:sp>
-      <p:pic>
-        <p:nvPicPr>
-          <p:cNvPr id="114" name="Google Shape;114;p18"/>
-          <p:cNvPicPr preferRelativeResize="0"/>
-          <p:nvPr/>
-        </p:nvPicPr>
-        <p:blipFill>
-          <a:blip r:embed="rId3">
-            <a:alphaModFix/>
-          </a:blip>
-          <a:stretch>
-            <a:fillRect/>
-          </a:stretch>
-        </p:blipFill>
-        <p:spPr>
-          <a:xfrm>
-            <a:off x="6537960" y="1417320"/>
-            <a:ext cx="2011680" cy="2011680"/>
-          </a:xfrm>
-          <a:prstGeom prst="rect">
-            <a:avLst/>
-          </a:prstGeom>
-          <a:noFill/>
-          <a:ln>
-            <a:noFill/>
-          </a:ln>
-        </p:spPr>
-      </p:pic>
     </p:spTree>
   </p:cSld>
   <p:clrMapOvr>
@@ -16027,13 +18320,13 @@
     <p:bg>
       <p:bgPr>
         <a:solidFill>
-          <a:srgbClr val="F2F1F0"/>
+          <a:srgbClr val="FFFFFF"/>
         </a:solidFill>
       </p:bgPr>
     </p:bg>
     <p:spTree>
       <p:nvGrpSpPr>
-        <p:cNvPr id="118" name="Shape 118"/>
+        <p:cNvPr id="114" name="Shape 114"/>
         <p:cNvGrpSpPr/>
         <p:nvPr/>
       </p:nvGrpSpPr>
@@ -16047,595 +18340,17 @@
       </p:grpSpPr>
       <p:sp>
         <p:nvSpPr>
-          <p:cNvPr id="119" name="Google Shape;119;p19"/>
-          <p:cNvSpPr txBox="1"/>
-          <p:nvPr/>
-        </p:nvSpPr>
-        <p:spPr>
-          <a:xfrm>
-            <a:off x="548640" y="822960"/>
-            <a:ext cx="5303400" cy="914400"/>
-          </a:xfrm>
-          <a:prstGeom prst="rect">
-            <a:avLst/>
-          </a:prstGeom>
-          <a:noFill/>
-          <a:ln>
-            <a:noFill/>
-          </a:ln>
-        </p:spPr>
-        <p:txBody>
-          <a:bodyPr anchorCtr="0" anchor="t" bIns="91425" lIns="91425" spcFirstLastPara="1" rIns="91425" wrap="square" tIns="91425">
-            <a:noAutofit/>
-          </a:bodyPr>
-          <a:lstStyle/>
-          <a:p>
-            <a:pPr indent="0" lvl="0" marL="0" rtl="0" algn="l">
-              <a:spcBef>
-                <a:spcPts val="0"/>
-              </a:spcBef>
-              <a:spcAft>
-                <a:spcPts val="0"/>
-              </a:spcAft>
-              <a:buNone/>
-            </a:pPr>
-            <a:r>
-              <a:rPr b="1" lang="en" sz="4800">
-                <a:solidFill>
-                  <a:srgbClr val="1E1E1E"/>
-                </a:solidFill>
-                <a:latin typeface="Google Sans"/>
-                <a:ea typeface="Google Sans"/>
-                <a:cs typeface="Google Sans"/>
-                <a:sym typeface="Google Sans"/>
-              </a:rPr>
-              <a:t>The Codelab</a:t>
-            </a:r>
-            <a:endParaRPr b="1" sz="4800">
-              <a:solidFill>
-                <a:srgbClr val="1E1E1E"/>
-              </a:solidFill>
-              <a:latin typeface="Google Sans"/>
-              <a:ea typeface="Google Sans"/>
-              <a:cs typeface="Google Sans"/>
-              <a:sym typeface="Google Sans"/>
-            </a:endParaRPr>
-          </a:p>
-        </p:txBody>
-      </p:sp>
-      <p:sp>
-        <p:nvSpPr>
-          <p:cNvPr id="120" name="Google Shape;120;p19"/>
-          <p:cNvSpPr txBox="1"/>
-          <p:nvPr/>
-        </p:nvSpPr>
-        <p:spPr>
-          <a:xfrm>
-            <a:off x="548640" y="1783080"/>
-            <a:ext cx="5303400" cy="1316700"/>
-          </a:xfrm>
-          <a:prstGeom prst="rect">
-            <a:avLst/>
-          </a:prstGeom>
-          <a:noFill/>
-          <a:ln>
-            <a:noFill/>
-          </a:ln>
-        </p:spPr>
-        <p:txBody>
-          <a:bodyPr anchorCtr="0" anchor="t" bIns="91425" lIns="91425" spcFirstLastPara="1" rIns="91425" wrap="square" tIns="91425">
-            <a:noAutofit/>
-          </a:bodyPr>
-          <a:lstStyle/>
-          <a:p>
-            <a:pPr indent="0" lvl="0" marL="0" rtl="0" algn="l">
-              <a:spcBef>
-                <a:spcPts val="0"/>
-              </a:spcBef>
-              <a:spcAft>
-                <a:spcPts val="0"/>
-              </a:spcAft>
-              <a:buNone/>
-            </a:pPr>
-            <a:r>
-              <a:rPr lang="en">
-                <a:solidFill>
-                  <a:srgbClr val="1E1E1E"/>
-                </a:solidFill>
-                <a:latin typeface="Roboto Mono"/>
-                <a:ea typeface="Roboto Mono"/>
-                <a:cs typeface="Roboto Mono"/>
-                <a:sym typeface="Roboto Mono"/>
-              </a:rPr>
-              <a:t>Follow this codelab: your Google Cloud credits work here, not in AI Studio</a:t>
-            </a:r>
-            <a:endParaRPr>
-              <a:solidFill>
-                <a:srgbClr val="1E1E1E"/>
-              </a:solidFill>
-              <a:latin typeface="Roboto Mono"/>
-              <a:ea typeface="Roboto Mono"/>
-              <a:cs typeface="Roboto Mono"/>
-              <a:sym typeface="Roboto Mono"/>
-            </a:endParaRPr>
-          </a:p>
-          <a:p>
-            <a:pPr indent="0" lvl="0" marL="0" rtl="0" algn="l">
-              <a:spcBef>
-                <a:spcPts val="600"/>
-              </a:spcBef>
-              <a:spcAft>
-                <a:spcPts val="0"/>
-              </a:spcAft>
-              <a:buNone/>
-            </a:pPr>
-            <a:r>
-              <a:rPr lang="en">
-                <a:solidFill>
-                  <a:srgbClr val="1E1E1E"/>
-                </a:solidFill>
-                <a:latin typeface="Roboto Mono"/>
-                <a:ea typeface="Roboto Mono"/>
-                <a:cs typeface="Roboto Mono"/>
-                <a:sym typeface="Roboto Mono"/>
-              </a:rPr>
-              <a:t>Ten steps, about 75 minutes</a:t>
-            </a:r>
-            <a:endParaRPr>
-              <a:solidFill>
-                <a:srgbClr val="1E1E1E"/>
-              </a:solidFill>
-              <a:latin typeface="Roboto Mono"/>
-              <a:ea typeface="Roboto Mono"/>
-              <a:cs typeface="Roboto Mono"/>
-              <a:sym typeface="Roboto Mono"/>
-            </a:endParaRPr>
-          </a:p>
-          <a:p>
-            <a:pPr indent="0" lvl="0" marL="0" rtl="0" algn="l">
-              <a:spcBef>
-                <a:spcPts val="600"/>
-              </a:spcBef>
-              <a:spcAft>
-                <a:spcPts val="600"/>
-              </a:spcAft>
-              <a:buNone/>
-            </a:pPr>
-            <a:r>
-              <a:rPr lang="en">
-                <a:solidFill>
-                  <a:srgbClr val="1E1E1E"/>
-                </a:solidFill>
-                <a:latin typeface="Roboto Mono"/>
-                <a:ea typeface="Roboto Mono"/>
-                <a:cs typeface="Roboto Mono"/>
-                <a:sym typeface="Roboto Mono"/>
-              </a:rPr>
-              <a:t>Every step slide has its own QR code</a:t>
-            </a:r>
-            <a:endParaRPr>
-              <a:solidFill>
-                <a:srgbClr val="1E1E1E"/>
-              </a:solidFill>
-              <a:latin typeface="Roboto Mono"/>
-              <a:ea typeface="Roboto Mono"/>
-              <a:cs typeface="Roboto Mono"/>
-              <a:sym typeface="Roboto Mono"/>
-            </a:endParaRPr>
-          </a:p>
-        </p:txBody>
-      </p:sp>
-      <p:sp>
-        <p:nvSpPr>
-          <p:cNvPr id="121" name="Google Shape;121;p19"/>
+          <p:cNvPr id="115" name="Google Shape;115;p19"/>
           <p:cNvSpPr/>
           <p:nvPr/>
         </p:nvSpPr>
         <p:spPr>
           <a:xfrm>
-            <a:off x="548640" y="4069080"/>
-            <a:ext cx="841266" cy="438912"/>
+            <a:off x="411480" y="320040"/>
+            <a:ext cx="5600394" cy="566946"/>
           </a:xfrm>
           <a:prstGeom prst="flowChartTerminator">
             <a:avLst/>
-          </a:prstGeom>
-          <a:solidFill>
-            <a:srgbClr val="5CDB6D"/>
-          </a:solidFill>
-          <a:ln cap="flat" cmpd="sng" w="19050">
-            <a:solidFill>
-              <a:srgbClr val="1E1E1E"/>
-            </a:solidFill>
-            <a:prstDash val="solid"/>
-            <a:round/>
-            <a:headEnd len="sm" w="sm" type="none"/>
-            <a:tailEnd len="sm" w="sm" type="none"/>
-          </a:ln>
-        </p:spPr>
-        <p:txBody>
-          <a:bodyPr anchorCtr="0" anchor="ctr" bIns="91425" lIns="91425" spcFirstLastPara="1" rIns="91425" wrap="square" tIns="91425">
-            <a:noAutofit/>
-          </a:bodyPr>
-          <a:lstStyle/>
-          <a:p>
-            <a:pPr indent="0" lvl="0" marL="0" rtl="0" algn="ctr">
-              <a:spcBef>
-                <a:spcPts val="0"/>
-              </a:spcBef>
-              <a:spcAft>
-                <a:spcPts val="0"/>
-              </a:spcAft>
-              <a:buNone/>
-            </a:pPr>
-            <a:r>
-              <a:rPr lang="en">
-                <a:solidFill>
-                  <a:srgbClr val="1E1E1E"/>
-                </a:solidFill>
-                <a:latin typeface="Google Sans"/>
-                <a:ea typeface="Google Sans"/>
-                <a:cs typeface="Google Sans"/>
-                <a:sym typeface="Google Sans"/>
-              </a:rPr>
-              <a:t>Setup</a:t>
-            </a:r>
-            <a:endParaRPr>
-              <a:solidFill>
-                <a:srgbClr val="1E1E1E"/>
-              </a:solidFill>
-              <a:latin typeface="Google Sans"/>
-              <a:ea typeface="Google Sans"/>
-              <a:cs typeface="Google Sans"/>
-              <a:sym typeface="Google Sans"/>
-            </a:endParaRPr>
-          </a:p>
-        </p:txBody>
-      </p:sp>
-      <p:sp>
-        <p:nvSpPr>
-          <p:cNvPr id="122" name="Google Shape;122;p19"/>
-          <p:cNvSpPr/>
-          <p:nvPr/>
-        </p:nvSpPr>
-        <p:spPr>
-          <a:xfrm>
-            <a:off x="1499616" y="4069080"/>
-            <a:ext cx="841266" cy="438912"/>
-          </a:xfrm>
-          <a:prstGeom prst="flowChartTerminator">
-            <a:avLst/>
-          </a:prstGeom>
-          <a:solidFill>
-            <a:srgbClr val="5CDB6D"/>
-          </a:solidFill>
-          <a:ln cap="flat" cmpd="sng" w="19050">
-            <a:solidFill>
-              <a:srgbClr val="1E1E1E"/>
-            </a:solidFill>
-            <a:prstDash val="solid"/>
-            <a:round/>
-            <a:headEnd len="sm" w="sm" type="none"/>
-            <a:tailEnd len="sm" w="sm" type="none"/>
-          </a:ln>
-        </p:spPr>
-        <p:txBody>
-          <a:bodyPr anchorCtr="0" anchor="ctr" bIns="91425" lIns="91425" spcFirstLastPara="1" rIns="91425" wrap="square" tIns="91425">
-            <a:noAutofit/>
-          </a:bodyPr>
-          <a:lstStyle/>
-          <a:p>
-            <a:pPr indent="0" lvl="0" marL="0" rtl="0" algn="ctr">
-              <a:spcBef>
-                <a:spcPts val="0"/>
-              </a:spcBef>
-              <a:spcAft>
-                <a:spcPts val="0"/>
-              </a:spcAft>
-              <a:buNone/>
-            </a:pPr>
-            <a:r>
-              <a:rPr lang="en">
-                <a:solidFill>
-                  <a:srgbClr val="1E1E1E"/>
-                </a:solidFill>
-                <a:latin typeface="Google Sans"/>
-                <a:ea typeface="Google Sans"/>
-                <a:cs typeface="Google Sans"/>
-                <a:sym typeface="Google Sans"/>
-              </a:rPr>
-              <a:t>Plan</a:t>
-            </a:r>
-            <a:endParaRPr>
-              <a:solidFill>
-                <a:srgbClr val="1E1E1E"/>
-              </a:solidFill>
-              <a:latin typeface="Google Sans"/>
-              <a:ea typeface="Google Sans"/>
-              <a:cs typeface="Google Sans"/>
-              <a:sym typeface="Google Sans"/>
-            </a:endParaRPr>
-          </a:p>
-        </p:txBody>
-      </p:sp>
-      <p:sp>
-        <p:nvSpPr>
-          <p:cNvPr id="123" name="Google Shape;123;p19"/>
-          <p:cNvSpPr/>
-          <p:nvPr/>
-        </p:nvSpPr>
-        <p:spPr>
-          <a:xfrm>
-            <a:off x="2450592" y="4069080"/>
-            <a:ext cx="841266" cy="438912"/>
-          </a:xfrm>
-          <a:prstGeom prst="flowChartTerminator">
-            <a:avLst/>
-          </a:prstGeom>
-          <a:solidFill>
-            <a:srgbClr val="5CDB6D"/>
-          </a:solidFill>
-          <a:ln cap="flat" cmpd="sng" w="19050">
-            <a:solidFill>
-              <a:srgbClr val="1E1E1E"/>
-            </a:solidFill>
-            <a:prstDash val="solid"/>
-            <a:round/>
-            <a:headEnd len="sm" w="sm" type="none"/>
-            <a:tailEnd len="sm" w="sm" type="none"/>
-          </a:ln>
-        </p:spPr>
-        <p:txBody>
-          <a:bodyPr anchorCtr="0" anchor="ctr" bIns="91425" lIns="91425" spcFirstLastPara="1" rIns="91425" wrap="square" tIns="91425">
-            <a:noAutofit/>
-          </a:bodyPr>
-          <a:lstStyle/>
-          <a:p>
-            <a:pPr indent="0" lvl="0" marL="0" rtl="0" algn="ctr">
-              <a:spcBef>
-                <a:spcPts val="0"/>
-              </a:spcBef>
-              <a:spcAft>
-                <a:spcPts val="0"/>
-              </a:spcAft>
-              <a:buNone/>
-            </a:pPr>
-            <a:r>
-              <a:rPr lang="en">
-                <a:solidFill>
-                  <a:srgbClr val="1E1E1E"/>
-                </a:solidFill>
-                <a:latin typeface="Google Sans"/>
-                <a:ea typeface="Google Sans"/>
-                <a:cs typeface="Google Sans"/>
-                <a:sym typeface="Google Sans"/>
-              </a:rPr>
-              <a:t>Review</a:t>
-            </a:r>
-            <a:endParaRPr>
-              <a:solidFill>
-                <a:srgbClr val="1E1E1E"/>
-              </a:solidFill>
-              <a:latin typeface="Google Sans"/>
-              <a:ea typeface="Google Sans"/>
-              <a:cs typeface="Google Sans"/>
-              <a:sym typeface="Google Sans"/>
-            </a:endParaRPr>
-          </a:p>
-        </p:txBody>
-      </p:sp>
-      <p:sp>
-        <p:nvSpPr>
-          <p:cNvPr id="124" name="Google Shape;124;p19"/>
-          <p:cNvSpPr/>
-          <p:nvPr/>
-        </p:nvSpPr>
-        <p:spPr>
-          <a:xfrm>
-            <a:off x="3401568" y="4069080"/>
-            <a:ext cx="841266" cy="438912"/>
-          </a:xfrm>
-          <a:prstGeom prst="flowChartTerminator">
-            <a:avLst/>
-          </a:prstGeom>
-          <a:solidFill>
-            <a:srgbClr val="5CDB6D"/>
-          </a:solidFill>
-          <a:ln cap="flat" cmpd="sng" w="19050">
-            <a:solidFill>
-              <a:srgbClr val="1E1E1E"/>
-            </a:solidFill>
-            <a:prstDash val="solid"/>
-            <a:round/>
-            <a:headEnd len="sm" w="sm" type="none"/>
-            <a:tailEnd len="sm" w="sm" type="none"/>
-          </a:ln>
-        </p:spPr>
-        <p:txBody>
-          <a:bodyPr anchorCtr="0" anchor="ctr" bIns="91425" lIns="91425" spcFirstLastPara="1" rIns="91425" wrap="square" tIns="91425">
-            <a:noAutofit/>
-          </a:bodyPr>
-          <a:lstStyle/>
-          <a:p>
-            <a:pPr indent="0" lvl="0" marL="0" rtl="0" algn="ctr">
-              <a:spcBef>
-                <a:spcPts val="0"/>
-              </a:spcBef>
-              <a:spcAft>
-                <a:spcPts val="0"/>
-              </a:spcAft>
-              <a:buNone/>
-            </a:pPr>
-            <a:r>
-              <a:rPr lang="en">
-                <a:solidFill>
-                  <a:srgbClr val="1E1E1E"/>
-                </a:solidFill>
-                <a:latin typeface="Google Sans"/>
-                <a:ea typeface="Google Sans"/>
-                <a:cs typeface="Google Sans"/>
-                <a:sym typeface="Google Sans"/>
-              </a:rPr>
-              <a:t>Build</a:t>
-            </a:r>
-            <a:endParaRPr>
-              <a:solidFill>
-                <a:srgbClr val="1E1E1E"/>
-              </a:solidFill>
-              <a:latin typeface="Google Sans"/>
-              <a:ea typeface="Google Sans"/>
-              <a:cs typeface="Google Sans"/>
-              <a:sym typeface="Google Sans"/>
-            </a:endParaRPr>
-          </a:p>
-        </p:txBody>
-      </p:sp>
-      <p:sp>
-        <p:nvSpPr>
-          <p:cNvPr id="125" name="Google Shape;125;p19"/>
-          <p:cNvSpPr/>
-          <p:nvPr/>
-        </p:nvSpPr>
-        <p:spPr>
-          <a:xfrm>
-            <a:off x="4352544" y="4069080"/>
-            <a:ext cx="841266" cy="438912"/>
-          </a:xfrm>
-          <a:prstGeom prst="flowChartTerminator">
-            <a:avLst/>
-          </a:prstGeom>
-          <a:solidFill>
-            <a:srgbClr val="5CDB6D"/>
-          </a:solidFill>
-          <a:ln cap="flat" cmpd="sng" w="19050">
-            <a:solidFill>
-              <a:srgbClr val="1E1E1E"/>
-            </a:solidFill>
-            <a:prstDash val="solid"/>
-            <a:round/>
-            <a:headEnd len="sm" w="sm" type="none"/>
-            <a:tailEnd len="sm" w="sm" type="none"/>
-          </a:ln>
-        </p:spPr>
-        <p:txBody>
-          <a:bodyPr anchorCtr="0" anchor="ctr" bIns="91425" lIns="91425" spcFirstLastPara="1" rIns="91425" wrap="square" tIns="91425">
-            <a:noAutofit/>
-          </a:bodyPr>
-          <a:lstStyle/>
-          <a:p>
-            <a:pPr indent="0" lvl="0" marL="0" rtl="0" algn="ctr">
-              <a:spcBef>
-                <a:spcPts val="0"/>
-              </a:spcBef>
-              <a:spcAft>
-                <a:spcPts val="0"/>
-              </a:spcAft>
-              <a:buNone/>
-            </a:pPr>
-            <a:r>
-              <a:rPr lang="en">
-                <a:solidFill>
-                  <a:srgbClr val="1E1E1E"/>
-                </a:solidFill>
-                <a:latin typeface="Google Sans"/>
-                <a:ea typeface="Google Sans"/>
-                <a:cs typeface="Google Sans"/>
-                <a:sym typeface="Google Sans"/>
-              </a:rPr>
-              <a:t>API</a:t>
-            </a:r>
-            <a:endParaRPr>
-              <a:solidFill>
-                <a:srgbClr val="1E1E1E"/>
-              </a:solidFill>
-              <a:latin typeface="Google Sans"/>
-              <a:ea typeface="Google Sans"/>
-              <a:cs typeface="Google Sans"/>
-              <a:sym typeface="Google Sans"/>
-            </a:endParaRPr>
-          </a:p>
-        </p:txBody>
-      </p:sp>
-      <p:sp>
-        <p:nvSpPr>
-          <p:cNvPr id="126" name="Google Shape;126;p19"/>
-          <p:cNvSpPr/>
-          <p:nvPr/>
-        </p:nvSpPr>
-        <p:spPr>
-          <a:xfrm>
-            <a:off x="5303520" y="4069080"/>
-            <a:ext cx="841266" cy="438912"/>
-          </a:xfrm>
-          <a:prstGeom prst="flowChartTerminator">
-            <a:avLst/>
-          </a:prstGeom>
-          <a:solidFill>
-            <a:srgbClr val="5CDB6D"/>
-          </a:solidFill>
-          <a:ln cap="flat" cmpd="sng" w="19050">
-            <a:solidFill>
-              <a:srgbClr val="1E1E1E"/>
-            </a:solidFill>
-            <a:prstDash val="solid"/>
-            <a:round/>
-            <a:headEnd len="sm" w="sm" type="none"/>
-            <a:tailEnd len="sm" w="sm" type="none"/>
-          </a:ln>
-        </p:spPr>
-        <p:txBody>
-          <a:bodyPr anchorCtr="0" anchor="ctr" bIns="91425" lIns="91425" spcFirstLastPara="1" rIns="91425" wrap="square" tIns="91425">
-            <a:noAutofit/>
-          </a:bodyPr>
-          <a:lstStyle/>
-          <a:p>
-            <a:pPr indent="0" lvl="0" marL="0" rtl="0" algn="ctr">
-              <a:spcBef>
-                <a:spcPts val="0"/>
-              </a:spcBef>
-              <a:spcAft>
-                <a:spcPts val="0"/>
-              </a:spcAft>
-              <a:buNone/>
-            </a:pPr>
-            <a:r>
-              <a:rPr lang="en">
-                <a:solidFill>
-                  <a:srgbClr val="1E1E1E"/>
-                </a:solidFill>
-                <a:latin typeface="Google Sans"/>
-                <a:ea typeface="Google Sans"/>
-                <a:cs typeface="Google Sans"/>
-                <a:sym typeface="Google Sans"/>
-              </a:rPr>
-              <a:t>Verify</a:t>
-            </a:r>
-            <a:endParaRPr>
-              <a:solidFill>
-                <a:srgbClr val="1E1E1E"/>
-              </a:solidFill>
-              <a:latin typeface="Google Sans"/>
-              <a:ea typeface="Google Sans"/>
-              <a:cs typeface="Google Sans"/>
-              <a:sym typeface="Google Sans"/>
-            </a:endParaRPr>
-          </a:p>
-        </p:txBody>
-      </p:sp>
-      <p:sp>
-        <p:nvSpPr>
-          <p:cNvPr id="127" name="Google Shape;127;p19"/>
-          <p:cNvSpPr/>
-          <p:nvPr/>
-        </p:nvSpPr>
-        <p:spPr>
-          <a:xfrm>
-            <a:off x="6355080" y="731520"/>
-            <a:ext cx="2377500" cy="3108900"/>
-          </a:xfrm>
-          <a:prstGeom prst="roundRect">
-            <a:avLst>
-              <a:gd fmla="val 16667" name="adj"/>
-            </a:avLst>
           </a:prstGeom>
           <a:solidFill>
             <a:srgbClr val="FFFFFF"/>
@@ -16666,30 +18381,207 @@
               <a:buNone/>
             </a:pPr>
             <a:r>
+              <a:rPr lang="en" sz="2400">
+                <a:solidFill>
+                  <a:srgbClr val="1E1E1E"/>
+                </a:solidFill>
+                <a:latin typeface="Google Sans"/>
+                <a:ea typeface="Google Sans"/>
+                <a:cs typeface="Google Sans"/>
+                <a:sym typeface="Google Sans"/>
+              </a:rPr>
+              <a:t>Run the Setup Script</a:t>
+            </a:r>
+            <a:endParaRPr sz="2400">
+              <a:solidFill>
+                <a:srgbClr val="1E1E1E"/>
+              </a:solidFill>
+              <a:latin typeface="Google Sans"/>
+              <a:ea typeface="Google Sans"/>
+              <a:cs typeface="Google Sans"/>
+              <a:sym typeface="Google Sans"/>
+            </a:endParaRPr>
+          </a:p>
+        </p:txBody>
+      </p:sp>
+      <p:sp>
+        <p:nvSpPr>
+          <p:cNvPr id="116" name="Google Shape;116;p19"/>
+          <p:cNvSpPr/>
+          <p:nvPr/>
+        </p:nvSpPr>
+        <p:spPr>
+          <a:xfrm>
+            <a:off x="7086600" y="393192"/>
+            <a:ext cx="1645920" cy="420606"/>
+          </a:xfrm>
+          <a:prstGeom prst="flowChartTerminator">
+            <a:avLst/>
+          </a:prstGeom>
+          <a:solidFill>
+            <a:srgbClr val="4285F4"/>
+          </a:solidFill>
+          <a:ln cap="flat" cmpd="sng" w="19050">
+            <a:solidFill>
+              <a:srgbClr val="1E1E1E"/>
+            </a:solidFill>
+            <a:prstDash val="solid"/>
+            <a:round/>
+            <a:headEnd len="sm" w="sm" type="none"/>
+            <a:tailEnd len="sm" w="sm" type="none"/>
+          </a:ln>
+        </p:spPr>
+        <p:txBody>
+          <a:bodyPr anchorCtr="0" anchor="ctr" bIns="91425" lIns="91425" spcFirstLastPara="1" rIns="91425" wrap="square" tIns="91425">
+            <a:noAutofit/>
+          </a:bodyPr>
+          <a:lstStyle/>
+          <a:p>
+            <a:pPr indent="0" lvl="0" marL="0" rtl="0" algn="ctr">
+              <a:spcBef>
+                <a:spcPts val="0"/>
+              </a:spcBef>
+              <a:spcAft>
+                <a:spcPts val="0"/>
+              </a:spcAft>
+              <a:buNone/>
+            </a:pPr>
+            <a:r>
+              <a:rPr lang="en">
+                <a:solidFill>
+                  <a:srgbClr val="FFFFFF"/>
+                </a:solidFill>
+                <a:latin typeface="Google Sans"/>
+                <a:ea typeface="Google Sans"/>
+                <a:cs typeface="Google Sans"/>
+                <a:sym typeface="Google Sans"/>
+              </a:rPr>
+              <a:t>Setup</a:t>
+            </a:r>
+            <a:endParaRPr>
+              <a:solidFill>
+                <a:srgbClr val="FFFFFF"/>
+              </a:solidFill>
+              <a:latin typeface="Google Sans"/>
+              <a:ea typeface="Google Sans"/>
+              <a:cs typeface="Google Sans"/>
+              <a:sym typeface="Google Sans"/>
+            </a:endParaRPr>
+          </a:p>
+        </p:txBody>
+      </p:sp>
+      <p:sp>
+        <p:nvSpPr>
+          <p:cNvPr id="117" name="Google Shape;117;p19"/>
+          <p:cNvSpPr/>
+          <p:nvPr/>
+        </p:nvSpPr>
+        <p:spPr>
+          <a:xfrm>
+            <a:off x="411480" y="1097280"/>
+            <a:ext cx="5715000" cy="3612000"/>
+          </a:xfrm>
+          <a:prstGeom prst="roundRect">
+            <a:avLst>
+              <a:gd fmla="val 16667" name="adj"/>
+            </a:avLst>
+          </a:prstGeom>
+          <a:solidFill>
+            <a:srgbClr val="C3ECF6"/>
+          </a:solidFill>
+          <a:ln cap="flat" cmpd="sng" w="19050">
+            <a:solidFill>
+              <a:srgbClr val="1E1E1E"/>
+            </a:solidFill>
+            <a:prstDash val="solid"/>
+            <a:round/>
+            <a:headEnd len="sm" w="sm" type="none"/>
+            <a:tailEnd len="sm" w="sm" type="none"/>
+          </a:ln>
+        </p:spPr>
+        <p:txBody>
+          <a:bodyPr anchorCtr="0" anchor="ctr" bIns="91425" lIns="91425" spcFirstLastPara="1" rIns="91425" wrap="square" tIns="91425">
+            <a:noAutofit/>
+          </a:bodyPr>
+          <a:lstStyle/>
+          <a:p>
+            <a:pPr indent="0" lvl="0" marL="0" rtl="0" algn="ctr">
+              <a:spcBef>
+                <a:spcPts val="0"/>
+              </a:spcBef>
+              <a:spcAft>
+                <a:spcPts val="0"/>
+              </a:spcAft>
+              <a:buNone/>
+            </a:pPr>
+            <a:r>
               <a:t/>
             </a:r>
             <a:endParaRPr/>
           </a:p>
         </p:txBody>
       </p:sp>
-      <p:pic>
-        <p:nvPicPr>
-          <p:cNvPr id="128" name="Google Shape;128;p19"/>
-          <p:cNvPicPr preferRelativeResize="0"/>
+      <p:sp>
+        <p:nvSpPr>
+          <p:cNvPr id="118" name="Google Shape;118;p19"/>
+          <p:cNvSpPr/>
           <p:nvPr/>
-        </p:nvPicPr>
-        <p:blipFill>
-          <a:blip r:embed="rId3">
-            <a:alphaModFix/>
-          </a:blip>
-          <a:stretch>
-            <a:fillRect/>
-          </a:stretch>
-        </p:blipFill>
-        <p:spPr>
-          <a:xfrm>
-            <a:off x="6537960" y="914400"/>
-            <a:ext cx="2011680" cy="2011680"/>
+        </p:nvSpPr>
+        <p:spPr>
+          <a:xfrm>
+            <a:off x="6355080" y="1097280"/>
+            <a:ext cx="2377500" cy="3612000"/>
+          </a:xfrm>
+          <a:prstGeom prst="roundRect">
+            <a:avLst>
+              <a:gd fmla="val 16667" name="adj"/>
+            </a:avLst>
+          </a:prstGeom>
+          <a:solidFill>
+            <a:srgbClr val="FFFFFF"/>
+          </a:solidFill>
+          <a:ln cap="flat" cmpd="sng" w="19050">
+            <a:solidFill>
+              <a:srgbClr val="1E1E1E"/>
+            </a:solidFill>
+            <a:prstDash val="solid"/>
+            <a:round/>
+            <a:headEnd len="sm" w="sm" type="none"/>
+            <a:tailEnd len="sm" w="sm" type="none"/>
+          </a:ln>
+        </p:spPr>
+        <p:txBody>
+          <a:bodyPr anchorCtr="0" anchor="ctr" bIns="91425" lIns="91425" spcFirstLastPara="1" rIns="91425" wrap="square" tIns="91425">
+            <a:noAutofit/>
+          </a:bodyPr>
+          <a:lstStyle/>
+          <a:p>
+            <a:pPr indent="0" lvl="0" marL="0" rtl="0" algn="ctr">
+              <a:spcBef>
+                <a:spcPts val="0"/>
+              </a:spcBef>
+              <a:spcAft>
+                <a:spcPts val="0"/>
+              </a:spcAft>
+              <a:buNone/>
+            </a:pPr>
+            <a:r>
+              <a:t/>
+            </a:r>
+            <a:endParaRPr/>
+          </a:p>
+        </p:txBody>
+      </p:sp>
+      <p:sp>
+        <p:nvSpPr>
+          <p:cNvPr id="119" name="Google Shape;119;p19"/>
+          <p:cNvSpPr txBox="1"/>
+          <p:nvPr/>
+        </p:nvSpPr>
+        <p:spPr>
+          <a:xfrm>
+            <a:off x="731520" y="1463040"/>
+            <a:ext cx="5120700" cy="3108900"/>
           </a:xfrm>
           <a:prstGeom prst="rect">
             <a:avLst/>
@@ -16699,16 +18591,183 @@
             <a:noFill/>
           </a:ln>
         </p:spPr>
-      </p:pic>
-      <p:sp>
-        <p:nvSpPr>
-          <p:cNvPr id="129" name="Google Shape;129;p19"/>
+        <p:txBody>
+          <a:bodyPr anchorCtr="0" anchor="t" bIns="91425" lIns="91425" spcFirstLastPara="1" rIns="91425" wrap="square" tIns="91425">
+            <a:noAutofit/>
+          </a:bodyPr>
+          <a:lstStyle/>
+          <a:p>
+            <a:pPr indent="-342900" lvl="0" marL="457200" rtl="0" algn="l">
+              <a:spcBef>
+                <a:spcPts val="0"/>
+              </a:spcBef>
+              <a:spcAft>
+                <a:spcPts val="0"/>
+              </a:spcAft>
+              <a:buClr>
+                <a:srgbClr val="1E1E1E"/>
+              </a:buClr>
+              <a:buSzPts val="1800"/>
+              <a:buFont typeface="Google Sans"/>
+              <a:buChar char="●"/>
+            </a:pPr>
+            <a:r>
+              <a:rPr lang="en" sz="1800">
+                <a:solidFill>
+                  <a:srgbClr val="1E1E1E"/>
+                </a:solidFill>
+                <a:latin typeface="Google Sans"/>
+                <a:ea typeface="Google Sans"/>
+                <a:cs typeface="Google Sans"/>
+                <a:sym typeface="Google Sans"/>
+              </a:rPr>
+              <a:t>Open a new window with the same Gmail</a:t>
+            </a:r>
+            <a:endParaRPr sz="1800">
+              <a:solidFill>
+                <a:srgbClr val="1E1E1E"/>
+              </a:solidFill>
+              <a:latin typeface="Google Sans"/>
+              <a:ea typeface="Google Sans"/>
+              <a:cs typeface="Google Sans"/>
+              <a:sym typeface="Google Sans"/>
+            </a:endParaRPr>
+          </a:p>
+          <a:p>
+            <a:pPr indent="-342900" lvl="0" marL="457200" rtl="0" algn="l">
+              <a:spcBef>
+                <a:spcPts val="1200"/>
+              </a:spcBef>
+              <a:spcAft>
+                <a:spcPts val="0"/>
+              </a:spcAft>
+              <a:buClr>
+                <a:srgbClr val="1E1E1E"/>
+              </a:buClr>
+              <a:buSzPts val="1800"/>
+              <a:buFont typeface="Google Sans"/>
+              <a:buChar char="●"/>
+            </a:pPr>
+            <a:r>
+              <a:rPr lang="en" sz="1800">
+                <a:solidFill>
+                  <a:srgbClr val="1E1E1E"/>
+                </a:solidFill>
+                <a:latin typeface="Google Sans"/>
+                <a:ea typeface="Google Sans"/>
+                <a:cs typeface="Google Sans"/>
+                <a:sym typeface="Google Sans"/>
+              </a:rPr>
+              <a:t>Scan the QR, or open </a:t>
+            </a:r>
+            <a:r>
+              <a:rPr lang="en" sz="1800" u="sng">
+                <a:solidFill>
+                  <a:schemeClr val="hlink"/>
+                </a:solidFill>
+                <a:latin typeface="Google Sans"/>
+                <a:ea typeface="Google Sans"/>
+                <a:cs typeface="Google Sans"/>
+                <a:sym typeface="Google Sans"/>
+                <a:hlinkClick r:id="rId3"/>
+              </a:rPr>
+              <a:t>github.com/harrisonahn1129/gdg_workshop_skills</a:t>
+            </a:r>
+            <a:endParaRPr sz="1800">
+              <a:solidFill>
+                <a:srgbClr val="1E1E1E"/>
+              </a:solidFill>
+              <a:latin typeface="Google Sans"/>
+              <a:ea typeface="Google Sans"/>
+              <a:cs typeface="Google Sans"/>
+              <a:sym typeface="Google Sans"/>
+            </a:endParaRPr>
+          </a:p>
+          <a:p>
+            <a:pPr indent="-342900" lvl="0" marL="457200" rtl="0" algn="l">
+              <a:spcBef>
+                <a:spcPts val="1200"/>
+              </a:spcBef>
+              <a:spcAft>
+                <a:spcPts val="0"/>
+              </a:spcAft>
+              <a:buClr>
+                <a:srgbClr val="1E1E1E"/>
+              </a:buClr>
+              <a:buSzPts val="1800"/>
+              <a:buFont typeface="Google Sans"/>
+              <a:buChar char="●"/>
+            </a:pPr>
+            <a:r>
+              <a:rPr lang="en" sz="1800">
+                <a:solidFill>
+                  <a:srgbClr val="1E1E1E"/>
+                </a:solidFill>
+                <a:latin typeface="Google Sans"/>
+                <a:ea typeface="Google Sans"/>
+                <a:cs typeface="Google Sans"/>
+                <a:sym typeface="Google Sans"/>
+              </a:rPr>
+              <a:t>Click Open in Cloud Shell, type bash setup.sh</a:t>
+            </a:r>
+            <a:endParaRPr sz="1800">
+              <a:solidFill>
+                <a:srgbClr val="1E1E1E"/>
+              </a:solidFill>
+              <a:latin typeface="Google Sans"/>
+              <a:ea typeface="Google Sans"/>
+              <a:cs typeface="Google Sans"/>
+              <a:sym typeface="Google Sans"/>
+            </a:endParaRPr>
+          </a:p>
+          <a:p>
+            <a:pPr indent="-342900" lvl="0" marL="457200" rtl="0" algn="l">
+              <a:spcBef>
+                <a:spcPts val="1200"/>
+              </a:spcBef>
+              <a:spcAft>
+                <a:spcPts val="1200"/>
+              </a:spcAft>
+              <a:buClr>
+                <a:srgbClr val="1E1E1E"/>
+              </a:buClr>
+              <a:buSzPts val="1800"/>
+              <a:buFont typeface="Google Sans"/>
+              <a:buChar char="●"/>
+            </a:pPr>
+            <a:r>
+              <a:rPr lang="en" sz="1800">
+                <a:solidFill>
+                  <a:srgbClr val="1E1E1E"/>
+                </a:solidFill>
+                <a:latin typeface="Google Sans"/>
+                <a:ea typeface="Google Sans"/>
+                <a:cs typeface="Google Sans"/>
+                <a:sym typeface="Google Sans"/>
+              </a:rPr>
+              <a:t>All green: done. Any red: ask a TA</a:t>
+            </a:r>
+            <a:endParaRPr sz="1800">
+              <a:solidFill>
+                <a:srgbClr val="1E1E1E"/>
+              </a:solidFill>
+              <a:latin typeface="Google Sans"/>
+              <a:ea typeface="Google Sans"/>
+              <a:cs typeface="Google Sans"/>
+              <a:sym typeface="Google Sans"/>
+            </a:endParaRPr>
+          </a:p>
+        </p:txBody>
+      </p:sp>
+      <p:sp>
+        <p:nvSpPr>
+          <p:cNvPr id="120" name="Google Shape;120;p19"/>
           <p:cNvSpPr txBox="1"/>
           <p:nvPr/>
         </p:nvSpPr>
         <p:spPr>
           <a:xfrm>
-            <a:off x="6492240" y="3063240"/>
+            <a:off x="6492240" y="3566160"/>
             <a:ext cx="2103000" cy="457200"/>
           </a:xfrm>
           <a:prstGeom prst="rect">
@@ -16744,7 +18803,7 @@
                 <a:cs typeface="Google Sans"/>
                 <a:sym typeface="Google Sans"/>
               </a:rPr>
-              <a:t>Scan for the codelab</a:t>
+              <a:t>Setup repo</a:t>
             </a:r>
             <a:endParaRPr sz="1600">
               <a:solidFill>
@@ -16758,6 +18817,34 @@
           </a:p>
         </p:txBody>
       </p:sp>
+      <p:pic>
+        <p:nvPicPr>
+          <p:cNvPr id="121" name="Google Shape;121;p19"/>
+          <p:cNvPicPr preferRelativeResize="0"/>
+          <p:nvPr/>
+        </p:nvPicPr>
+        <p:blipFill>
+          <a:blip r:embed="rId4">
+            <a:alphaModFix/>
+          </a:blip>
+          <a:stretch>
+            <a:fillRect/>
+          </a:stretch>
+        </p:blipFill>
+        <p:spPr>
+          <a:xfrm>
+            <a:off x="6537960" y="1417320"/>
+            <a:ext cx="2011680" cy="2011680"/>
+          </a:xfrm>
+          <a:prstGeom prst="rect">
+            <a:avLst/>
+          </a:prstGeom>
+          <a:noFill/>
+          <a:ln>
+            <a:noFill/>
+          </a:ln>
+        </p:spPr>
+      </p:pic>
     </p:spTree>
   </p:cSld>
   <p:clrMapOvr>
@@ -16778,7 +18865,7 @@
     </p:bg>
     <p:spTree>
       <p:nvGrpSpPr>
-        <p:cNvPr id="133" name="Shape 133"/>
+        <p:cNvPr id="125" name="Shape 125"/>
         <p:cNvGrpSpPr/>
         <p:nvPr/>
       </p:nvGrpSpPr>
@@ -16792,14 +18879,14 @@
       </p:grpSpPr>
       <p:sp>
         <p:nvSpPr>
-          <p:cNvPr id="134" name="Google Shape;134;p20"/>
+          <p:cNvPr id="126" name="Google Shape;126;p20"/>
           <p:cNvSpPr/>
           <p:nvPr/>
         </p:nvSpPr>
         <p:spPr>
           <a:xfrm>
             <a:off x="411480" y="320040"/>
-            <a:ext cx="6080562" cy="566946"/>
+            <a:ext cx="5600394" cy="566946"/>
           </a:xfrm>
           <a:prstGeom prst="flowChartTerminator">
             <a:avLst/>
@@ -16842,7 +18929,7 @@
                 <a:cs typeface="Google Sans"/>
                 <a:sym typeface="Google Sans"/>
               </a:rPr>
-              <a:t>Install and Sign In to Antigravity</a:t>
+              <a:t>Install Antigravity</a:t>
             </a:r>
             <a:endParaRPr sz="2400">
               <a:solidFill>
@@ -16858,7 +18945,7 @@
       </p:sp>
       <p:sp>
         <p:nvSpPr>
-          <p:cNvPr id="135" name="Google Shape;135;p20"/>
+          <p:cNvPr id="127" name="Google Shape;127;p20"/>
           <p:cNvSpPr/>
           <p:nvPr/>
         </p:nvSpPr>
@@ -16871,7 +18958,7 @@
             <a:avLst/>
           </a:prstGeom>
           <a:solidFill>
-            <a:srgbClr val="5CDB6D"/>
+            <a:srgbClr val="4285F4"/>
           </a:solidFill>
           <a:ln cap="flat" cmpd="sng" w="19050">
             <a:solidFill>
@@ -16901,18 +18988,18 @@
             <a:r>
               <a:rPr lang="en">
                 <a:solidFill>
-                  <a:srgbClr val="1E1E1E"/>
+                  <a:srgbClr val="FFFFFF"/>
                 </a:solidFill>
                 <a:latin typeface="Google Sans"/>
                 <a:ea typeface="Google Sans"/>
                 <a:cs typeface="Google Sans"/>
                 <a:sym typeface="Google Sans"/>
               </a:rPr>
-              <a:t>Step 1</a:t>
+              <a:t>Setup</a:t>
             </a:r>
             <a:endParaRPr>
               <a:solidFill>
-                <a:srgbClr val="1E1E1E"/>
+                <a:srgbClr val="FFFFFF"/>
               </a:solidFill>
               <a:latin typeface="Google Sans"/>
               <a:ea typeface="Google Sans"/>
@@ -16924,7 +19011,7 @@
       </p:sp>
       <p:sp>
         <p:nvSpPr>
-          <p:cNvPr id="136" name="Google Shape;136;p20"/>
+          <p:cNvPr id="128" name="Google Shape;128;p20"/>
           <p:cNvSpPr/>
           <p:nvPr/>
         </p:nvSpPr>
@@ -16939,7 +19026,7 @@
             </a:avLst>
           </a:prstGeom>
           <a:solidFill>
-            <a:srgbClr val="CCF6C5"/>
+            <a:srgbClr val="C3ECF6"/>
           </a:solidFill>
           <a:ln cap="flat" cmpd="sng" w="19050">
             <a:solidFill>
@@ -16975,7 +19062,7 @@
       </p:sp>
       <p:sp>
         <p:nvSpPr>
-          <p:cNvPr id="137" name="Google Shape;137;p20"/>
+          <p:cNvPr id="129" name="Google Shape;129;p20"/>
           <p:cNvSpPr/>
           <p:nvPr/>
         </p:nvSpPr>
@@ -17026,7 +19113,7 @@
       </p:sp>
       <p:sp>
         <p:nvSpPr>
-          <p:cNvPr id="138" name="Google Shape;138;p20"/>
+          <p:cNvPr id="130" name="Google Shape;130;p20"/>
           <p:cNvSpPr txBox="1"/>
           <p:nvPr/>
         </p:nvSpPr>
@@ -17073,7 +19160,7 @@
                 <a:cs typeface="Google Sans"/>
                 <a:sym typeface="Google Sans"/>
               </a:rPr>
-              <a:t>Download Antigravity 2.0 from antigravity.google/download</a:t>
+              <a:t>Download from antigravity.google/download</a:t>
             </a:r>
             <a:endParaRPr sz="1800">
               <a:solidFill>
@@ -17147,7 +19234,7 @@
                 <a:cs typeface="Google Sans"/>
                 <a:sym typeface="Google Sans"/>
               </a:rPr>
-              <a:t>Sign in with the Google account you will use for Google Cloud</a:t>
+              <a:t>Git, and a GitHub account that can clone</a:t>
             </a:r>
             <a:endParaRPr sz="1800">
               <a:solidFill>
@@ -17184,7 +19271,7 @@
                 <a:cs typeface="Google Sans"/>
                 <a:sym typeface="Google Sans"/>
               </a:rPr>
-              <a:t>Check: the welcome screen shows Open Folder and Clone Repository</a:t>
+              <a:t>Don't click Sign in yet: next slide</a:t>
             </a:r>
             <a:endParaRPr sz="1800">
               <a:solidFill>
@@ -17200,7 +19287,7 @@
       </p:sp>
       <p:sp>
         <p:nvSpPr>
-          <p:cNvPr id="139" name="Google Shape;139;p20"/>
+          <p:cNvPr id="131" name="Google Shape;131;p20"/>
           <p:cNvSpPr txBox="1"/>
           <p:nvPr/>
         </p:nvSpPr>
@@ -17242,7 +19329,7 @@
                 <a:cs typeface="Google Sans"/>
                 <a:sym typeface="Google Sans"/>
               </a:rPr>
-              <a:t>Codelab step 1</a:t>
+              <a:t>Antigravity setup</a:t>
             </a:r>
             <a:endParaRPr sz="1600">
               <a:solidFill>
@@ -17258,7 +19345,7 @@
       </p:sp>
       <p:pic>
         <p:nvPicPr>
-          <p:cNvPr id="140" name="Google Shape;140;p20"/>
+          <p:cNvPr id="132" name="Google Shape;132;p20"/>
           <p:cNvPicPr preferRelativeResize="0"/>
           <p:nvPr/>
         </p:nvPicPr>
@@ -17304,7 +19391,7 @@
     </p:bg>
     <p:spTree>
       <p:nvGrpSpPr>
-        <p:cNvPr id="144" name="Shape 144"/>
+        <p:cNvPr id="136" name="Shape 136"/>
         <p:cNvGrpSpPr/>
         <p:nvPr/>
       </p:nvGrpSpPr>
@@ -17318,14 +19405,14 @@
       </p:grpSpPr>
       <p:sp>
         <p:nvSpPr>
-          <p:cNvPr id="145" name="Google Shape;145;p21"/>
+          <p:cNvPr id="137" name="Google Shape;137;p21"/>
           <p:cNvSpPr/>
           <p:nvPr/>
         </p:nvSpPr>
         <p:spPr>
           <a:xfrm>
             <a:off x="411480" y="320040"/>
-            <a:ext cx="5920668" cy="566946"/>
+            <a:ext cx="5600394" cy="566946"/>
           </a:xfrm>
           <a:prstGeom prst="flowChartTerminator">
             <a:avLst/>
@@ -17368,7 +19455,7 @@
                 <a:cs typeface="Google Sans"/>
                 <a:sym typeface="Google Sans"/>
               </a:rPr>
-              <a:t>Install uv and Git With the Agent</a:t>
+              <a:t>Sign In With Your Credit</a:t>
             </a:r>
             <a:endParaRPr sz="2400">
               <a:solidFill>
@@ -17384,7 +19471,7 @@
       </p:sp>
       <p:sp>
         <p:nvSpPr>
-          <p:cNvPr id="146" name="Google Shape;146;p21"/>
+          <p:cNvPr id="138" name="Google Shape;138;p21"/>
           <p:cNvSpPr/>
           <p:nvPr/>
         </p:nvSpPr>
@@ -17397,7 +19484,7 @@
             <a:avLst/>
           </a:prstGeom>
           <a:solidFill>
-            <a:srgbClr val="5CDB6D"/>
+            <a:srgbClr val="4285F4"/>
           </a:solidFill>
           <a:ln cap="flat" cmpd="sng" w="19050">
             <a:solidFill>
@@ -17427,18 +19514,18 @@
             <a:r>
               <a:rPr lang="en">
                 <a:solidFill>
-                  <a:srgbClr val="1E1E1E"/>
+                  <a:srgbClr val="FFFFFF"/>
                 </a:solidFill>
                 <a:latin typeface="Google Sans"/>
                 <a:ea typeface="Google Sans"/>
                 <a:cs typeface="Google Sans"/>
                 <a:sym typeface="Google Sans"/>
               </a:rPr>
-              <a:t>Step 2</a:t>
+              <a:t>Setup</a:t>
             </a:r>
             <a:endParaRPr>
               <a:solidFill>
-                <a:srgbClr val="1E1E1E"/>
+                <a:srgbClr val="FFFFFF"/>
               </a:solidFill>
               <a:latin typeface="Google Sans"/>
               <a:ea typeface="Google Sans"/>
@@ -17450,7 +19537,7 @@
       </p:sp>
       <p:sp>
         <p:nvSpPr>
-          <p:cNvPr id="147" name="Google Shape;147;p21"/>
+          <p:cNvPr id="139" name="Google Shape;139;p21"/>
           <p:cNvSpPr/>
           <p:nvPr/>
         </p:nvSpPr>
@@ -17465,7 +19552,7 @@
             </a:avLst>
           </a:prstGeom>
           <a:solidFill>
-            <a:srgbClr val="CCF6C5"/>
+            <a:srgbClr val="C3ECF6"/>
           </a:solidFill>
           <a:ln cap="flat" cmpd="sng" w="19050">
             <a:solidFill>
@@ -17501,7 +19588,7 @@
       </p:sp>
       <p:sp>
         <p:nvSpPr>
-          <p:cNvPr id="148" name="Google Shape;148;p21"/>
+          <p:cNvPr id="140" name="Google Shape;140;p21"/>
           <p:cNvSpPr/>
           <p:nvPr/>
         </p:nvSpPr>
@@ -17552,7 +19639,7 @@
       </p:sp>
       <p:sp>
         <p:nvSpPr>
-          <p:cNvPr id="149" name="Google Shape;149;p21"/>
+          <p:cNvPr id="141" name="Google Shape;141;p21"/>
           <p:cNvSpPr txBox="1"/>
           <p:nvPr/>
         </p:nvSpPr>
@@ -17599,7 +19686,7 @@
                 <a:cs typeface="Google Sans"/>
                 <a:sym typeface="Google Sans"/>
               </a:rPr>
-              <a:t>Open an empty folder, such as coding-jam-setup</a:t>
+              <a:t>Open Antigravity and click Sign in</a:t>
             </a:r>
             <a:endParaRPr sz="1800">
               <a:solidFill>
@@ -17636,7 +19723,7 @@
                 <a:cs typeface="Google Sans"/>
                 <a:sym typeface="Google Sans"/>
               </a:rPr>
-              <a:t>Prompt: “Install uv and git on my computer if they're not already there.”</a:t>
+              <a:t>Choose Business account</a:t>
             </a:r>
             <a:endParaRPr sz="1800">
               <a:solidFill>
@@ -17673,7 +19760,7 @@
                 <a:cs typeface="Google Sans"/>
                 <a:sym typeface="Google Sans"/>
               </a:rPr>
-              <a:t>Approve each install command; skip Node.js</a:t>
+              <a:t>Continue with Google Cloud, same Gmail</a:t>
             </a:r>
             <a:endParaRPr sz="1800">
               <a:solidFill>
@@ -17691,7 +19778,7 @@
                 <a:spcPts val="1200"/>
               </a:spcBef>
               <a:spcAft>
-                <a:spcPts val="1200"/>
+                <a:spcPts val="0"/>
               </a:spcAft>
               <a:buClr>
                 <a:srgbClr val="1E1E1E"/>
@@ -17710,7 +19797,7 @@
                 <a:cs typeface="Google Sans"/>
                 <a:sym typeface="Google Sans"/>
               </a:rPr>
-              <a:t>If it fails, install uv and git by hand, then ask the agent to check</a:t>
+              <a:t>Choose Other: your project ID, location global</a:t>
             </a:r>
             <a:endParaRPr sz="1800">
               <a:solidFill>
@@ -17722,18 +19809,55 @@
               <a:sym typeface="Google Sans"/>
             </a:endParaRPr>
           </a:p>
+          <a:p>
+            <a:pPr indent="-342900" lvl="0" marL="457200" rtl="0" algn="l">
+              <a:spcBef>
+                <a:spcPts val="1200"/>
+              </a:spcBef>
+              <a:spcAft>
+                <a:spcPts val="1200"/>
+              </a:spcAft>
+              <a:buClr>
+                <a:srgbClr val="1E1E1E"/>
+              </a:buClr>
+              <a:buSzPts val="1800"/>
+              <a:buFont typeface="Google Sans"/>
+              <a:buChar char="●"/>
+            </a:pPr>
+            <a:r>
+              <a:rPr lang="en" sz="1800">
+                <a:solidFill>
+                  <a:srgbClr val="1E1E1E"/>
+                </a:solidFill>
+                <a:latin typeface="Google Sans"/>
+                <a:ea typeface="Google Sans"/>
+                <a:cs typeface="Google Sans"/>
+                <a:sym typeface="Google Sans"/>
+              </a:rPr>
+              <a:t>Agent stops mid-build? You're on the free plan: sign out, repeat</a:t>
+            </a:r>
+            <a:endParaRPr sz="1800">
+              <a:solidFill>
+                <a:srgbClr val="1E1E1E"/>
+              </a:solidFill>
+              <a:latin typeface="Google Sans"/>
+              <a:ea typeface="Google Sans"/>
+              <a:cs typeface="Google Sans"/>
+              <a:sym typeface="Google Sans"/>
+            </a:endParaRPr>
+          </a:p>
         </p:txBody>
       </p:sp>
       <p:sp>
         <p:nvSpPr>
-          <p:cNvPr id="150" name="Google Shape;150;p21"/>
+          <p:cNvPr id="142" name="Google Shape;142;p21"/>
           <p:cNvSpPr txBox="1"/>
           <p:nvPr/>
         </p:nvSpPr>
         <p:spPr>
           <a:xfrm>
-            <a:off x="6492240" y="3566160"/>
-            <a:ext cx="2103000" cy="457200"/>
+            <a:off x="6492240" y="1371600"/>
+            <a:ext cx="2103000" cy="3291900"/>
           </a:xfrm>
           <a:prstGeom prst="rect">
             <a:avLst/>
@@ -17749,9 +19873,41 @@
           </a:bodyPr>
           <a:lstStyle/>
           <a:p>
-            <a:pPr indent="0" lvl="0" marL="0" rtl="0" algn="ctr">
-              <a:spcBef>
-                <a:spcPts val="0"/>
+            <a:pPr indent="0" lvl="0" marL="0" rtl="0" algn="l">
+              <a:spcBef>
+                <a:spcPts val="0"/>
+              </a:spcBef>
+              <a:spcAft>
+                <a:spcPts val="0"/>
+              </a:spcAft>
+              <a:buNone/>
+            </a:pPr>
+            <a:r>
+              <a:rPr b="1" lang="en" sz="1600">
+                <a:solidFill>
+                  <a:srgbClr val="1E1E1E"/>
+                </a:solidFill>
+                <a:latin typeface="Google Sans"/>
+                <a:ea typeface="Google Sans"/>
+                <a:cs typeface="Google Sans"/>
+                <a:sym typeface="Google Sans"/>
+              </a:rPr>
+              <a:t>Free plan</a:t>
+            </a:r>
+            <a:endParaRPr b="1" sz="1600">
+              <a:solidFill>
+                <a:srgbClr val="1E1E1E"/>
+              </a:solidFill>
+              <a:latin typeface="Google Sans"/>
+              <a:ea typeface="Google Sans"/>
+              <a:cs typeface="Google Sans"/>
+              <a:sym typeface="Google Sans"/>
+            </a:endParaRPr>
+          </a:p>
+          <a:p>
+            <a:pPr indent="0" lvl="0" marL="0" rtl="0" algn="l">
+              <a:spcBef>
+                <a:spcPts val="400"/>
               </a:spcBef>
               <a:spcAft>
                 <a:spcPts val="0"/>
@@ -17768,7 +19924,7 @@
                 <a:cs typeface="Google Sans"/>
                 <a:sym typeface="Google Sans"/>
               </a:rPr>
-              <a:t>Codelab step 2</a:t>
+              <a:t>Sign in without Business account. Weekly limit, then the agent stops.</a:t>
             </a:r>
             <a:endParaRPr sz="1600">
               <a:solidFill>
@@ -17780,36 +19936,95 @@
               <a:sym typeface="Google Sans"/>
             </a:endParaRPr>
           </a:p>
+          <a:p>
+            <a:pPr indent="0" lvl="0" marL="0" rtl="0" algn="l">
+              <a:spcBef>
+                <a:spcPts val="400"/>
+              </a:spcBef>
+              <a:spcAft>
+                <a:spcPts val="0"/>
+              </a:spcAft>
+              <a:buNone/>
+            </a:pPr>
+            <a:r>
+              <a:t/>
+            </a:r>
+            <a:endParaRPr sz="1600">
+              <a:solidFill>
+                <a:srgbClr val="1E1E1E"/>
+              </a:solidFill>
+              <a:latin typeface="Google Sans"/>
+              <a:ea typeface="Google Sans"/>
+              <a:cs typeface="Google Sans"/>
+              <a:sym typeface="Google Sans"/>
+            </a:endParaRPr>
+          </a:p>
+          <a:p>
+            <a:pPr indent="0" lvl="0" marL="0" rtl="0" algn="l">
+              <a:spcBef>
+                <a:spcPts val="400"/>
+              </a:spcBef>
+              <a:spcAft>
+                <a:spcPts val="0"/>
+              </a:spcAft>
+              <a:buNone/>
+            </a:pPr>
+            <a:r>
+              <a:rPr b="1" lang="en" sz="1600">
+                <a:solidFill>
+                  <a:srgbClr val="1E1E1E"/>
+                </a:solidFill>
+                <a:latin typeface="Google Sans"/>
+                <a:ea typeface="Google Sans"/>
+                <a:cs typeface="Google Sans"/>
+                <a:sym typeface="Google Sans"/>
+              </a:rPr>
+              <a:t>Your credit</a:t>
+            </a:r>
+            <a:endParaRPr b="1" sz="1600">
+              <a:solidFill>
+                <a:srgbClr val="1E1E1E"/>
+              </a:solidFill>
+              <a:latin typeface="Google Sans"/>
+              <a:ea typeface="Google Sans"/>
+              <a:cs typeface="Google Sans"/>
+              <a:sym typeface="Google Sans"/>
+            </a:endParaRPr>
+          </a:p>
+          <a:p>
+            <a:pPr indent="0" lvl="0" marL="0" rtl="0" algn="l">
+              <a:spcBef>
+                <a:spcPts val="400"/>
+              </a:spcBef>
+              <a:spcAft>
+                <a:spcPts val="400"/>
+              </a:spcAft>
+              <a:buNone/>
+            </a:pPr>
+            <a:r>
+              <a:rPr lang="en" sz="1600">
+                <a:solidFill>
+                  <a:srgbClr val="1E1E1E"/>
+                </a:solidFill>
+                <a:latin typeface="Google Sans"/>
+                <a:ea typeface="Google Sans"/>
+                <a:cs typeface="Google Sans"/>
+                <a:sym typeface="Google Sans"/>
+              </a:rPr>
+              <a:t>Business account and your project ID. Build on this today.</a:t>
+            </a:r>
+            <a:endParaRPr sz="1600">
+              <a:solidFill>
+                <a:srgbClr val="1E1E1E"/>
+              </a:solidFill>
+              <a:latin typeface="Google Sans"/>
+              <a:ea typeface="Google Sans"/>
+              <a:cs typeface="Google Sans"/>
+              <a:sym typeface="Google Sans"/>
+            </a:endParaRPr>
+          </a:p>
         </p:txBody>
       </p:sp>
-      <p:pic>
-        <p:nvPicPr>
-          <p:cNvPr id="151" name="Google Shape;151;p21"/>
-          <p:cNvPicPr preferRelativeResize="0"/>
-          <p:nvPr/>
-        </p:nvPicPr>
-        <p:blipFill>
-          <a:blip r:embed="rId3">
-            <a:alphaModFix/>
-          </a:blip>
-          <a:stretch>
-            <a:fillRect/>
-          </a:stretch>
-        </p:blipFill>
-        <p:spPr>
-          <a:xfrm>
-            <a:off x="6537960" y="1417320"/>
-            <a:ext cx="2011680" cy="2011680"/>
-          </a:xfrm>
-          <a:prstGeom prst="rect">
-            <a:avLst/>
-          </a:prstGeom>
-          <a:noFill/>
-          <a:ln>
-            <a:noFill/>
-          </a:ln>
-        </p:spPr>
-      </p:pic>
     </p:spTree>
   </p:cSld>
   <p:clrMapOvr>
@@ -17819,6 +20034,285 @@
 </file>
 
 <file path=ppt/theme/theme1.xml><?xml version="1.0" encoding="utf-8"?>
+<a:theme xmlns:a="http://schemas.openxmlformats.org/drawingml/2006/main" xmlns:r="http://schemas.openxmlformats.org/officeDocument/2006/relationships" name="Simple Light">
+  <a:themeElements>
+    <a:clrScheme name="Simple Light">
+      <a:dk1>
+        <a:srgbClr val="000000"/>
+      </a:dk1>
+      <a:lt1>
+        <a:srgbClr val="FFFFFF"/>
+      </a:lt1>
+      <a:dk2>
+        <a:srgbClr val="595959"/>
+      </a:dk2>
+      <a:lt2>
+        <a:srgbClr val="EEEEEE"/>
+      </a:lt2>
+      <a:accent1>
+        <a:srgbClr val="4285F4"/>
+      </a:accent1>
+      <a:accent2>
+        <a:srgbClr val="212121"/>
+      </a:accent2>
+      <a:accent3>
+        <a:srgbClr val="78909C"/>
+      </a:accent3>
+      <a:accent4>
+        <a:srgbClr val="FFAB40"/>
+      </a:accent4>
+      <a:accent5>
+        <a:srgbClr val="0097A7"/>
+      </a:accent5>
+      <a:accent6>
+        <a:srgbClr val="EEFF41"/>
+      </a:accent6>
+      <a:hlink>
+        <a:srgbClr val="0097A7"/>
+      </a:hlink>
+      <a:folHlink>
+        <a:srgbClr val="0097A7"/>
+      </a:folHlink>
+    </a:clrScheme>
+    <a:fontScheme name="Office">
+      <a:majorFont>
+        <a:latin typeface="Arial"/>
+        <a:ea typeface=""/>
+        <a:cs typeface=""/>
+        <a:font script="Jpan" typeface="ＭＳ Ｐゴシック"/>
+        <a:font script="Hang" typeface="맑은 고딕"/>
+        <a:font script="Hans" typeface="宋体"/>
+        <a:font script="Hant" typeface="新細明體"/>
+        <a:font script="Arab" typeface="Times New Roman"/>
+        <a:font script="Hebr" typeface="Times New Roman"/>
+        <a:font script="Thai" typeface="Angsana New"/>
+        <a:font script="Ethi" typeface="Nyala"/>
+        <a:font script="Beng" typeface="Vrinda"/>
+        <a:font script="Gujr" typeface="Shruti"/>
+        <a:font script="Khmr" typeface="MoolBoran"/>
+        <a:font script="Knda" typeface="Tunga"/>
+        <a:font script="Guru" typeface="Raavi"/>
+        <a:font script="Cans" typeface="Euphemia"/>
+        <a:font script="Cher" typeface="Plantagenet Cherokee"/>
+        <a:font script="Yiii" typeface="Microsoft Yi Baiti"/>
+        <a:font script="Tibt" typeface="Microsoft Himalaya"/>
+        <a:font script="Thaa" typeface="MV Boli"/>
+        <a:font script="Deva" typeface="Mangal"/>
+        <a:font script="Telu" typeface="Gautami"/>
+        <a:font script="Taml" typeface="Latha"/>
+        <a:font script="Syrc" typeface="Estrangelo Edessa"/>
+        <a:font script="Orya" typeface="Kalinga"/>
+        <a:font script="Mlym" typeface="Kartika"/>
+        <a:font script="Laoo" typeface="DokChampa"/>
+        <a:font script="Sinh" typeface="Iskoola Pota"/>
+        <a:font script="Mong" typeface="Mongolian Baiti"/>
+        <a:font script="Viet" typeface="Times New Roman"/>
+        <a:font script="Uigh" typeface="Microsoft Uighur"/>
+        <a:font script="Geor" typeface="Sylfaen"/>
+      </a:majorFont>
+      <a:minorFont>
+        <a:latin typeface="Arial"/>
+        <a:ea typeface=""/>
+        <a:cs typeface=""/>
+        <a:font script="Jpan" typeface="ＭＳ Ｐゴシック"/>
+        <a:font script="Hang" typeface="맑은 고딕"/>
+        <a:font script="Hans" typeface="宋体"/>
+        <a:font script="Hant" typeface="新細明體"/>
+        <a:font script="Arab" typeface="Arial"/>
+        <a:font script="Hebr" typeface="Arial"/>
+        <a:font script="Thai" typeface="Cordia New"/>
+        <a:font script="Ethi" typeface="Nyala"/>
+        <a:font script="Beng" typeface="Vrinda"/>
+        <a:font script="Gujr" typeface="Shruti"/>
+        <a:font script="Khmr" typeface="DaunPenh"/>
+        <a:font script="Knda" typeface="Tunga"/>
+        <a:font script="Guru" typeface="Raavi"/>
+        <a:font script="Cans" typeface="Euphemia"/>
+        <a:font script="Cher" typeface="Plantagenet Cherokee"/>
+        <a:font script="Yiii" typeface="Microsoft Yi Baiti"/>
+        <a:font script="Tibt" typeface="Microsoft Himalaya"/>
+        <a:font script="Thaa" typeface="MV Boli"/>
+        <a:font script="Deva" typeface="Mangal"/>
+        <a:font script="Telu" typeface="Gautami"/>
+        <a:font script="Taml" typeface="Latha"/>
+        <a:font script="Syrc" typeface="Estrangelo Edessa"/>
+        <a:font script="Orya" typeface="Kalinga"/>
+        <a:font script="Mlym" typeface="Kartika"/>
+        <a:font script="Laoo" typeface="DokChampa"/>
+        <a:font script="Sinh" typeface="Iskoola Pota"/>
+        <a:font script="Mong" typeface="Mongolian Baiti"/>
+        <a:font script="Viet" typeface="Arial"/>
+        <a:font script="Uigh" typeface="Microsoft Uighur"/>
+        <a:font script="Geor" typeface="Sylfaen"/>
+      </a:minorFont>
+    </a:fontScheme>
+    <a:fmtScheme name="Office">
+      <a:fillStyleLst>
+        <a:solidFill>
+          <a:schemeClr val="phClr"/>
+        </a:solidFill>
+        <a:gradFill rotWithShape="1">
+          <a:gsLst>
+            <a:gs pos="0">
+              <a:schemeClr val="phClr">
+                <a:tint val="50000"/>
+                <a:satMod val="300000"/>
+              </a:schemeClr>
+            </a:gs>
+            <a:gs pos="35000">
+              <a:schemeClr val="phClr">
+                <a:tint val="37000"/>
+                <a:satMod val="300000"/>
+              </a:schemeClr>
+            </a:gs>
+            <a:gs pos="100000">
+              <a:schemeClr val="phClr">
+                <a:tint val="15000"/>
+                <a:satMod val="350000"/>
+              </a:schemeClr>
+            </a:gs>
+          </a:gsLst>
+          <a:lin ang="16200000" scaled="1"/>
+        </a:gradFill>
+        <a:gradFill rotWithShape="1">
+          <a:gsLst>
+            <a:gs pos="0">
+              <a:schemeClr val="phClr">
+                <a:tint val="100000"/>
+                <a:shade val="100000"/>
+                <a:satMod val="130000"/>
+              </a:schemeClr>
+            </a:gs>
+            <a:gs pos="100000">
+              <a:schemeClr val="phClr">
+                <a:tint val="50000"/>
+                <a:shade val="100000"/>
+                <a:satMod val="350000"/>
+              </a:schemeClr>
+            </a:gs>
+          </a:gsLst>
+          <a:lin ang="16200000" scaled="0"/>
+        </a:gradFill>
+      </a:fillStyleLst>
+      <a:lnStyleLst>
+        <a:ln w="9525" cap="flat" cmpd="sng" algn="ctr">
+          <a:solidFill>
+            <a:schemeClr val="phClr">
+              <a:shade val="95000"/>
+              <a:satMod val="105000"/>
+            </a:schemeClr>
+          </a:solidFill>
+          <a:prstDash val="solid"/>
+        </a:ln>
+        <a:ln w="25400" cap="flat" cmpd="sng" algn="ctr">
+          <a:solidFill>
+            <a:schemeClr val="phClr"/>
+          </a:solidFill>
+          <a:prstDash val="solid"/>
+        </a:ln>
+        <a:ln w="38100" cap="flat" cmpd="sng" algn="ctr">
+          <a:solidFill>
+            <a:schemeClr val="phClr"/>
+          </a:solidFill>
+          <a:prstDash val="solid"/>
+        </a:ln>
+      </a:lnStyleLst>
+      <a:effectStyleLst>
+        <a:effectStyle>
+          <a:effectLst>
+            <a:outerShdw blurRad="40000" dist="20000" dir="5400000" rotWithShape="0">
+              <a:srgbClr val="000000">
+                <a:alpha val="38000"/>
+              </a:srgbClr>
+            </a:outerShdw>
+          </a:effectLst>
+        </a:effectStyle>
+        <a:effectStyle>
+          <a:effectLst>
+            <a:outerShdw blurRad="40000" dist="23000" dir="5400000" rotWithShape="0">
+              <a:srgbClr val="000000">
+                <a:alpha val="35000"/>
+              </a:srgbClr>
+            </a:outerShdw>
+          </a:effectLst>
+        </a:effectStyle>
+        <a:effectStyle>
+          <a:effectLst>
+            <a:outerShdw blurRad="40000" dist="23000" dir="5400000" rotWithShape="0">
+              <a:srgbClr val="000000">
+                <a:alpha val="35000"/>
+              </a:srgbClr>
+            </a:outerShdw>
+          </a:effectLst>
+          <a:scene3d>
+            <a:camera prst="orthographicFront">
+              <a:rot lat="0" lon="0" rev="0"/>
+            </a:camera>
+            <a:lightRig rig="threePt" dir="t">
+              <a:rot lat="0" lon="0" rev="1200000"/>
+            </a:lightRig>
+          </a:scene3d>
+          <a:sp3d>
+            <a:bevelT w="63500" h="25400"/>
+          </a:sp3d>
+        </a:effectStyle>
+      </a:effectStyleLst>
+      <a:bgFillStyleLst>
+        <a:solidFill>
+          <a:schemeClr val="phClr"/>
+        </a:solidFill>
+        <a:gradFill rotWithShape="1">
+          <a:gsLst>
+            <a:gs pos="0">
+              <a:schemeClr val="phClr">
+                <a:tint val="40000"/>
+                <a:satMod val="350000"/>
+              </a:schemeClr>
+            </a:gs>
+            <a:gs pos="40000">
+              <a:schemeClr val="phClr">
+                <a:tint val="45000"/>
+                <a:shade val="99000"/>
+                <a:satMod val="350000"/>
+              </a:schemeClr>
+            </a:gs>
+            <a:gs pos="100000">
+              <a:schemeClr val="phClr">
+                <a:shade val="20000"/>
+                <a:satMod val="255000"/>
+              </a:schemeClr>
+            </a:gs>
+          </a:gsLst>
+          <a:path path="circle">
+            <a:fillToRect l="50000" t="-80000" r="50000" b="180000"/>
+          </a:path>
+        </a:gradFill>
+        <a:gradFill rotWithShape="1">
+          <a:gsLst>
+            <a:gs pos="0">
+              <a:schemeClr val="phClr">
+                <a:tint val="80000"/>
+                <a:satMod val="300000"/>
+              </a:schemeClr>
+            </a:gs>
+            <a:gs pos="100000">
+              <a:schemeClr val="phClr">
+                <a:shade val="30000"/>
+                <a:satMod val="200000"/>
+              </a:schemeClr>
+            </a:gs>
+          </a:gsLst>
+          <a:path path="circle">
+            <a:fillToRect l="50000" t="50000" r="50000" b="50000"/>
+          </a:path>
+        </a:gradFill>
+      </a:bgFillStyleLst>
+    </a:fmtScheme>
+  </a:themeElements>
+</a:theme>
+</file>
+
+<file path=ppt/theme/theme2.xml><?xml version="1.0" encoding="utf-8"?>
 <a:theme xmlns:a="http://schemas.openxmlformats.org/drawingml/2006/main" xmlns:r="http://schemas.openxmlformats.org/officeDocument/2006/relationships">
   <a:themeElements>
     <a:clrScheme name="Default">
@@ -18095,283 +20589,4 @@
     </a:fmtScheme>
   </a:themeElements>
 </a:theme>
-</file>
-
-<file path=ppt/theme/theme2.xml><?xml version="1.0" encoding="utf-8"?>
-<a:theme xmlns:a="http://schemas.openxmlformats.org/drawingml/2006/main" xmlns:r="http://schemas.openxmlformats.org/officeDocument/2006/relationships" name="Simple Light">
-  <a:themeElements>
-    <a:clrScheme name="Simple Light">
-      <a:dk1>
-        <a:srgbClr val="000000"/>
-      </a:dk1>
-      <a:lt1>
-        <a:srgbClr val="FFFFFF"/>
-      </a:lt1>
-      <a:dk2>
-        <a:srgbClr val="595959"/>
-      </a:dk2>
-      <a:lt2>
-        <a:srgbClr val="EEEEEE"/>
-      </a:lt2>
-      <a:accent1>
-        <a:srgbClr val="4285F4"/>
-      </a:accent1>
-      <a:accent2>
-        <a:srgbClr val="212121"/>
-      </a:accent2>
-      <a:accent3>
-        <a:srgbClr val="78909C"/>
-      </a:accent3>
-      <a:accent4>
-        <a:srgbClr val="FFAB40"/>
-      </a:accent4>
-      <a:accent5>
-        <a:srgbClr val="0097A7"/>
-      </a:accent5>
-      <a:accent6>
-        <a:srgbClr val="EEFF41"/>
-      </a:accent6>
-      <a:hlink>
-        <a:srgbClr val="0097A7"/>
-      </a:hlink>
-      <a:folHlink>
-        <a:srgbClr val="0097A7"/>
-      </a:folHlink>
-    </a:clrScheme>
-    <a:fontScheme name="Office">
-      <a:majorFont>
-        <a:latin typeface="Arial"/>
-        <a:ea typeface=""/>
-        <a:cs typeface=""/>
-        <a:font script="Jpan" typeface="ＭＳ Ｐゴシック"/>
-        <a:font script="Hang" typeface="맑은 고딕"/>
-        <a:font script="Hans" typeface="宋体"/>
-        <a:font script="Hant" typeface="新細明體"/>
-        <a:font script="Arab" typeface="Times New Roman"/>
-        <a:font script="Hebr" typeface="Times New Roman"/>
-        <a:font script="Thai" typeface="Angsana New"/>
-        <a:font script="Ethi" typeface="Nyala"/>
-        <a:font script="Beng" typeface="Vrinda"/>
-        <a:font script="Gujr" typeface="Shruti"/>
-        <a:font script="Khmr" typeface="MoolBoran"/>
-        <a:font script="Knda" typeface="Tunga"/>
-        <a:font script="Guru" typeface="Raavi"/>
-        <a:font script="Cans" typeface="Euphemia"/>
-        <a:font script="Cher" typeface="Plantagenet Cherokee"/>
-        <a:font script="Yiii" typeface="Microsoft Yi Baiti"/>
-        <a:font script="Tibt" typeface="Microsoft Himalaya"/>
-        <a:font script="Thaa" typeface="MV Boli"/>
-        <a:font script="Deva" typeface="Mangal"/>
-        <a:font script="Telu" typeface="Gautami"/>
-        <a:font script="Taml" typeface="Latha"/>
-        <a:font script="Syrc" typeface="Estrangelo Edessa"/>
-        <a:font script="Orya" typeface="Kalinga"/>
-        <a:font script="Mlym" typeface="Kartika"/>
-        <a:font script="Laoo" typeface="DokChampa"/>
-        <a:font script="Sinh" typeface="Iskoola Pota"/>
-        <a:font script="Mong" typeface="Mongolian Baiti"/>
-        <a:font script="Viet" typeface="Times New Roman"/>
-        <a:font script="Uigh" typeface="Microsoft Uighur"/>
-        <a:font script="Geor" typeface="Sylfaen"/>
-      </a:majorFont>
-      <a:minorFont>
-        <a:latin typeface="Arial"/>
-        <a:ea typeface=""/>
-        <a:cs typeface=""/>
-        <a:font script="Jpan" typeface="ＭＳ Ｐゴシック"/>
-        <a:font script="Hang" typeface="맑은 고딕"/>
-        <a:font script="Hans" typeface="宋体"/>
-        <a:font script="Hant" typeface="新細明體"/>
-        <a:font script="Arab" typeface="Arial"/>
-        <a:font script="Hebr" typeface="Arial"/>
-        <a:font script="Thai" typeface="Cordia New"/>
-        <a:font script="Ethi" typeface="Nyala"/>
-        <a:font script="Beng" typeface="Vrinda"/>
-        <a:font script="Gujr" typeface="Shruti"/>
-        <a:font script="Khmr" typeface="DaunPenh"/>
-        <a:font script="Knda" typeface="Tunga"/>
-        <a:font script="Guru" typeface="Raavi"/>
-        <a:font script="Cans" typeface="Euphemia"/>
-        <a:font script="Cher" typeface="Plantagenet Cherokee"/>
-        <a:font script="Yiii" typeface="Microsoft Yi Baiti"/>
-        <a:font script="Tibt" typeface="Microsoft Himalaya"/>
-        <a:font script="Thaa" typeface="MV Boli"/>
-        <a:font script="Deva" typeface="Mangal"/>
-        <a:font script="Telu" typeface="Gautami"/>
-        <a:font script="Taml" typeface="Latha"/>
-        <a:font script="Syrc" typeface="Estrangelo Edessa"/>
-        <a:font script="Orya" typeface="Kalinga"/>
-        <a:font script="Mlym" typeface="Kartika"/>
-        <a:font script="Laoo" typeface="DokChampa"/>
-        <a:font script="Sinh" typeface="Iskoola Pota"/>
-        <a:font script="Mong" typeface="Mongolian Baiti"/>
-        <a:font script="Viet" typeface="Arial"/>
-        <a:font script="Uigh" typeface="Microsoft Uighur"/>
-        <a:font script="Geor" typeface="Sylfaen"/>
-      </a:minorFont>
-    </a:fontScheme>
-    <a:fmtScheme name="Office">
-      <a:fillStyleLst>
-        <a:solidFill>
-          <a:schemeClr val="phClr"/>
-        </a:solidFill>
-        <a:gradFill rotWithShape="1">
-          <a:gsLst>
-            <a:gs pos="0">
-              <a:schemeClr val="phClr">
-                <a:tint val="50000"/>
-                <a:satMod val="300000"/>
-              </a:schemeClr>
-            </a:gs>
-            <a:gs pos="35000">
-              <a:schemeClr val="phClr">
-                <a:tint val="37000"/>
-                <a:satMod val="300000"/>
-              </a:schemeClr>
-            </a:gs>
-            <a:gs pos="100000">
-              <a:schemeClr val="phClr">
-                <a:tint val="15000"/>
-                <a:satMod val="350000"/>
-              </a:schemeClr>
-            </a:gs>
-          </a:gsLst>
-          <a:lin ang="16200000" scaled="1"/>
-        </a:gradFill>
-        <a:gradFill rotWithShape="1">
-          <a:gsLst>
-            <a:gs pos="0">
-              <a:schemeClr val="phClr">
-                <a:tint val="100000"/>
-                <a:shade val="100000"/>
-                <a:satMod val="130000"/>
-              </a:schemeClr>
-            </a:gs>
-            <a:gs pos="100000">
-              <a:schemeClr val="phClr">
-                <a:tint val="50000"/>
-                <a:shade val="100000"/>
-                <a:satMod val="350000"/>
-              </a:schemeClr>
-            </a:gs>
-          </a:gsLst>
-          <a:lin ang="16200000" scaled="0"/>
-        </a:gradFill>
-      </a:fillStyleLst>
-      <a:lnStyleLst>
-        <a:ln w="9525" cap="flat" cmpd="sng" algn="ctr">
-          <a:solidFill>
-            <a:schemeClr val="phClr">
-              <a:shade val="95000"/>
-              <a:satMod val="105000"/>
-            </a:schemeClr>
-          </a:solidFill>
-          <a:prstDash val="solid"/>
-        </a:ln>
-        <a:ln w="25400" cap="flat" cmpd="sng" algn="ctr">
-          <a:solidFill>
-            <a:schemeClr val="phClr"/>
-          </a:solidFill>
-          <a:prstDash val="solid"/>
-        </a:ln>
-        <a:ln w="38100" cap="flat" cmpd="sng" algn="ctr">
-          <a:solidFill>
-            <a:schemeClr val="phClr"/>
-          </a:solidFill>
-          <a:prstDash val="solid"/>
-        </a:ln>
-      </a:lnStyleLst>
-      <a:effectStyleLst>
-        <a:effectStyle>
-          <a:effectLst>
-            <a:outerShdw blurRad="40000" dist="20000" dir="5400000" rotWithShape="0">
-              <a:srgbClr val="000000">
-                <a:alpha val="38000"/>
-              </a:srgbClr>
-            </a:outerShdw>
-          </a:effectLst>
-        </a:effectStyle>
-        <a:effectStyle>
-          <a:effectLst>
-            <a:outerShdw blurRad="40000" dist="23000" dir="5400000" rotWithShape="0">
-              <a:srgbClr val="000000">
-                <a:alpha val="35000"/>
-              </a:srgbClr>
-            </a:outerShdw>
-          </a:effectLst>
-        </a:effectStyle>
-        <a:effectStyle>
-          <a:effectLst>
-            <a:outerShdw blurRad="40000" dist="23000" dir="5400000" rotWithShape="0">
-              <a:srgbClr val="000000">
-                <a:alpha val="35000"/>
-              </a:srgbClr>
-            </a:outerShdw>
-          </a:effectLst>
-          <a:scene3d>
-            <a:camera prst="orthographicFront">
-              <a:rot lat="0" lon="0" rev="0"/>
-            </a:camera>
-            <a:lightRig rig="threePt" dir="t">
-              <a:rot lat="0" lon="0" rev="1200000"/>
-            </a:lightRig>
-          </a:scene3d>
-          <a:sp3d>
-            <a:bevelT w="63500" h="25400"/>
-          </a:sp3d>
-        </a:effectStyle>
-      </a:effectStyleLst>
-      <a:bgFillStyleLst>
-        <a:solidFill>
-          <a:schemeClr val="phClr"/>
-        </a:solidFill>
-        <a:gradFill rotWithShape="1">
-          <a:gsLst>
-            <a:gs pos="0">
-              <a:schemeClr val="phClr">
-                <a:tint val="40000"/>
-                <a:satMod val="350000"/>
-              </a:schemeClr>
-            </a:gs>
-            <a:gs pos="40000">
-              <a:schemeClr val="phClr">
-                <a:tint val="45000"/>
-                <a:shade val="99000"/>
-                <a:satMod val="350000"/>
-              </a:schemeClr>
-            </a:gs>
-            <a:gs pos="100000">
-              <a:schemeClr val="phClr">
-                <a:shade val="20000"/>
-                <a:satMod val="255000"/>
-              </a:schemeClr>
-            </a:gs>
-          </a:gsLst>
-          <a:path path="circle">
-            <a:fillToRect l="50000" t="-80000" r="50000" b="180000"/>
-          </a:path>
-        </a:gradFill>
-        <a:gradFill rotWithShape="1">
-          <a:gsLst>
-            <a:gs pos="0">
-              <a:schemeClr val="phClr">
-                <a:tint val="80000"/>
-                <a:satMod val="300000"/>
-              </a:schemeClr>
-            </a:gs>
-            <a:gs pos="100000">
-              <a:schemeClr val="phClr">
-                <a:shade val="30000"/>
-                <a:satMod val="200000"/>
-              </a:schemeClr>
-            </a:gs>
-          </a:gsLst>
-          <a:path path="circle">
-            <a:fillToRect l="50000" t="50000" r="50000" b="50000"/>
-          </a:path>
-        </a:gradFill>
-      </a:bgFillStyleLst>
-    </a:fmtScheme>
-  </a:themeElements>
-</a:theme>
 </file>